--- a/outputs/qae_robustness/deck/20260904_GSoC.pptx
+++ b/outputs/qae_robustness/deck/20260904_GSoC.pptx
@@ -3158,7 +3158,7 @@
               </a:spcAft>
             </a:pPr>
             <a:r>
-              <a:rPr sz="3600" b="1" i="0">
+              <a:rPr sz="3800" b="1" i="0">
                 <a:solidFill>
                   <a:srgbClr val="FFFFFF"/>
                 </a:solidFill>
@@ -3177,7 +3177,7 @@
               </a:spcAft>
             </a:pPr>
             <a:r>
-              <a:rPr sz="3600" b="1" i="0">
+              <a:rPr sz="3800" b="1" i="0">
                 <a:solidFill>
                   <a:srgbClr val="FFFFFF"/>
                 </a:solidFill>
@@ -3196,8 +3196,8 @@
         </p:nvSpPr>
         <p:spPr>
           <a:xfrm>
-            <a:off x="822960" y="2606040"/>
-            <a:ext cx="10607040" cy="685800"/>
+            <a:off x="822960" y="2651760"/>
+            <a:ext cx="10607040" cy="640080"/>
           </a:xfrm>
           <a:prstGeom prst="rect">
             <a:avLst/>
@@ -3215,11 +3215,11 @@
                 <a:spcPct val="100000"/>
               </a:lnSpc>
               <a:spcAft>
-                <a:spcPts val="400"/>
-              </a:spcAft>
-            </a:pPr>
-            <a:r>
-              <a:rPr sz="1600" b="0" i="0">
+                <a:spcPts val="500"/>
+              </a:spcAft>
+            </a:pPr>
+            <a:r>
+              <a:rPr sz="1700" b="0" i="0">
                 <a:solidFill>
                   <a:srgbClr val="C8D4EC"/>
                 </a:solidFill>
@@ -3238,8 +3238,8 @@
         </p:nvSpPr>
         <p:spPr>
           <a:xfrm>
-            <a:off x="822960" y="3383280"/>
-            <a:ext cx="10607040" cy="1783080"/>
+            <a:off x="822960" y="3429000"/>
+            <a:ext cx="10607040" cy="1828800"/>
           </a:xfrm>
           <a:prstGeom prst="roundRect">
             <a:avLst/>
@@ -3270,8 +3270,8 @@
         </p:nvSpPr>
         <p:spPr>
           <a:xfrm>
-            <a:off x="1024128" y="3474720"/>
-            <a:ext cx="10241280" cy="1645920"/>
+            <a:off x="1051560" y="3547872"/>
+            <a:ext cx="10149840" cy="1645920"/>
           </a:xfrm>
           <a:prstGeom prst="rect">
             <a:avLst/>
@@ -3289,11 +3289,11 @@
                 <a:spcPct val="100000"/>
               </a:lnSpc>
               <a:spcAft>
-                <a:spcPts val="600"/>
-              </a:spcAft>
-            </a:pPr>
-            <a:r>
-              <a:rPr sz="1350" b="1" i="0">
+                <a:spcPts val="700"/>
+              </a:spcAft>
+            </a:pPr>
+            <a:r>
+              <a:rPr sz="1500" b="1" i="0">
                 <a:solidFill>
                   <a:srgbClr val="F9AB00"/>
                 </a:solidFill>
@@ -3302,13 +3302,13 @@
               <a:t>Baseline finding:  </a:t>
             </a:r>
             <a:r>
-              <a:rPr sz="1350" b="0" i="0">
+              <a:rPr sz="1500" b="0" i="0">
                 <a:solidFill>
                   <a:srgbClr val="FFFFFF"/>
                 </a:solidFill>
                 <a:latin typeface="Helvetica Neue"/>
               </a:rPr>
-              <a:t>physics-informed language-model proposals beat random and greedy circuit search by a wide margin, and a closed feedback loop added a small extra gain.</a:t>
+              <a:t>physics-informed language-model proposals beat random and greedy circuit search by a wide margin; a closed feedback loop added a small extra gain.</a:t>
             </a:r>
           </a:p>
           <a:p>
@@ -3317,20 +3317,20 @@
                 <a:spcPct val="100000"/>
               </a:lnSpc>
               <a:spcAft>
-                <a:spcPts val="600"/>
-              </a:spcAft>
-            </a:pPr>
-            <a:r>
-              <a:rPr sz="1350" b="1" i="0">
+                <a:spcPts val="700"/>
+              </a:spcAft>
+            </a:pPr>
+            <a:r>
+              <a:rPr sz="1500" b="1" i="0">
                 <a:solidFill>
                   <a:srgbClr val="F9AB00"/>
                 </a:solidFill>
                 <a:latin typeface="Helvetica Neue"/>
               </a:rPr>
-              <a:t>Four factors tested, one at a time:  </a:t>
-            </a:r>
-            <a:r>
-              <a:rPr sz="1350" b="0" i="0">
+              <a:t>Four factors, one at a time:  </a:t>
+            </a:r>
+            <a:r>
+              <a:rPr sz="1500" b="0" i="0">
                 <a:solidFill>
                   <a:srgbClr val="FFFFFF"/>
                 </a:solidFill>
@@ -3345,11 +3345,11 @@
                 <a:spcPct val="100000"/>
               </a:lnSpc>
               <a:spcAft>
-                <a:spcPts val="600"/>
-              </a:spcAft>
-            </a:pPr>
-            <a:r>
-              <a:rPr sz="1350" b="1" i="0">
+                <a:spcPts val="700"/>
+              </a:spcAft>
+            </a:pPr>
+            <a:r>
+              <a:rPr sz="1500" b="1" i="0">
                 <a:solidFill>
                   <a:srgbClr val="FFFFFF"/>
                 </a:solidFill>
@@ -3368,7 +3368,7 @@
         </p:nvSpPr>
         <p:spPr>
           <a:xfrm>
-            <a:off x="822960" y="5440680"/>
+            <a:off x="822960" y="5486400"/>
             <a:ext cx="10515600" cy="914400"/>
           </a:xfrm>
           <a:prstGeom prst="rect">
@@ -3416,26 +3416,7 @@
                 </a:solidFill>
                 <a:latin typeface="Helvetica Neue"/>
               </a:rPr>
-              <a:t>ML4SCI / Google Summer of Code 2026</a:t>
-            </a:r>
-          </a:p>
-          <a:p>
-            <a:pPr>
-              <a:lnSpc>
-                <a:spcPct val="100000"/>
-              </a:lnSpc>
-              <a:spcAft>
-                <a:spcPts val="200"/>
-              </a:spcAft>
-            </a:pPr>
-            <a:r>
-              <a:rPr sz="1100" b="0" i="0">
-                <a:solidFill>
-                  <a:srgbClr val="9AA8C8"/>
-                </a:solidFill>
-                <a:latin typeface="Helvetica Neue"/>
-              </a:rPr>
-              <a:t>September 4, 2026</a:t>
+              <a:t>ML4SCI / Google Summer of Code 2026  ·  September 4, 2026</a:t>
             </a:r>
           </a:p>
         </p:txBody>
@@ -3489,7 +3470,7 @@
               </a:spcAft>
             </a:pPr>
             <a:r>
-              <a:rPr sz="1100" b="1" i="0">
+              <a:rPr sz="1150" b="1" i="0">
                 <a:solidFill>
                   <a:srgbClr val="C5221F"/>
                 </a:solidFill>
@@ -3509,7 +3490,7 @@
         <p:spPr>
           <a:xfrm>
             <a:off x="502920" y="512064"/>
-            <a:ext cx="11155680" cy="457200"/>
+            <a:ext cx="11155680" cy="475488"/>
           </a:xfrm>
           <a:prstGeom prst="rect">
             <a:avLst/>
@@ -3531,7 +3512,7 @@
               </a:spcAft>
             </a:pPr>
             <a:r>
-              <a:rPr sz="2400" b="1" i="0">
+              <a:rPr sz="2600" b="1" i="0">
                 <a:solidFill>
                   <a:srgbClr val="1F2A44"/>
                 </a:solidFill>
@@ -3550,7 +3531,7 @@
         </p:nvSpPr>
         <p:spPr>
           <a:xfrm>
-            <a:off x="502920" y="1005840"/>
+            <a:off x="502920" y="1024128"/>
             <a:ext cx="11155680" cy="347472"/>
           </a:xfrm>
           <a:prstGeom prst="rect">
@@ -3573,7 +3554,7 @@
               </a:spcAft>
             </a:pPr>
             <a:r>
-              <a:rPr sz="1100" b="0" i="0">
+              <a:rPr sz="1200" b="0" i="0">
                 <a:solidFill>
                   <a:srgbClr val="5F6368"/>
                 </a:solidFill>
@@ -3592,8 +3573,8 @@
         </p:nvSpPr>
         <p:spPr>
           <a:xfrm>
-            <a:off x="502920" y="1417320"/>
-            <a:ext cx="4206240" cy="960120"/>
+            <a:off x="502920" y="1463040"/>
+            <a:ext cx="4297680" cy="1060704"/>
           </a:xfrm>
           <a:prstGeom prst="roundRect">
             <a:avLst/>
@@ -3624,8 +3605,8 @@
         </p:nvSpPr>
         <p:spPr>
           <a:xfrm>
-            <a:off x="630936" y="1490472"/>
-            <a:ext cx="3950208" cy="813816"/>
+            <a:off x="649224" y="1554480"/>
+            <a:ext cx="4005072" cy="877824"/>
           </a:xfrm>
           <a:prstGeom prst="rect">
             <a:avLst/>
@@ -3643,11 +3624,11 @@
                 <a:spcPct val="100000"/>
               </a:lnSpc>
               <a:spcAft>
-                <a:spcPts val="300"/>
-              </a:spcAft>
-            </a:pPr>
-            <a:r>
-              <a:rPr sz="1200" b="1" i="0">
+                <a:spcPts val="400"/>
+              </a:spcAft>
+            </a:pPr>
+            <a:r>
+              <a:rPr sz="1350" b="1" i="0">
                 <a:solidFill>
                   <a:srgbClr val="188038"/>
                 </a:solidFill>
@@ -3662,17 +3643,17 @@
                 <a:spcPct val="100000"/>
               </a:lnSpc>
               <a:spcAft>
-                <a:spcPts val="300"/>
-              </a:spcAft>
-            </a:pPr>
-            <a:r>
-              <a:rPr sz="1000" b="0" i="0">
+                <a:spcPts val="400"/>
+              </a:spcAft>
+            </a:pPr>
+            <a:r>
+              <a:rPr sz="1200" b="0" i="0">
                 <a:solidFill>
                   <a:srgbClr val="202124"/>
                 </a:solidFill>
                 <a:latin typeface="Helvetica Neue"/>
               </a:rPr>
-              <a:t>Physics-informed Open proposals remain better than non-semantic search across the tested one-factor slices.</a:t>
+              <a:t>Physics-informed Open proposals beat non-semantic search across the tested one-factor slices.</a:t>
             </a:r>
           </a:p>
         </p:txBody>
@@ -3685,8 +3666,8 @@
         </p:nvSpPr>
         <p:spPr>
           <a:xfrm>
-            <a:off x="502920" y="2468880"/>
-            <a:ext cx="4206240" cy="960120"/>
+            <a:off x="502920" y="2633472"/>
+            <a:ext cx="4297680" cy="1060704"/>
           </a:xfrm>
           <a:prstGeom prst="roundRect">
             <a:avLst/>
@@ -3717,8 +3698,8 @@
         </p:nvSpPr>
         <p:spPr>
           <a:xfrm>
-            <a:off x="630936" y="2542032"/>
-            <a:ext cx="3950208" cy="813816"/>
+            <a:off x="649224" y="2724912"/>
+            <a:ext cx="4005072" cy="877824"/>
           </a:xfrm>
           <a:prstGeom prst="rect">
             <a:avLst/>
@@ -3736,11 +3717,11 @@
                 <a:spcPct val="100000"/>
               </a:lnSpc>
               <a:spcAft>
-                <a:spcPts val="300"/>
-              </a:spcAft>
-            </a:pPr>
-            <a:r>
-              <a:rPr sz="1200" b="1" i="0">
+                <a:spcPts val="400"/>
+              </a:spcAft>
+            </a:pPr>
+            <a:r>
+              <a:rPr sz="1350" b="1" i="0">
                 <a:solidFill>
                   <a:srgbClr val="D93025"/>
                 </a:solidFill>
@@ -3755,17 +3736,17 @@
                 <a:spcPct val="100000"/>
               </a:lnSpc>
               <a:spcAft>
-                <a:spcPts val="300"/>
-              </a:spcAft>
-            </a:pPr>
-            <a:r>
-              <a:rPr sz="1000" b="0" i="0">
+                <a:spcPts val="400"/>
+              </a:spcAft>
+            </a:pPr>
+            <a:r>
+              <a:rPr sz="1200" b="0" i="0">
                 <a:solidFill>
                   <a:srgbClr val="202124"/>
                 </a:solidFill>
                 <a:latin typeface="Helvetica Neue"/>
               </a:rPr>
-              <a:t>The closed-loop advantage is not a general result: it changes with budget, width, Hamiltonian and model tier.</a:t>
+              <a:t>The closed-loop advantage is not general: it changes with budget, width, Hamiltonian and model tier.</a:t>
             </a:r>
           </a:p>
         </p:txBody>
@@ -3778,8 +3759,8 @@
         </p:nvSpPr>
         <p:spPr>
           <a:xfrm>
-            <a:off x="502920" y="3520439"/>
-            <a:ext cx="4206240" cy="960120"/>
+            <a:off x="502920" y="3803904"/>
+            <a:ext cx="4297680" cy="1060704"/>
           </a:xfrm>
           <a:prstGeom prst="roundRect">
             <a:avLst/>
@@ -3810,8 +3791,8 @@
         </p:nvSpPr>
         <p:spPr>
           <a:xfrm>
-            <a:off x="630936" y="3593591"/>
-            <a:ext cx="3950208" cy="813816"/>
+            <a:off x="649224" y="3895344"/>
+            <a:ext cx="4005072" cy="877824"/>
           </a:xfrm>
           <a:prstGeom prst="rect">
             <a:avLst/>
@@ -3829,11 +3810,11 @@
                 <a:spcPct val="100000"/>
               </a:lnSpc>
               <a:spcAft>
-                <a:spcPts val="300"/>
-              </a:spcAft>
-            </a:pPr>
-            <a:r>
-              <a:rPr sz="1200" b="1" i="0">
+                <a:spcPts val="400"/>
+              </a:spcAft>
+            </a:pPr>
+            <a:r>
+              <a:rPr sz="1350" b="1" i="0">
                 <a:solidFill>
                   <a:srgbClr val="F9AB00"/>
                 </a:solidFill>
@@ -3848,17 +3829,17 @@
                 <a:spcPct val="100000"/>
               </a:lnSpc>
               <a:spcAft>
-                <a:spcPts val="300"/>
-              </a:spcAft>
-            </a:pPr>
-            <a:r>
-              <a:rPr sz="1000" b="0" i="0">
+                <a:spcPts val="400"/>
+              </a:spcAft>
+            </a:pPr>
+            <a:r>
+              <a:rPr sz="1200" b="0" i="0">
                 <a:solidFill>
                   <a:srgbClr val="202124"/>
                 </a:solidFill>
                 <a:latin typeface="Helvetica Neue"/>
               </a:rPr>
-              <a:t>Valid circuit generation must be separated from architecture quality — an invalid proposal is spent as a random draw.</a:t>
+              <a:t>Valid circuit generation must be separated from architecture quality.</a:t>
             </a:r>
           </a:p>
         </p:txBody>
@@ -3871,8 +3852,8 @@
         </p:nvSpPr>
         <p:spPr>
           <a:xfrm>
-            <a:off x="4937760" y="1417320"/>
-            <a:ext cx="6720840" cy="4846320"/>
+            <a:off x="5029200" y="1463040"/>
+            <a:ext cx="6629400" cy="4343400"/>
           </a:xfrm>
           <a:prstGeom prst="roundRect">
             <a:avLst/>
@@ -3903,8 +3884,8 @@
         </p:nvSpPr>
         <p:spPr>
           <a:xfrm>
-            <a:off x="5102352" y="1481328"/>
-            <a:ext cx="6400800" cy="4754880"/>
+            <a:off x="5193792" y="1536192"/>
+            <a:ext cx="6309360" cy="4206240"/>
           </a:xfrm>
           <a:prstGeom prst="rect">
             <a:avLst/>
@@ -3926,13 +3907,13 @@
               </a:spcAft>
             </a:pPr>
             <a:r>
-              <a:rPr sz="1200" b="1" i="0">
+              <a:rPr sz="1350" b="1" i="0">
                 <a:solidFill>
                   <a:srgbClr val="1A73E8"/>
                 </a:solidFill>
                 <a:latin typeface="Helvetica Neue"/>
               </a:rPr>
-              <a:t>Next experiment — the minimum budget for a target fidelity</a:t>
+              <a:t>Next experiment: the minimum budget for a target fidelity</a:t>
             </a:r>
           </a:p>
           <a:p>
@@ -3945,22 +3926,51 @@
               </a:spcAft>
             </a:pPr>
             <a:r>
-              <a:rPr sz="1000" b="1" i="0">
+              <a:rPr sz="1150" b="0" i="0">
                 <a:solidFill>
                   <a:srgbClr val="202124"/>
                 </a:solidFill>
                 <a:latin typeface="Helvetica Neue"/>
               </a:rPr>
-              <a:t>Define before running: </a:t>
-            </a:r>
-            <a:r>
-              <a:rPr sz="1000" b="0" i="0">
+              <a:t>Before running, fix a target validation fidelity F_target (candidates 0.95 and 0.99). B_min = the smallest budget reaching F_target in at least 10 of the 12 paired seeds — chosen on validation; the held-out test is read only after B_min is selected.</a:t>
+            </a:r>
+          </a:p>
+          <a:p>
+            <a:pPr>
+              <a:lnSpc>
+                <a:spcPct val="100000"/>
+              </a:lnSpc>
+              <a:spcAft>
+                <a:spcPts val="400"/>
+              </a:spcAft>
+            </a:pPr>
+            <a:r>
+              <a:rPr sz="1150" b="1" i="0">
+                <a:solidFill>
+                  <a:srgbClr val="1F2A44"/>
+                </a:solidFill>
+                <a:latin typeface="Helvetica Neue"/>
+              </a:rPr>
+              <a:t>API-minimising procedure</a:t>
+            </a:r>
+          </a:p>
+          <a:p>
+            <a:pPr>
+              <a:lnSpc>
+                <a:spcPct val="100000"/>
+              </a:lnSpc>
+              <a:spcAft>
+                <a:spcPts val="400"/>
+              </a:spcAft>
+            </a:pPr>
+            <a:r>
+              <a:rPr sz="1150" b="0" i="0">
                 <a:solidFill>
                   <a:srgbClr val="202124"/>
                 </a:solidFill>
                 <a:latin typeface="Helvetica Neue"/>
               </a:rPr>
-              <a:t>a target validation fidelity F_target (candidate targets 0.95 and 0.99). B_min = the smallest budget that reaches F_target in at least 10 of the 12 paired seeds. B_min is determined on validation data; the held-out test is read only after B_min is selected.</a:t>
+              <a:t>1  Reanalyse the existing logs first — no new calls.</a:t>
             </a:r>
           </a:p>
           <a:p>
@@ -3973,13 +3983,13 @@
               </a:spcAft>
             </a:pPr>
             <a:r>
-              <a:rPr sz="1000" b="1" i="0">
-                <a:solidFill>
-                  <a:srgbClr val="1F2A44"/>
-                </a:solidFill>
-                <a:latin typeface="Helvetica Neue"/>
-              </a:rPr>
-              <a:t>API-minimising procedure</a:t>
+              <a:rPr sz="1150" b="0" i="0">
+                <a:solidFill>
+                  <a:srgbClr val="202124"/>
+                </a:solidFill>
+                <a:latin typeface="Helvetica Neue"/>
+              </a:rPr>
+              <a:t>2  Build best-so-far validation curves versus candidate count from those logs.</a:t>
             </a:r>
           </a:p>
           <a:p>
@@ -3992,13 +4002,13 @@
               </a:spcAft>
             </a:pPr>
             <a:r>
-              <a:rPr sz="1000" b="0" i="0">
+              <a:rPr sz="1150" b="0" i="0">
                 <a:solidFill>
                   <a:srgbClr val="202124"/>
                 </a:solidFill>
                 <a:latin typeface="Helvetica Neue"/>
               </a:rPr>
-              <a:t>1  Reanalyse the existing logs first — no new calls.</a:t>
+              <a:t>3  Check whether each target is already reached by B = 4, 8 or 16.</a:t>
             </a:r>
           </a:p>
           <a:p>
@@ -4011,13 +4021,13 @@
               </a:spcAft>
             </a:pPr>
             <a:r>
-              <a:rPr sz="1000" b="0" i="0">
+              <a:rPr sz="1150" b="0" i="0">
                 <a:solidFill>
                   <a:srgbClr val="202124"/>
                 </a:solidFill>
                 <a:latin typeface="Helvetica Neue"/>
               </a:rPr>
-              <a:t>2  Build best-so-far validation-fidelity curves versus candidate-evaluation count from those logs.</a:t>
+              <a:t>4  Keep only the conditions whose B_min is unresolved.</a:t>
             </a:r>
           </a:p>
           <a:p>
@@ -4030,13 +4040,13 @@
               </a:spcAft>
             </a:pPr>
             <a:r>
-              <a:rPr sz="1000" b="0" i="0">
+              <a:rPr sz="1150" b="0" i="0">
                 <a:solidFill>
                   <a:srgbClr val="202124"/>
                 </a:solidFill>
                 <a:latin typeface="Helvetica Neue"/>
               </a:rPr>
-              <a:t>3  Estimate whether each target is already reached by B = 4, 8 or 16.</a:t>
+              <a:t>5  Run new LLM calls only at the nearest bracketing budget for those.</a:t>
             </a:r>
           </a:p>
           <a:p>
@@ -4049,13 +4059,13 @@
               </a:spcAft>
             </a:pPr>
             <a:r>
-              <a:rPr sz="1000" b="0" i="0">
+              <a:rPr sz="1150" b="0" i="0">
                 <a:solidFill>
                   <a:srgbClr val="202124"/>
                 </a:solidFill>
                 <a:latin typeface="Helvetica Neue"/>
               </a:rPr>
-              <a:t>4  Identify only the conditions whose B_min remains unresolved.</a:t>
+              <a:t>6  Preserve the same 12 paired seeds for any confirmatory run.</a:t>
             </a:r>
           </a:p>
           <a:p>
@@ -4068,13 +4078,13 @@
               </a:spcAft>
             </a:pPr>
             <a:r>
-              <a:rPr sz="1000" b="0" i="0">
+              <a:rPr sz="1150" b="0" i="0">
                 <a:solidFill>
                   <a:srgbClr val="202124"/>
                 </a:solidFill>
                 <a:latin typeface="Helvetica Neue"/>
               </a:rPr>
-              <a:t>5  Run new LLM calls only at the nearest bracketing budget for those unresolved conditions.</a:t>
+              <a:t>7  Report an interval for B_min where the exact minimum would cost too much.</a:t>
             </a:r>
           </a:p>
           <a:p>
@@ -4087,51 +4097,13 @@
               </a:spcAft>
             </a:pPr>
             <a:r>
-              <a:rPr sz="1000" b="0" i="0">
-                <a:solidFill>
-                  <a:srgbClr val="202124"/>
-                </a:solidFill>
-                <a:latin typeface="Helvetica Neue"/>
-              </a:rPr>
-              <a:t>6  Preserve the same 12 paired seeds for any new confirmatory run.</a:t>
-            </a:r>
-          </a:p>
-          <a:p>
-            <a:pPr>
-              <a:lnSpc>
-                <a:spcPct val="100000"/>
-              </a:lnSpc>
-              <a:spcAft>
-                <a:spcPts val="400"/>
-              </a:spcAft>
-            </a:pPr>
-            <a:r>
-              <a:rPr sz="1000" b="0" i="0">
-                <a:solidFill>
-                  <a:srgbClr val="202124"/>
-                </a:solidFill>
-                <a:latin typeface="Helvetica Neue"/>
-              </a:rPr>
-              <a:t>7  Report an interval for B_min when the exact minimum cannot be identified without excessive API cost.</a:t>
-            </a:r>
-          </a:p>
-          <a:p>
-            <a:pPr>
-              <a:lnSpc>
-                <a:spcPct val="100000"/>
-              </a:lnSpc>
-              <a:spcAft>
-                <a:spcPts val="400"/>
-              </a:spcAft>
-            </a:pPr>
-            <a:r>
-              <a:rPr sz="1000" b="1" i="0">
+              <a:rPr sz="1150" b="1" i="0">
                 <a:solidFill>
                   <a:srgbClr val="C5221F"/>
                 </a:solidFill>
                 <a:latin typeface="Helvetica Neue"/>
               </a:rPr>
-              <a:t>Not proposed: a blind full sweep over every Hamiltonian, qubit count, model, method and budget. The practical next step is targeted boundary-finding, not factorial completion.</a:t>
+              <a:t>Not a blind full sweep — targeted boundary-finding, not factorial completion.</a:t>
             </a:r>
           </a:p>
         </p:txBody>
@@ -4144,8 +4116,8 @@
         </p:nvSpPr>
         <p:spPr>
           <a:xfrm>
-            <a:off x="502920" y="4663440"/>
-            <a:ext cx="4206240" cy="1554480"/>
+            <a:off x="502920" y="5029200"/>
+            <a:ext cx="4297680" cy="822960"/>
           </a:xfrm>
           <a:prstGeom prst="rect">
             <a:avLst/>
@@ -4167,22 +4139,22 @@
               </a:spcAft>
             </a:pPr>
             <a:r>
-              <a:rPr sz="1000" b="1" i="0">
+              <a:rPr sz="1150" b="1" i="0">
                 <a:solidFill>
                   <a:srgbClr val="1F2A44"/>
                 </a:solidFill>
                 <a:latin typeface="Helvetica Neue"/>
               </a:rPr>
-              <a:t>Why this matters: </a:t>
-            </a:r>
-            <a:r>
-              <a:rPr sz="1000" b="0" i="0">
+              <a:t>Why: </a:t>
+            </a:r>
+            <a:r>
+              <a:rPr sz="1150" b="0" i="0">
                 <a:solidFill>
                   <a:srgbClr val="202124"/>
                 </a:solidFill>
                 <a:latin typeface="Helvetica Neue"/>
               </a:rPr>
-              <a:t>every comparison so far ranks methods at a fixed B. The question that decides whether any of this is worth using is the reverse — the budget each method needs to reach the accuracy the application requires.</a:t>
+              <a:t>every comparison so far ranks methods at a fixed B; what decides practical use is the budget needed to reach the required accuracy.</a:t>
             </a:r>
           </a:p>
         </p:txBody>
@@ -4195,8 +4167,8 @@
         </p:nvSpPr>
         <p:spPr>
           <a:xfrm>
-            <a:off x="502920" y="6400800"/>
-            <a:ext cx="11155680" cy="320040"/>
+            <a:off x="502920" y="6419088"/>
+            <a:ext cx="11155680" cy="301752"/>
           </a:xfrm>
           <a:prstGeom prst="rect">
             <a:avLst/>
@@ -4218,7 +4190,7 @@
               </a:spcAft>
             </a:pPr>
             <a:r>
-              <a:rPr sz="850" b="0" i="0">
+              <a:rPr sz="950" b="0" i="0">
                 <a:solidFill>
                   <a:srgbClr val="5F6368"/>
                 </a:solidFill>
@@ -4278,7 +4250,7 @@
               </a:spcAft>
             </a:pPr>
             <a:r>
-              <a:rPr sz="1100" b="1" i="0">
+              <a:rPr sz="1150" b="1" i="0">
                 <a:solidFill>
                   <a:srgbClr val="C5221F"/>
                 </a:solidFill>
@@ -4298,7 +4270,7 @@
         <p:spPr>
           <a:xfrm>
             <a:off x="502920" y="512064"/>
-            <a:ext cx="11155680" cy="457200"/>
+            <a:ext cx="11155680" cy="475488"/>
           </a:xfrm>
           <a:prstGeom prst="rect">
             <a:avLst/>
@@ -4320,7 +4292,7 @@
               </a:spcAft>
             </a:pPr>
             <a:r>
-              <a:rPr sz="2400" b="1" i="0">
+              <a:rPr sz="2600" b="1" i="0">
                 <a:solidFill>
                   <a:srgbClr val="1F2A44"/>
                 </a:solidFill>
@@ -4339,7 +4311,7 @@
         </p:nvSpPr>
         <p:spPr>
           <a:xfrm>
-            <a:off x="502920" y="1005840"/>
+            <a:off x="502920" y="1024128"/>
             <a:ext cx="11155680" cy="347472"/>
           </a:xfrm>
           <a:prstGeom prst="rect">
@@ -4362,13 +4334,13 @@
               </a:spcAft>
             </a:pPr>
             <a:r>
-              <a:rPr sz="1100" b="0" i="0">
+              <a:rPr sz="1200" b="0" i="0">
                 <a:solidFill>
                   <a:srgbClr val="5F6368"/>
                 </a:solidFill>
                 <a:latin typeface="Helvetica Neue"/>
               </a:rPr>
-              <a:t>Quantum autoencoder (QAE): compress ground states into fewer qubits — 4 qubits · Ising chain · B = 8 · High model tier · 12 paired seeds</a:t>
+              <a:t>Quantum autoencoder (QAE): compress ground states into fewer qubits  ·  4 qubits · Ising chain · B = 8 · High model tier · 12 paired seeds</a:t>
             </a:r>
           </a:p>
         </p:txBody>
@@ -4381,8 +4353,8 @@
         </p:nvSpPr>
         <p:spPr>
           <a:xfrm>
-            <a:off x="502920" y="1417320"/>
-            <a:ext cx="3246120" cy="841248"/>
+            <a:off x="502920" y="1463040"/>
+            <a:ext cx="3383280" cy="868680"/>
           </a:xfrm>
           <a:prstGeom prst="roundRect">
             <a:avLst/>
@@ -4413,8 +4385,8 @@
         </p:nvSpPr>
         <p:spPr>
           <a:xfrm>
-            <a:off x="630936" y="1490472"/>
-            <a:ext cx="2990088" cy="694944"/>
+            <a:off x="649224" y="1554480"/>
+            <a:ext cx="3090672" cy="685800"/>
           </a:xfrm>
           <a:prstGeom prst="rect">
             <a:avLst/>
@@ -4432,17 +4404,17 @@
                 <a:spcPct val="100000"/>
               </a:lnSpc>
               <a:spcAft>
-                <a:spcPts val="300"/>
-              </a:spcAft>
-            </a:pPr>
-            <a:r>
-              <a:rPr sz="1100" b="1" i="0">
+                <a:spcPts val="400"/>
+              </a:spcAft>
+            </a:pPr>
+            <a:r>
+              <a:rPr sz="1200" b="1" i="0">
                 <a:solidFill>
                   <a:srgbClr val="1A73E8"/>
                 </a:solidFill>
                 <a:latin typeface="Helvetica Neue"/>
               </a:rPr>
-              <a:t>Input  |ψ(h)⟩</a:t>
+              <a:t>Input |ψ(h)⟩</a:t>
             </a:r>
           </a:p>
           <a:p>
@@ -4455,14 +4427,14 @@
               </a:spcAft>
             </a:pPr>
             <a:r>
-              <a:rPr sz="900" b="0" i="0">
+              <a:rPr sz="1050" b="0" i="0">
                 <a:solidFill>
                   <a:srgbClr val="202124"/>
                 </a:solidFill>
                 <a:latin typeface="Helvetica Neue"/>
               </a:rPr>
               <a:t>ground state of the 4-qubit Ising chain
-H = −Σ Zᵢ Zᵢ₊₁ − h Σ Xᵢ,  h ∈ [0.2, 2.0]</a:t>
+H = −Σ Zᵢ Zᵢ₊₁ − h Σ Xᵢ, h ∈ [0.2, 2.0]</a:t>
             </a:r>
           </a:p>
         </p:txBody>
@@ -4475,7 +4447,7 @@
         </p:nvSpPr>
         <p:spPr>
           <a:xfrm>
-            <a:off x="3767327" y="1627632"/>
+            <a:off x="3904487" y="1691640"/>
             <a:ext cx="274320" cy="365760"/>
           </a:xfrm>
           <a:prstGeom prst="rect">
@@ -4517,8 +4489,8 @@
         </p:nvSpPr>
         <p:spPr>
           <a:xfrm>
-            <a:off x="4069080" y="1417320"/>
-            <a:ext cx="2331720" cy="841248"/>
+            <a:off x="4160520" y="1463040"/>
+            <a:ext cx="2331720" cy="868680"/>
           </a:xfrm>
           <a:prstGeom prst="roundRect">
             <a:avLst/>
@@ -4549,8 +4521,8 @@
         </p:nvSpPr>
         <p:spPr>
           <a:xfrm>
-            <a:off x="4197096" y="1490472"/>
-            <a:ext cx="2075688" cy="694944"/>
+            <a:off x="4306824" y="1554480"/>
+            <a:ext cx="2039112" cy="685800"/>
           </a:xfrm>
           <a:prstGeom prst="rect">
             <a:avLst/>
@@ -4568,17 +4540,17 @@
                 <a:spcPct val="100000"/>
               </a:lnSpc>
               <a:spcAft>
-                <a:spcPts val="300"/>
-              </a:spcAft>
-            </a:pPr>
-            <a:r>
-              <a:rPr sz="1100" b="1" i="0">
+                <a:spcPts val="400"/>
+              </a:spcAft>
+            </a:pPr>
+            <a:r>
+              <a:rPr sz="1200" b="1" i="0">
                 <a:solidFill>
                   <a:srgbClr val="E8710A"/>
                 </a:solidFill>
                 <a:latin typeface="Helvetica Neue"/>
               </a:rPr>
-              <a:t>Encoder  Uθ</a:t>
+              <a:t>Encoder Uθ</a:t>
             </a:r>
           </a:p>
           <a:p>
@@ -4591,14 +4563,14 @@
               </a:spcAft>
             </a:pPr>
             <a:r>
-              <a:rPr sz="900" b="0" i="0">
+              <a:rPr sz="1050" b="0" i="0">
                 <a:solidFill>
                   <a:srgbClr val="202124"/>
                 </a:solidFill>
                 <a:latin typeface="Helvetica Neue"/>
               </a:rPr>
-              <a:t>the circuit we search:
-16 gates, angles trained</a:t>
+              <a:t>the circuit we search
+(16 gates, angles trained)</a:t>
             </a:r>
           </a:p>
         </p:txBody>
@@ -4611,7 +4583,7 @@
         </p:nvSpPr>
         <p:spPr>
           <a:xfrm>
-            <a:off x="6419088" y="1627632"/>
+            <a:off x="6510527" y="1691640"/>
             <a:ext cx="274320" cy="365760"/>
           </a:xfrm>
           <a:prstGeom prst="rect">
@@ -4653,8 +4625,8 @@
         </p:nvSpPr>
         <p:spPr>
           <a:xfrm>
-            <a:off x="6720840" y="1417320"/>
-            <a:ext cx="2377440" cy="841248"/>
+            <a:off x="6766559" y="1463040"/>
+            <a:ext cx="2286000" cy="868680"/>
           </a:xfrm>
           <a:prstGeom prst="roundRect">
             <a:avLst/>
@@ -4685,8 +4657,8 @@
         </p:nvSpPr>
         <p:spPr>
           <a:xfrm>
-            <a:off x="6848856" y="1490472"/>
-            <a:ext cx="2121408" cy="694944"/>
+            <a:off x="6912863" y="1554480"/>
+            <a:ext cx="1993392" cy="685800"/>
           </a:xfrm>
           <a:prstGeom prst="rect">
             <a:avLst/>
@@ -4704,17 +4676,17 @@
                 <a:spcPct val="100000"/>
               </a:lnSpc>
               <a:spcAft>
-                <a:spcPts val="300"/>
-              </a:spcAft>
-            </a:pPr>
-            <a:r>
-              <a:rPr sz="1100" b="1" i="0">
+                <a:spcPts val="400"/>
+              </a:spcAft>
+            </a:pPr>
+            <a:r>
+              <a:rPr sz="1200" b="1" i="0">
                 <a:solidFill>
                   <a:srgbClr val="188038"/>
                 </a:solidFill>
                 <a:latin typeface="Helvetica Neue"/>
               </a:rPr>
-              <a:t>Latent qubits  q0, q1</a:t>
+              <a:t>Latent qubits q0, q1</a:t>
             </a:r>
           </a:p>
           <a:p>
@@ -4727,14 +4699,13 @@
               </a:spcAft>
             </a:pPr>
             <a:r>
-              <a:rPr sz="900" b="0" i="0">
+              <a:rPr sz="1050" b="0" i="0">
                 <a:solidFill>
                   <a:srgbClr val="202124"/>
                 </a:solidFill>
                 <a:latin typeface="Helvetica Neue"/>
               </a:rPr>
-              <a:t>the 2 qubits we KEEP
-(the compressed code)</a:t>
+              <a:t>the 2 qubits we keep</a:t>
             </a:r>
           </a:p>
         </p:txBody>
@@ -4747,7 +4718,7 @@
         </p:nvSpPr>
         <p:spPr>
           <a:xfrm>
-            <a:off x="9116567" y="1627632"/>
+            <a:off x="9070847" y="1691640"/>
             <a:ext cx="274320" cy="365760"/>
           </a:xfrm>
           <a:prstGeom prst="rect">
@@ -4789,8 +4760,8 @@
         </p:nvSpPr>
         <p:spPr>
           <a:xfrm>
-            <a:off x="9418320" y="1417320"/>
-            <a:ext cx="2468880" cy="841248"/>
+            <a:off x="9326880" y="1463040"/>
+            <a:ext cx="2468880" cy="868680"/>
           </a:xfrm>
           <a:prstGeom prst="roundRect">
             <a:avLst/>
@@ -4821,8 +4792,8 @@
         </p:nvSpPr>
         <p:spPr>
           <a:xfrm>
-            <a:off x="9546336" y="1490472"/>
-            <a:ext cx="2212848" cy="694944"/>
+            <a:off x="9473184" y="1554480"/>
+            <a:ext cx="2176272" cy="685800"/>
           </a:xfrm>
           <a:prstGeom prst="rect">
             <a:avLst/>
@@ -4840,17 +4811,17 @@
                 <a:spcPct val="100000"/>
               </a:lnSpc>
               <a:spcAft>
-                <a:spcPts val="300"/>
-              </a:spcAft>
-            </a:pPr>
-            <a:r>
-              <a:rPr sz="1100" b="1" i="0">
+                <a:spcPts val="400"/>
+              </a:spcAft>
+            </a:pPr>
+            <a:r>
+              <a:rPr sz="1200" b="1" i="0">
                 <a:solidFill>
                   <a:srgbClr val="D93025"/>
                 </a:solidFill>
                 <a:latin typeface="Helvetica Neue"/>
               </a:rPr>
-              <a:t>Trash qubits  q2, q3</a:t>
+              <a:t>Trash qubits q2, q3</a:t>
             </a:r>
           </a:p>
           <a:p>
@@ -4863,14 +4834,13 @@
               </a:spcAft>
             </a:pPr>
             <a:r>
-              <a:rPr sz="900" b="0" i="0">
+              <a:rPr sz="1050" b="0" i="0">
                 <a:solidFill>
                   <a:srgbClr val="202124"/>
                 </a:solidFill>
                 <a:latin typeface="Helvetica Neue"/>
               </a:rPr>
-              <a:t>should end in the SAME state |00⟩
-for every input</a:t>
+              <a:t>should end in |00⟩ for every input</a:t>
             </a:r>
           </a:p>
         </p:txBody>
@@ -4883,8 +4853,8 @@
         </p:nvSpPr>
         <p:spPr>
           <a:xfrm>
-            <a:off x="502920" y="2377440"/>
-            <a:ext cx="11155680" cy="566928"/>
+            <a:off x="502920" y="2468880"/>
+            <a:ext cx="11155680" cy="457200"/>
           </a:xfrm>
           <a:prstGeom prst="roundRect">
             <a:avLst/>
@@ -4915,8 +4885,8 @@
         </p:nvSpPr>
         <p:spPr>
           <a:xfrm>
-            <a:off x="640080" y="2432304"/>
-            <a:ext cx="10927080" cy="502920"/>
+            <a:off x="640080" y="2523744"/>
+            <a:ext cx="10927080" cy="365760"/>
           </a:xfrm>
           <a:prstGeom prst="rect">
             <a:avLst/>
@@ -4938,40 +4908,40 @@
               </a:spcAft>
             </a:pPr>
             <a:r>
-              <a:rPr sz="1050" b="1" i="0">
+              <a:rPr sz="1200" b="1" i="0">
                 <a:solidFill>
                   <a:srgbClr val="1A73E8"/>
                 </a:solidFill>
                 <a:latin typeface="Helvetica Neue"/>
               </a:rPr>
-              <a:t>Trash fidelity:  </a:t>
-            </a:r>
-            <a:r>
-              <a:rPr sz="1050" b="0" i="0">
+              <a:t>Trash fidelity  </a:t>
+            </a:r>
+            <a:r>
+              <a:rPr sz="1200" b="0" i="0">
                 <a:solidFill>
                   <a:srgbClr val="202124"/>
                 </a:solidFill>
                 <a:latin typeface="Helvetica Neue"/>
               </a:rPr>
-              <a:t>F_trash = ⟨00| ρ_trash |00⟩ = P(q2 q3 = 00), the probability that the trash qubits end in |00⟩.  </a:t>
-            </a:r>
-            <a:r>
-              <a:rPr sz="1050" b="1" i="0">
+              <a:t>F_trash = P(trash qubits q2 q3 = 00)  —  </a:t>
+            </a:r>
+            <a:r>
+              <a:rPr sz="1200" b="1" i="0">
                 <a:solidFill>
                   <a:srgbClr val="188038"/>
                 </a:solidFill>
                 <a:latin typeface="Helvetica Neue"/>
               </a:rPr>
-              <a:t>Higher is better.  </a:t>
-            </a:r>
-            <a:r>
-              <a:rPr sz="1050" b="0" i="0">
+              <a:t>higher is better</a:t>
+            </a:r>
+            <a:r>
+              <a:rPr sz="1200" b="0" i="0">
                 <a:solidFill>
                   <a:srgbClr val="202124"/>
                 </a:solidFill>
                 <a:latin typeface="Helvetica Neue"/>
               </a:rPr>
-              <a:t>Reported on a held-out test set (64 unseen h values never used for training, selection or feedback), read once after selection.</a:t>
+              <a:t>  ·  measured on a held-out test set of 64 unseen h values, read once after selection</a:t>
             </a:r>
           </a:p>
         </p:txBody>
@@ -4992,8 +4962,8 @@
         </p:blipFill>
         <p:spPr>
           <a:xfrm>
-            <a:off x="411480" y="3017520"/>
-            <a:ext cx="4911772" cy="2880360"/>
+            <a:off x="411480" y="3063240"/>
+            <a:ext cx="4755843" cy="2788920"/>
           </a:xfrm>
           <a:prstGeom prst="rect">
             <a:avLst/>
@@ -5008,8 +4978,8 @@
         </p:nvSpPr>
         <p:spPr>
           <a:xfrm>
-            <a:off x="6080760" y="3017520"/>
-            <a:ext cx="5577840" cy="1810512"/>
+            <a:off x="6035040" y="3063240"/>
+            <a:ext cx="5623560" cy="1600200"/>
           </a:xfrm>
           <a:prstGeom prst="roundRect">
             <a:avLst/>
@@ -5040,8 +5010,8 @@
         </p:nvSpPr>
         <p:spPr>
           <a:xfrm>
-            <a:off x="6217920" y="3072384"/>
-            <a:ext cx="5349240" cy="1737360"/>
+            <a:off x="6172200" y="3108960"/>
+            <a:ext cx="5394960" cy="1536192"/>
           </a:xfrm>
           <a:prstGeom prst="rect">
             <a:avLst/>
@@ -5063,13 +5033,22 @@
               </a:spcAft>
             </a:pPr>
             <a:r>
-              <a:rPr sz="950" b="1" i="0">
+              <a:rPr sz="1150" b="1" i="0">
                 <a:solidFill>
                   <a:srgbClr val="202124"/>
                 </a:solidFill>
                 <a:latin typeface="Helvetica Neue"/>
               </a:rPr>
-              <a:t>Four search methods; evaluation budget B = the number of candidate circuits trained and evaluated per seed</a:t>
+              <a:t>Four search methods  </a:t>
+            </a:r>
+            <a:r>
+              <a:rPr sz="1050" b="0" i="0">
+                <a:solidFill>
+                  <a:srgbClr val="5F6368"/>
+                </a:solidFill>
+                <a:latin typeface="Helvetica Neue"/>
+              </a:rPr>
+              <a:t>(budget B = candidate circuits trained and evaluated per seed)</a:t>
             </a:r>
           </a:p>
           <a:p>
@@ -5082,7 +5061,7 @@
               </a:spcAft>
             </a:pPr>
             <a:r>
-              <a:rPr sz="950" b="1" i="0">
+              <a:rPr sz="1150" b="1" i="0">
                 <a:solidFill>
                   <a:srgbClr val="9AA0A6"/>
                 </a:solidFill>
@@ -5091,13 +5070,13 @@
               <a:t>Random  </a:t>
             </a:r>
             <a:r>
-              <a:rPr sz="950" b="0" i="0">
+              <a:rPr sz="1150" b="0" i="0">
                 <a:solidFill>
                   <a:srgbClr val="202124"/>
                 </a:solidFill>
                 <a:latin typeface="Helvetica Neue"/>
               </a:rPr>
-              <a:t>B independent uniformly sampled circuit architectures.</a:t>
+              <a:t>B uniformly sampled circuits</a:t>
             </a:r>
           </a:p>
           <a:p>
@@ -5110,7 +5089,7 @@
               </a:spcAft>
             </a:pPr>
             <a:r>
-              <a:rPr sz="950" b="1" i="0">
+              <a:rPr sz="1150" b="1" i="0">
                 <a:solidFill>
                   <a:srgbClr val="F9AB00"/>
                 </a:solidFill>
@@ -5119,13 +5098,13 @@
               <a:t>Greedy  </a:t>
             </a:r>
             <a:r>
-              <a:rPr sz="950" b="0" i="0">
+              <a:rPr sz="1150" b="0" i="0">
                 <a:solidFill>
                   <a:srgbClr val="202124"/>
                 </a:solidFill>
                 <a:latin typeface="Helvetica Neue"/>
               </a:rPr>
-              <a:t>B/2 random starts, then B/2 single-structural-change refinements of the best validation candidate.</a:t>
+              <a:t>B/2 random starts + B/2 single-change refinements of the best</a:t>
             </a:r>
           </a:p>
           <a:p>
@@ -5138,7 +5117,7 @@
               </a:spcAft>
             </a:pPr>
             <a:r>
-              <a:rPr sz="950" b="1" i="0">
+              <a:rPr sz="1150" b="1" i="0">
                 <a:solidFill>
                   <a:srgbClr val="1A73E8"/>
                 </a:solidFill>
@@ -5147,13 +5126,13 @@
               <a:t>LLM-Open  </a:t>
             </a:r>
             <a:r>
-              <a:rPr sz="950" b="0" i="0">
+              <a:rPr sz="1150" b="0" i="0">
                 <a:solidFill>
                   <a:srgbClr val="202124"/>
                 </a:solidFill>
                 <a:latin typeface="Helvetica Neue"/>
               </a:rPr>
-              <a:t>open-loop: all semantic (physics-informed) proposals are generated BEFORE any validation result is observed.</a:t>
+              <a:t>open-loop: all semantic proposals before any score is seen</a:t>
             </a:r>
           </a:p>
           <a:p>
@@ -5166,7 +5145,7 @@
               </a:spcAft>
             </a:pPr>
             <a:r>
-              <a:rPr sz="950" b="1" i="0">
+              <a:rPr sz="1150" b="1" i="0">
                 <a:solidFill>
                   <a:srgbClr val="D93025"/>
                 </a:solidFill>
@@ -5175,13 +5154,13 @@
               <a:t>LLM-Closed  </a:t>
             </a:r>
             <a:r>
-              <a:rPr sz="950" b="0" i="0">
+              <a:rPr sz="1150" b="0" i="0">
                 <a:solidFill>
                   <a:srgbClr val="202124"/>
                 </a:solidFill>
                 <a:latin typeface="Helvetica Neue"/>
               </a:rPr>
-              <a:t>closed-loop: semantic initial proposals, then free redesigns of the current best circuit using validation feedback.</a:t>
+              <a:t>closed-loop: semantic starts + free redesigns of the current best, guided by validation scores</a:t>
             </a:r>
           </a:p>
         </p:txBody>
@@ -5194,8 +5173,8 @@
         </p:nvSpPr>
         <p:spPr>
           <a:xfrm>
-            <a:off x="6080760" y="4919472"/>
-            <a:ext cx="5577840" cy="1005840"/>
+            <a:off x="6035040" y="4754880"/>
+            <a:ext cx="5623560" cy="1051560"/>
           </a:xfrm>
           <a:prstGeom prst="roundRect">
             <a:avLst/>
@@ -5226,8 +5205,8 @@
         </p:nvSpPr>
         <p:spPr>
           <a:xfrm>
-            <a:off x="6217920" y="4965192"/>
-            <a:ext cx="5349240" cy="932688"/>
+            <a:off x="6172200" y="4809744"/>
+            <a:ext cx="5394960" cy="960120"/>
           </a:xfrm>
           <a:prstGeom prst="rect">
             <a:avLst/>
@@ -5249,7 +5228,7 @@
               </a:spcAft>
             </a:pPr>
             <a:r>
-              <a:rPr sz="950" b="1" i="0">
+              <a:rPr sz="1150" b="1" i="0">
                 <a:solidFill>
                   <a:srgbClr val="E8710A"/>
                 </a:solidFill>
@@ -5268,22 +5247,22 @@
               </a:spcAft>
             </a:pPr>
             <a:r>
-              <a:rPr sz="950" b="1" i="0">
+              <a:rPr sz="1150" b="1" i="0">
                 <a:solidFill>
                   <a:srgbClr val="1A73E8"/>
                 </a:solidFill>
                 <a:latin typeface="Helvetica Neue"/>
               </a:rPr>
-              <a:t>1  Semantic proposals outperform non-semantic search.  </a:t>
-            </a:r>
-            <a:r>
-              <a:rPr sz="950" b="0" i="0">
+              <a:t>1  Semantic proposals beat non-semantic search:  </a:t>
+            </a:r>
+            <a:r>
+              <a:rPr sz="1150" b="0" i="0">
                 <a:solidFill>
                   <a:srgbClr val="202124"/>
                 </a:solidFill>
                 <a:latin typeface="Helvetica Neue"/>
               </a:rPr>
-              <a:t>LLM-Open − Random +0.108 (11/12, p &lt; 0.001)</a:t>
+              <a:t>Open − Random +0.108 (11/12, p &lt; 0.001)</a:t>
             </a:r>
           </a:p>
           <a:p>
@@ -5296,22 +5275,22 @@
               </a:spcAft>
             </a:pPr>
             <a:r>
-              <a:rPr sz="950" b="1" i="0">
+              <a:rPr sz="1150" b="1" i="0">
                 <a:solidFill>
                   <a:srgbClr val="D93025"/>
                 </a:solidFill>
                 <a:latin typeface="Helvetica Neue"/>
               </a:rPr>
-              <a:t>2  Closed-loop redesign gives a smaller additional gain.  </a:t>
-            </a:r>
-            <a:r>
-              <a:rPr sz="950" b="0" i="0">
+              <a:t>2  Closed-loop redesign adds a small extra gain:  </a:t>
+            </a:r>
+            <a:r>
+              <a:rPr sz="1150" b="0" i="0">
                 <a:solidFill>
                   <a:srgbClr val="202124"/>
                 </a:solidFill>
                 <a:latin typeface="Helvetica Neue"/>
               </a:rPr>
-              <a:t>LLM-Closed − LLM-Open +0.007 (11/12, p = 0.012)</a:t>
+              <a:t>Closed − Open +0.007 (11/12, p = 0.012)</a:t>
             </a:r>
           </a:p>
         </p:txBody>
@@ -5324,8 +5303,8 @@
         </p:nvSpPr>
         <p:spPr>
           <a:xfrm>
-            <a:off x="502920" y="6016752"/>
-            <a:ext cx="73152" cy="329184"/>
+            <a:off x="502920" y="5943600"/>
+            <a:ext cx="73152" cy="365760"/>
           </a:xfrm>
           <a:prstGeom prst="rect">
             <a:avLst/>
@@ -5354,8 +5333,8 @@
         </p:nvSpPr>
         <p:spPr>
           <a:xfrm>
-            <a:off x="685800" y="5998464"/>
-            <a:ext cx="10972800" cy="384048"/>
+            <a:off x="685800" y="5934456"/>
+            <a:ext cx="10972800" cy="402336"/>
           </a:xfrm>
           <a:prstGeom prst="rect">
             <a:avLst/>
@@ -5377,7 +5356,7 @@
               </a:spcAft>
             </a:pPr>
             <a:r>
-              <a:rPr sz="1100" b="1" i="0">
+              <a:rPr sz="1250" b="1" i="0">
                 <a:solidFill>
                   <a:srgbClr val="C5221F"/>
                 </a:solidFill>
@@ -5386,7 +5365,7 @@
               <a:t>Next:  </a:t>
             </a:r>
             <a:r>
-              <a:rPr sz="1100" b="0" i="0">
+              <a:rPr sz="1250" b="0" i="0">
                 <a:solidFill>
                   <a:srgbClr val="202124"/>
                 </a:solidFill>
@@ -5405,8 +5384,8 @@
         </p:nvSpPr>
         <p:spPr>
           <a:xfrm>
-            <a:off x="502920" y="6400800"/>
-            <a:ext cx="11155680" cy="320040"/>
+            <a:off x="502920" y="6419088"/>
+            <a:ext cx="11155680" cy="301752"/>
           </a:xfrm>
           <a:prstGeom prst="rect">
             <a:avLst/>
@@ -5428,13 +5407,13 @@
               </a:spcAft>
             </a:pPr>
             <a:r>
-              <a:rPr sz="850" b="0" i="0">
+              <a:rPr sz="950" b="0" i="0">
                 <a:solidFill>
                   <a:srgbClr val="5F6368"/>
                 </a:solidFill>
                 <a:latin typeface="Helvetica Neue"/>
               </a:rPr>
-              <a:t>Reading: dots = the 12 paired seeds (12 independent draws of training/validation data, shared by all methods); marker = mean; bar = bootstrap 95% confidence interval (CI); differences are per-seed paired, p = exact paired Wilcoxon test. High tier = gpt-5.4-mini.</a:t>
+              <a:t>Dots = the 12 paired seeds (12 independent draws of training/validation data shared by all methods); marker = mean; bar = bootstrap 95% confidence interval (CI); p = exact paired Wilcoxon test. High tier = gpt-5.4-mini.</a:t>
             </a:r>
           </a:p>
         </p:txBody>
@@ -5488,7 +5467,7 @@
               </a:spcAft>
             </a:pPr>
             <a:r>
-              <a:rPr sz="1100" b="1" i="0">
+              <a:rPr sz="1150" b="1" i="0">
                 <a:solidFill>
                   <a:srgbClr val="C5221F"/>
                 </a:solidFill>
@@ -5508,7 +5487,7 @@
         <p:spPr>
           <a:xfrm>
             <a:off x="502920" y="512064"/>
-            <a:ext cx="11155680" cy="457200"/>
+            <a:ext cx="11155680" cy="475488"/>
           </a:xfrm>
           <a:prstGeom prst="rect">
             <a:avLst/>
@@ -5530,7 +5509,7 @@
               </a:spcAft>
             </a:pPr>
             <a:r>
-              <a:rPr sz="2400" b="1" i="0">
+              <a:rPr sz="2600" b="1" i="0">
                 <a:solidFill>
                   <a:srgbClr val="1F2A44"/>
                 </a:solidFill>
@@ -5549,7 +5528,7 @@
         </p:nvSpPr>
         <p:spPr>
           <a:xfrm>
-            <a:off x="502920" y="1005840"/>
+            <a:off x="502920" y="1024128"/>
             <a:ext cx="11155680" cy="347472"/>
           </a:xfrm>
           <a:prstGeom prst="rect">
@@ -5572,13 +5551,13 @@
               </a:spcAft>
             </a:pPr>
             <a:r>
-              <a:rPr sz="1100" b="0" i="0">
+              <a:rPr sz="1200" b="0" i="0">
                 <a:solidFill>
                   <a:srgbClr val="5F6368"/>
                 </a:solidFill>
                 <a:latin typeface="Helvetica Neue"/>
               </a:rPr>
-              <a:t>Four controlled changes leave the baseline; each moves exactly one declared factor and holds the other three at the baseline</a:t>
+              <a:t>Four controlled changes leave the baseline; each moves exactly one declared factor and holds the other three</a:t>
             </a:r>
           </a:p>
         </p:txBody>
@@ -5591,8 +5570,8 @@
         </p:nvSpPr>
         <p:spPr>
           <a:xfrm>
-            <a:off x="502920" y="2148840"/>
-            <a:ext cx="2834640" cy="1371600"/>
+            <a:off x="502920" y="2240280"/>
+            <a:ext cx="2926080" cy="1463040"/>
           </a:xfrm>
           <a:prstGeom prst="roundRect">
             <a:avLst/>
@@ -5623,8 +5602,8 @@
         </p:nvSpPr>
         <p:spPr>
           <a:xfrm>
-            <a:off x="640080" y="2212848"/>
-            <a:ext cx="2560320" cy="1280160"/>
+            <a:off x="658368" y="2304288"/>
+            <a:ext cx="2651760" cy="1371600"/>
           </a:xfrm>
           <a:prstGeom prst="rect">
             <a:avLst/>
@@ -5646,7 +5625,7 @@
               </a:spcAft>
             </a:pPr>
             <a:r>
-              <a:rPr sz="1100" b="1" i="0">
+              <a:rPr sz="1200" b="1" i="0">
                 <a:solidFill>
                   <a:srgbClr val="F9AB00"/>
                 </a:solidFill>
@@ -5665,7 +5644,7 @@
               </a:spcAft>
             </a:pPr>
             <a:r>
-              <a:rPr sz="1250" b="1" i="0">
+              <a:rPr sz="1400" b="1" i="0">
                 <a:solidFill>
                   <a:srgbClr val="FFFFFF"/>
                 </a:solidFill>
@@ -5684,7 +5663,7 @@
               </a:spcAft>
             </a:pPr>
             <a:r>
-              <a:rPr sz="1250" b="1" i="0">
+              <a:rPr sz="1400" b="1" i="0">
                 <a:solidFill>
                   <a:srgbClr val="FFFFFF"/>
                 </a:solidFill>
@@ -5703,7 +5682,7 @@
               </a:spcAft>
             </a:pPr>
             <a:r>
-              <a:rPr sz="1100" b="0" i="0">
+              <a:rPr sz="1200" b="0" i="0">
                 <a:solidFill>
                   <a:srgbClr val="C8D4EC"/>
                 </a:solidFill>
@@ -5722,8 +5701,8 @@
         </p:nvCxnSpPr>
         <p:spPr>
           <a:xfrm flipV="1">
-            <a:off x="3337560" y="1719072"/>
-            <a:ext cx="640079" cy="1115568"/>
+            <a:off x="3429000" y="1810512"/>
+            <a:ext cx="640080" cy="1161288"/>
           </a:xfrm>
           <a:prstGeom prst="line">
             <a:avLst/>
@@ -5757,8 +5736,8 @@
         </p:nvSpPr>
         <p:spPr>
           <a:xfrm>
-            <a:off x="3977639" y="1463040"/>
-            <a:ext cx="3246120" cy="640080"/>
+            <a:off x="4069080" y="1481328"/>
+            <a:ext cx="3383280" cy="694944"/>
           </a:xfrm>
           <a:prstGeom prst="roundRect">
             <a:avLst/>
@@ -5789,8 +5768,8 @@
         </p:nvSpPr>
         <p:spPr>
           <a:xfrm>
-            <a:off x="4096512" y="1472184"/>
-            <a:ext cx="3017520" cy="219456"/>
+            <a:off x="4187952" y="1499616"/>
+            <a:ext cx="3108960" cy="256032"/>
           </a:xfrm>
           <a:prstGeom prst="rect">
             <a:avLst/>
@@ -5812,7 +5791,7 @@
               </a:spcAft>
             </a:pPr>
             <a:r>
-              <a:rPr sz="1050" b="1" i="0">
+              <a:rPr sz="1150" b="1" i="0">
                 <a:solidFill>
                   <a:srgbClr val="1A73E8"/>
                 </a:solidFill>
@@ -5831,8 +5810,8 @@
         </p:nvSpPr>
         <p:spPr>
           <a:xfrm>
-            <a:off x="4114800" y="1746504"/>
-            <a:ext cx="658368" cy="329184"/>
+            <a:off x="4206240" y="1792224"/>
+            <a:ext cx="731520" cy="310896"/>
           </a:xfrm>
           <a:prstGeom prst="roundRect">
             <a:avLst/>
@@ -5853,7 +5832,7 @@
           <a:p>
             <a:pPr algn="ctr"/>
             <a:r>
-              <a:rPr sz="950" b="0">
+              <a:rPr sz="1100" b="0">
                 <a:solidFill>
                   <a:srgbClr val="202124"/>
                 </a:solidFill>
@@ -5872,8 +5851,8 @@
         </p:nvSpPr>
         <p:spPr>
           <a:xfrm>
-            <a:off x="4864608" y="1746504"/>
-            <a:ext cx="658368" cy="329184"/>
+            <a:off x="5029200" y="1792224"/>
+            <a:ext cx="731520" cy="310896"/>
           </a:xfrm>
           <a:prstGeom prst="roundRect">
             <a:avLst/>
@@ -5894,7 +5873,7 @@
           <a:p>
             <a:pPr algn="ctr"/>
             <a:r>
-              <a:rPr sz="950" b="1">
+              <a:rPr sz="1100" b="1">
                 <a:solidFill>
                   <a:srgbClr val="FFFFFF"/>
                 </a:solidFill>
@@ -5913,8 +5892,8 @@
         </p:nvSpPr>
         <p:spPr>
           <a:xfrm>
-            <a:off x="5614416" y="1746504"/>
-            <a:ext cx="658368" cy="329184"/>
+            <a:off x="5852160" y="1792224"/>
+            <a:ext cx="731520" cy="310896"/>
           </a:xfrm>
           <a:prstGeom prst="roundRect">
             <a:avLst/>
@@ -5935,7 +5914,7 @@
           <a:p>
             <a:pPr algn="ctr"/>
             <a:r>
-              <a:rPr sz="950" b="0">
+              <a:rPr sz="1100" b="0">
                 <a:solidFill>
                   <a:srgbClr val="202124"/>
                 </a:solidFill>
@@ -5954,8 +5933,8 @@
         </p:nvCxnSpPr>
         <p:spPr>
           <a:xfrm flipV="1">
-            <a:off x="3337560" y="2432304"/>
-            <a:ext cx="640079" cy="402336"/>
+            <a:off x="3429000" y="2596896"/>
+            <a:ext cx="640080" cy="374904"/>
           </a:xfrm>
           <a:prstGeom prst="line">
             <a:avLst/>
@@ -5989,8 +5968,8 @@
         </p:nvSpPr>
         <p:spPr>
           <a:xfrm>
-            <a:off x="3977639" y="2176272"/>
-            <a:ext cx="3246120" cy="640080"/>
+            <a:off x="4069080" y="2267712"/>
+            <a:ext cx="3383280" cy="694944"/>
           </a:xfrm>
           <a:prstGeom prst="roundRect">
             <a:avLst/>
@@ -6021,8 +6000,8 @@
         </p:nvSpPr>
         <p:spPr>
           <a:xfrm>
-            <a:off x="4096512" y="2185416"/>
-            <a:ext cx="3017520" cy="219456"/>
+            <a:off x="4187952" y="2286000"/>
+            <a:ext cx="3108960" cy="256032"/>
           </a:xfrm>
           <a:prstGeom prst="rect">
             <a:avLst/>
@@ -6044,7 +6023,7 @@
               </a:spcAft>
             </a:pPr>
             <a:r>
-              <a:rPr sz="1050" b="1" i="0">
+              <a:rPr sz="1150" b="1" i="0">
                 <a:solidFill>
                   <a:srgbClr val="188038"/>
                 </a:solidFill>
@@ -6063,8 +6042,8 @@
         </p:nvSpPr>
         <p:spPr>
           <a:xfrm>
-            <a:off x="4114800" y="2459736"/>
-            <a:ext cx="658368" cy="329184"/>
+            <a:off x="4206240" y="2578608"/>
+            <a:ext cx="731520" cy="310896"/>
           </a:xfrm>
           <a:prstGeom prst="roundRect">
             <a:avLst/>
@@ -6085,7 +6064,7 @@
           <a:p>
             <a:pPr algn="ctr"/>
             <a:r>
-              <a:rPr sz="950" b="1">
+              <a:rPr sz="1100" b="1">
                 <a:solidFill>
                   <a:srgbClr val="FFFFFF"/>
                 </a:solidFill>
@@ -6104,8 +6083,8 @@
         </p:nvSpPr>
         <p:spPr>
           <a:xfrm>
-            <a:off x="4864608" y="2459736"/>
-            <a:ext cx="658368" cy="329184"/>
+            <a:off x="5029200" y="2578608"/>
+            <a:ext cx="731520" cy="310896"/>
           </a:xfrm>
           <a:prstGeom prst="roundRect">
             <a:avLst/>
@@ -6126,7 +6105,7 @@
           <a:p>
             <a:pPr algn="ctr"/>
             <a:r>
-              <a:rPr sz="950" b="0">
+              <a:rPr sz="1100" b="0">
                 <a:solidFill>
                   <a:srgbClr val="202124"/>
                 </a:solidFill>
@@ -6145,8 +6124,8 @@
         </p:nvSpPr>
         <p:spPr>
           <a:xfrm>
-            <a:off x="5614416" y="2459736"/>
-            <a:ext cx="658368" cy="329184"/>
+            <a:off x="5852160" y="2578608"/>
+            <a:ext cx="731520" cy="310896"/>
           </a:xfrm>
           <a:prstGeom prst="roundRect">
             <a:avLst/>
@@ -6167,7 +6146,7 @@
           <a:p>
             <a:pPr algn="ctr"/>
             <a:r>
-              <a:rPr sz="950" b="0">
+              <a:rPr sz="1100" b="0">
                 <a:solidFill>
                   <a:srgbClr val="202124"/>
                 </a:solidFill>
@@ -6186,8 +6165,8 @@
         </p:nvCxnSpPr>
         <p:spPr>
           <a:xfrm>
-            <a:off x="3337560" y="2834640"/>
-            <a:ext cx="640079" cy="310896"/>
+            <a:off x="3429000" y="2971800"/>
+            <a:ext cx="640080" cy="411480"/>
           </a:xfrm>
           <a:prstGeom prst="line">
             <a:avLst/>
@@ -6221,8 +6200,8 @@
         </p:nvSpPr>
         <p:spPr>
           <a:xfrm>
-            <a:off x="3977639" y="2889504"/>
-            <a:ext cx="3246120" cy="640080"/>
+            <a:off x="4069080" y="3054096"/>
+            <a:ext cx="3383280" cy="694944"/>
           </a:xfrm>
           <a:prstGeom prst="roundRect">
             <a:avLst/>
@@ -6253,8 +6232,8 @@
         </p:nvSpPr>
         <p:spPr>
           <a:xfrm>
-            <a:off x="4096512" y="2898648"/>
-            <a:ext cx="3017520" cy="219456"/>
+            <a:off x="4187952" y="3072384"/>
+            <a:ext cx="3108960" cy="256032"/>
           </a:xfrm>
           <a:prstGeom prst="rect">
             <a:avLst/>
@@ -6276,7 +6255,7 @@
               </a:spcAft>
             </a:pPr>
             <a:r>
-              <a:rPr sz="1050" b="1" i="0">
+              <a:rPr sz="1150" b="1" i="0">
                 <a:solidFill>
                   <a:srgbClr val="F9AB00"/>
                 </a:solidFill>
@@ -6295,8 +6274,8 @@
         </p:nvSpPr>
         <p:spPr>
           <a:xfrm>
-            <a:off x="4114800" y="3172968"/>
-            <a:ext cx="658368" cy="329184"/>
+            <a:off x="4206240" y="3364992"/>
+            <a:ext cx="731520" cy="310896"/>
           </a:xfrm>
           <a:prstGeom prst="roundRect">
             <a:avLst/>
@@ -6317,7 +6296,7 @@
           <a:p>
             <a:pPr algn="ctr"/>
             <a:r>
-              <a:rPr sz="950" b="1">
+              <a:rPr sz="1100" b="1">
                 <a:solidFill>
                   <a:srgbClr val="FFFFFF"/>
                 </a:solidFill>
@@ -6336,8 +6315,8 @@
         </p:nvSpPr>
         <p:spPr>
           <a:xfrm>
-            <a:off x="4864608" y="3172968"/>
-            <a:ext cx="658368" cy="329184"/>
+            <a:off x="5029200" y="3364992"/>
+            <a:ext cx="731520" cy="310896"/>
           </a:xfrm>
           <a:prstGeom prst="roundRect">
             <a:avLst/>
@@ -6358,7 +6337,7 @@
           <a:p>
             <a:pPr algn="ctr"/>
             <a:r>
-              <a:rPr sz="950" b="0">
+              <a:rPr sz="1100" b="0">
                 <a:solidFill>
                   <a:srgbClr val="202124"/>
                 </a:solidFill>
@@ -6377,8 +6356,8 @@
         </p:nvCxnSpPr>
         <p:spPr>
           <a:xfrm>
-            <a:off x="3337560" y="2834640"/>
-            <a:ext cx="640079" cy="1024128"/>
+            <a:off x="3429000" y="2971800"/>
+            <a:ext cx="640080" cy="1197864"/>
           </a:xfrm>
           <a:prstGeom prst="line">
             <a:avLst/>
@@ -6412,8 +6391,8 @@
         </p:nvSpPr>
         <p:spPr>
           <a:xfrm>
-            <a:off x="3977639" y="3602736"/>
-            <a:ext cx="3246120" cy="640080"/>
+            <a:off x="4069080" y="3840480"/>
+            <a:ext cx="3383280" cy="694944"/>
           </a:xfrm>
           <a:prstGeom prst="roundRect">
             <a:avLst/>
@@ -6444,8 +6423,8 @@
         </p:nvSpPr>
         <p:spPr>
           <a:xfrm>
-            <a:off x="4096512" y="3611880"/>
-            <a:ext cx="3017520" cy="219456"/>
+            <a:off x="4187952" y="3858768"/>
+            <a:ext cx="3108960" cy="256032"/>
           </a:xfrm>
           <a:prstGeom prst="rect">
             <a:avLst/>
@@ -6467,7 +6446,7 @@
               </a:spcAft>
             </a:pPr>
             <a:r>
-              <a:rPr sz="1050" b="1" i="0">
+              <a:rPr sz="1150" b="1" i="0">
                 <a:solidFill>
                   <a:srgbClr val="D93025"/>
                 </a:solidFill>
@@ -6486,8 +6465,8 @@
         </p:nvSpPr>
         <p:spPr>
           <a:xfrm>
-            <a:off x="4114800" y="3886200"/>
-            <a:ext cx="658368" cy="329184"/>
+            <a:off x="4206240" y="4151376"/>
+            <a:ext cx="731520" cy="310896"/>
           </a:xfrm>
           <a:prstGeom prst="roundRect">
             <a:avLst/>
@@ -6508,7 +6487,7 @@
           <a:p>
             <a:pPr algn="ctr"/>
             <a:r>
-              <a:rPr sz="950" b="0">
+              <a:rPr sz="1100" b="0">
                 <a:solidFill>
                   <a:srgbClr val="202124"/>
                 </a:solidFill>
@@ -6527,8 +6506,8 @@
         </p:nvSpPr>
         <p:spPr>
           <a:xfrm>
-            <a:off x="4864608" y="3886200"/>
-            <a:ext cx="658368" cy="329184"/>
+            <a:off x="5029200" y="4151376"/>
+            <a:ext cx="731520" cy="310896"/>
           </a:xfrm>
           <a:prstGeom prst="roundRect">
             <a:avLst/>
@@ -6549,7 +6528,7 @@
           <a:p>
             <a:pPr algn="ctr"/>
             <a:r>
-              <a:rPr sz="950" b="1">
+              <a:rPr sz="1100" b="1">
                 <a:solidFill>
                   <a:srgbClr val="FFFFFF"/>
                 </a:solidFill>
@@ -6568,8 +6547,8 @@
         </p:nvSpPr>
         <p:spPr>
           <a:xfrm>
-            <a:off x="3977639" y="4370832"/>
-            <a:ext cx="3246120" cy="457200"/>
+            <a:off x="4069080" y="4590288"/>
+            <a:ext cx="3566160" cy="329184"/>
           </a:xfrm>
           <a:prstGeom prst="rect">
             <a:avLst/>
@@ -6591,7 +6570,7 @@
               </a:spcAft>
             </a:pPr>
             <a:r>
-              <a:rPr sz="900" b="1" i="0">
+              <a:rPr sz="1000" b="1" i="0">
                 <a:solidFill>
                   <a:srgbClr val="1F2A44"/>
                 </a:solidFill>
@@ -6600,13 +6579,13 @@
               <a:t>dark chip</a:t>
             </a:r>
             <a:r>
-              <a:rPr sz="900" b="0" i="0">
+              <a:rPr sz="1000" b="0" i="0">
                 <a:solidFill>
                   <a:srgbClr val="5F6368"/>
                 </a:solidFill>
                 <a:latin typeface="Helvetica Neue"/>
               </a:rPr>
-              <a:t> = the baseline level. Low = gpt-4.1-mini, High = gpt-5.4-mini (defined on the next slide).</a:t>
+              <a:t> = baseline level · Low = gpt-4.1-mini · High = gpt-5.4-mini</a:t>
             </a:r>
           </a:p>
         </p:txBody>
@@ -6619,8 +6598,8 @@
         </p:nvSpPr>
         <p:spPr>
           <a:xfrm>
-            <a:off x="7498079" y="1463040"/>
-            <a:ext cx="4160520" cy="3337560"/>
+            <a:off x="7726679" y="1481328"/>
+            <a:ext cx="3931920" cy="3063240"/>
           </a:xfrm>
           <a:prstGeom prst="roundRect">
             <a:avLst/>
@@ -6651,8 +6630,8 @@
         </p:nvSpPr>
         <p:spPr>
           <a:xfrm>
-            <a:off x="7626095" y="1536192"/>
-            <a:ext cx="3904488" cy="3191256"/>
+            <a:off x="7872983" y="1572768"/>
+            <a:ext cx="3639312" cy="2880360"/>
           </a:xfrm>
           <a:prstGeom prst="rect">
             <a:avLst/>
@@ -6670,17 +6649,36 @@
                 <a:spcPct val="100000"/>
               </a:lnSpc>
               <a:spcAft>
+                <a:spcPts val="400"/>
+              </a:spcAft>
+            </a:pPr>
+            <a:r>
+              <a:rPr sz="1350" b="1" i="0">
+                <a:solidFill>
+                  <a:srgbClr val="188038"/>
+                </a:solidFill>
+                <a:latin typeface="Helvetica Neue"/>
+              </a:rPr>
+              <a:t>FROZEN in every condition</a:t>
+            </a:r>
+          </a:p>
+          <a:p>
+            <a:pPr>
+              <a:lnSpc>
+                <a:spcPct val="100000"/>
+              </a:lnSpc>
+              <a:spcAft>
                 <a:spcPts val="300"/>
               </a:spcAft>
             </a:pPr>
             <a:r>
-              <a:rPr sz="1200" b="1" i="0">
-                <a:solidFill>
-                  <a:srgbClr val="188038"/>
-                </a:solidFill>
-                <a:latin typeface="Helvetica Neue"/>
-              </a:rPr>
-              <a:t>FROZEN in every condition</a:t>
+              <a:rPr sz="1200" b="0" i="0">
+                <a:solidFill>
+                  <a:srgbClr val="202124"/>
+                </a:solidFill>
+                <a:latin typeface="Helvetica Neue"/>
+              </a:rPr>
+              <a:t>•  prompt wording and output schema</a:t>
             </a:r>
           </a:p>
           <a:p>
@@ -6693,13 +6691,13 @@
               </a:spcAft>
             </a:pPr>
             <a:r>
-              <a:rPr sz="1000" b="0" i="0">
+              <a:rPr sz="1200" b="0" i="0">
                 <a:solidFill>
                   <a:srgbClr val="202124"/>
                 </a:solidFill>
                 <a:latin typeface="Helvetica Neue"/>
               </a:rPr>
-              <a:t>•  prompt wording and output schema</a:t>
+              <a:t>•  the four search methods</a:t>
             </a:r>
           </a:p>
           <a:p>
@@ -6712,13 +6710,13 @@
               </a:spcAft>
             </a:pPr>
             <a:r>
-              <a:rPr sz="1000" b="0" i="0">
+              <a:rPr sz="1200" b="0" i="0">
                 <a:solidFill>
                   <a:srgbClr val="202124"/>
                 </a:solidFill>
                 <a:latin typeface="Helvetica Neue"/>
               </a:rPr>
-              <a:t>•  method logic of all four search methods</a:t>
+              <a:t>•  circuit rule: 3 rotations + 1 CNOT (controlled-NOT) per qubit</a:t>
             </a:r>
           </a:p>
           <a:p>
@@ -6731,13 +6729,13 @@
               </a:spcAft>
             </a:pPr>
             <a:r>
-              <a:rPr sz="1000" b="0" i="0">
+              <a:rPr sz="1200" b="0" i="0">
                 <a:solidFill>
                   <a:srgbClr val="202124"/>
                 </a:solidFill>
                 <a:latin typeface="Helvetica Neue"/>
               </a:rPr>
-              <a:t>•  circuit resource rule: 3 rotations + 1 CNOT (controlled-NOT) per qubit</a:t>
+              <a:t>•  trainer, optimizer, data splits</a:t>
             </a:r>
           </a:p>
           <a:p>
@@ -6750,13 +6748,13 @@
               </a:spcAft>
             </a:pPr>
             <a:r>
-              <a:rPr sz="1000" b="0" i="0">
+              <a:rPr sz="1200" b="0" i="0">
                 <a:solidFill>
                   <a:srgbClr val="202124"/>
                 </a:solidFill>
                 <a:latin typeface="Helvetica Neue"/>
               </a:rPr>
-              <a:t>•  trainer and optimizer</a:t>
+              <a:t>•  the same 12 paired seeds</a:t>
             </a:r>
           </a:p>
           <a:p>
@@ -6769,13 +6767,13 @@
               </a:spcAft>
             </a:pPr>
             <a:r>
-              <a:rPr sz="1000" b="0" i="0">
+              <a:rPr sz="1200" b="0" i="0">
                 <a:solidFill>
                   <a:srgbClr val="202124"/>
                 </a:solidFill>
                 <a:latin typeface="Helvetica Neue"/>
               </a:rPr>
-              <a:t>•  data splits (train / validation / held-out test)</a:t>
+              <a:t>•  validation-only selection; held-out test read once</a:t>
             </a:r>
           </a:p>
           <a:p>
@@ -6788,70 +6786,13 @@
               </a:spcAft>
             </a:pPr>
             <a:r>
-              <a:rPr sz="1000" b="0" i="0">
+              <a:rPr sz="1200" b="0" i="0">
                 <a:solidFill>
                   <a:srgbClr val="202124"/>
                 </a:solidFill>
                 <a:latin typeface="Helvetica Neue"/>
               </a:rPr>
-              <a:t>•  the same 12 paired seeds</a:t>
-            </a:r>
-          </a:p>
-          <a:p>
-            <a:pPr>
-              <a:lnSpc>
-                <a:spcPct val="100000"/>
-              </a:lnSpc>
-              <a:spcAft>
-                <a:spcPts val="300"/>
-              </a:spcAft>
-            </a:pPr>
-            <a:r>
-              <a:rPr sz="1000" b="0" i="0">
-                <a:solidFill>
-                  <a:srgbClr val="202124"/>
-                </a:solidFill>
-                <a:latin typeface="Helvetica Neue"/>
-              </a:rPr>
-              <a:t>•  validation-only selection</a:t>
-            </a:r>
-          </a:p>
-          <a:p>
-            <a:pPr>
-              <a:lnSpc>
-                <a:spcPct val="100000"/>
-              </a:lnSpc>
-              <a:spcAft>
-                <a:spcPts val="300"/>
-              </a:spcAft>
-            </a:pPr>
-            <a:r>
-              <a:rPr sz="1000" b="0" i="0">
-                <a:solidFill>
-                  <a:srgbClr val="202124"/>
-                </a:solidFill>
-                <a:latin typeface="Helvetica Neue"/>
-              </a:rPr>
-              <a:t>•  held-out test evaluation, read once</a:t>
-            </a:r>
-          </a:p>
-          <a:p>
-            <a:pPr>
-              <a:lnSpc>
-                <a:spcPct val="100000"/>
-              </a:lnSpc>
-              <a:spcAft>
-                <a:spcPts val="300"/>
-              </a:spcAft>
-            </a:pPr>
-            <a:r>
-              <a:rPr sz="1000" b="0" i="0">
-                <a:solidFill>
-                  <a:srgbClr val="202124"/>
-                </a:solidFill>
-                <a:latin typeface="Helvetica Neue"/>
-              </a:rPr>
-              <a:t>•  statistical analysis (paired, bootstrap CI, exact Wilcoxon)</a:t>
+              <a:t>•  statistical analysis</a:t>
             </a:r>
           </a:p>
         </p:txBody>
@@ -6864,8 +6805,8 @@
         </p:nvSpPr>
         <p:spPr>
           <a:xfrm>
-            <a:off x="502920" y="4937760"/>
-            <a:ext cx="11155680" cy="868680"/>
+            <a:off x="502920" y="5010912"/>
+            <a:ext cx="11155680" cy="841248"/>
           </a:xfrm>
           <a:prstGeom prst="roundRect">
             <a:avLst/>
@@ -6896,8 +6837,8 @@
         </p:nvSpPr>
         <p:spPr>
           <a:xfrm>
-            <a:off x="640080" y="4992624"/>
-            <a:ext cx="10927080" cy="777240"/>
+            <a:off x="658368" y="5065776"/>
+            <a:ext cx="10881360" cy="749808"/>
           </a:xfrm>
           <a:prstGeom prst="rect">
             <a:avLst/>
@@ -6919,7 +6860,7 @@
               </a:spcAft>
             </a:pPr>
             <a:r>
-              <a:rPr sz="1000" b="1" i="0">
+              <a:rPr sz="1200" b="1" i="0">
                 <a:solidFill>
                   <a:srgbClr val="E8710A"/>
                 </a:solidFill>
@@ -6928,13 +6869,13 @@
               <a:t>No interaction condition was tested.  </a:t>
             </a:r>
             <a:r>
-              <a:rPr sz="1000" b="0" i="0">
+              <a:rPr sz="1200" b="0" i="0">
                 <a:solidFill>
                   <a:srgbClr val="202124"/>
                 </a:solidFill>
                 <a:latin typeface="Helvetica Neue"/>
               </a:rPr>
-              <a:t>Each change returns to the baseline before the next factor moves, so nothing is known about, for example, a large budget at 8 qubits, or the Low tier on the XXZ chain. XXZ = the second Hamiltonian family, an XXZ Heisenberg chain H = Σ (Xᵢ Xᵢ₊₁ + Yᵢ Yᵢ₊₁ + Δ Zᵢ Zᵢ₊₁), Δ ∈ [0.2, 2.0], declared before the run; only its stated physics facts enter the prompt.</a:t>
+              <a:t>Each change returns to the baseline before the next factor moves — e.g. a large budget at 8 qubits was never run.  XXZ = the second Hamiltonian family, an XXZ Heisenberg chain H = Σ (Xᵢ Xᵢ₊₁ + Yᵢ Yᵢ₊₁ + Δ Zᵢ Zᵢ₊₁), Δ ∈ [0.2, 2.0], declared before the run.</a:t>
             </a:r>
           </a:p>
         </p:txBody>
@@ -6947,8 +6888,8 @@
         </p:nvSpPr>
         <p:spPr>
           <a:xfrm>
-            <a:off x="502920" y="5989320"/>
-            <a:ext cx="73152" cy="329184"/>
+            <a:off x="502920" y="5943600"/>
+            <a:ext cx="73152" cy="365760"/>
           </a:xfrm>
           <a:prstGeom prst="rect">
             <a:avLst/>
@@ -6977,8 +6918,8 @@
         </p:nvSpPr>
         <p:spPr>
           <a:xfrm>
-            <a:off x="685800" y="5971032"/>
-            <a:ext cx="10972800" cy="384048"/>
+            <a:off x="685800" y="5934456"/>
+            <a:ext cx="10972800" cy="402336"/>
           </a:xfrm>
           <a:prstGeom prst="rect">
             <a:avLst/>
@@ -7000,7 +6941,7 @@
               </a:spcAft>
             </a:pPr>
             <a:r>
-              <a:rPr sz="1100" b="1" i="0">
+              <a:rPr sz="1250" b="1" i="0">
                 <a:solidFill>
                   <a:srgbClr val="C5221F"/>
                 </a:solidFill>
@@ -7009,13 +6950,13 @@
               <a:t>Next:  </a:t>
             </a:r>
             <a:r>
-              <a:rPr sz="1100" b="0" i="0">
+              <a:rPr sz="1250" b="0" i="0">
                 <a:solidFill>
                   <a:srgbClr val="202124"/>
                 </a:solidFill>
                 <a:latin typeface="Helvetica Neue"/>
               </a:rPr>
-              <a:t>because only one factor moves at a time, the results should be read as four tested slices, not as a full grid.</a:t>
+              <a:t>because only one factor moves at a time, read the results as four tested slices, not as a full grid.</a:t>
             </a:r>
           </a:p>
         </p:txBody>
@@ -7028,8 +6969,8 @@
         </p:nvSpPr>
         <p:spPr>
           <a:xfrm>
-            <a:off x="502920" y="6400800"/>
-            <a:ext cx="11155680" cy="320040"/>
+            <a:off x="502920" y="6419088"/>
+            <a:ext cx="11155680" cy="301752"/>
           </a:xfrm>
           <a:prstGeom prst="rect">
             <a:avLst/>
@@ -7051,13 +6992,13 @@
               </a:spcAft>
             </a:pPr>
             <a:r>
-              <a:rPr sz="850" b="0" i="0">
+              <a:rPr sz="950" b="0" i="0">
                 <a:solidFill>
                   <a:srgbClr val="5F6368"/>
                 </a:solidFill>
                 <a:latin typeface="Helvetica Neue"/>
               </a:rPr>
-              <a:t>An automated check refuses to run a condition whose frozen components differ from the baseline's or that moves more than one factor; the baseline cell is reused, not re-run.</a:t>
+              <a:t>An automated check refuses any condition whose frozen components differ from the baseline's or that moves more than one factor; the baseline cell is reused, not re-run.</a:t>
             </a:r>
           </a:p>
         </p:txBody>
@@ -7111,7 +7052,7 @@
               </a:spcAft>
             </a:pPr>
             <a:r>
-              <a:rPr sz="1100" b="1" i="0">
+              <a:rPr sz="1150" b="1" i="0">
                 <a:solidFill>
                   <a:srgbClr val="C5221F"/>
                 </a:solidFill>
@@ -7131,7 +7072,7 @@
         <p:spPr>
           <a:xfrm>
             <a:off x="502920" y="512064"/>
-            <a:ext cx="11155680" cy="457200"/>
+            <a:ext cx="11155680" cy="475488"/>
           </a:xfrm>
           <a:prstGeom prst="rect">
             <a:avLst/>
@@ -7153,7 +7094,7 @@
               </a:spcAft>
             </a:pPr>
             <a:r>
-              <a:rPr sz="2400" b="1" i="0">
+              <a:rPr sz="2600" b="1" i="0">
                 <a:solidFill>
                   <a:srgbClr val="1F2A44"/>
                 </a:solidFill>
@@ -7172,7 +7113,7 @@
         </p:nvSpPr>
         <p:spPr>
           <a:xfrm>
-            <a:off x="502920" y="1005840"/>
+            <a:off x="502920" y="1024128"/>
             <a:ext cx="11155680" cy="347472"/>
           </a:xfrm>
           <a:prstGeom prst="rect">
@@ -7195,7 +7136,7 @@
               </a:spcAft>
             </a:pPr>
             <a:r>
-              <a:rPr sz="1100" b="0" i="0">
+              <a:rPr sz="1200" b="0" i="0">
                 <a:solidFill>
                   <a:srgbClr val="5F6368"/>
                 </a:solidFill>
@@ -7214,8 +7155,8 @@
         </p:nvSpPr>
         <p:spPr>
           <a:xfrm>
-            <a:off x="502920" y="1463040"/>
-            <a:ext cx="6766560" cy="512064"/>
+            <a:off x="502920" y="1481328"/>
+            <a:ext cx="6903720" cy="585216"/>
           </a:xfrm>
           <a:prstGeom prst="roundRect">
             <a:avLst/>
@@ -7246,8 +7187,8 @@
         </p:nvSpPr>
         <p:spPr>
           <a:xfrm>
-            <a:off x="621792" y="1554480"/>
-            <a:ext cx="1554480" cy="365760"/>
+            <a:off x="640080" y="1609344"/>
+            <a:ext cx="1691640" cy="365760"/>
           </a:xfrm>
           <a:prstGeom prst="rect">
             <a:avLst/>
@@ -7269,7 +7210,7 @@
               </a:spcAft>
             </a:pPr>
             <a:r>
-              <a:rPr sz="1050" b="1" i="0">
+              <a:rPr sz="1250" b="1" i="0">
                 <a:solidFill>
                   <a:srgbClr val="1A73E8"/>
                 </a:solidFill>
@@ -7288,8 +7229,8 @@
         </p:nvSpPr>
         <p:spPr>
           <a:xfrm>
-            <a:off x="2194560" y="1554480"/>
-            <a:ext cx="868680" cy="329184"/>
+            <a:off x="2331720" y="1591056"/>
+            <a:ext cx="960120" cy="365760"/>
           </a:xfrm>
           <a:prstGeom prst="roundRect">
             <a:avLst/>
@@ -7310,7 +7251,7 @@
           <a:p>
             <a:pPr algn="ctr"/>
             <a:r>
-              <a:rPr sz="950" b="0">
+              <a:rPr sz="1150" b="0">
                 <a:solidFill>
                   <a:srgbClr val="202124"/>
                 </a:solidFill>
@@ -7329,8 +7270,8 @@
         </p:nvSpPr>
         <p:spPr>
           <a:xfrm>
-            <a:off x="3017520" y="1554480"/>
-            <a:ext cx="182880" cy="329184"/>
+            <a:off x="3236975" y="1591056"/>
+            <a:ext cx="219456" cy="329184"/>
           </a:xfrm>
           <a:prstGeom prst="rect">
             <a:avLst/>
@@ -7352,7 +7293,7 @@
               </a:spcAft>
             </a:pPr>
             <a:r>
-              <a:rPr sz="1100" b="0" i="0">
+              <a:rPr sz="1200" b="0" i="0">
                 <a:solidFill>
                   <a:srgbClr val="5F6368"/>
                 </a:solidFill>
@@ -7371,8 +7312,8 @@
         </p:nvSpPr>
         <p:spPr>
           <a:xfrm>
-            <a:off x="3218688" y="1554480"/>
-            <a:ext cx="868680" cy="329184"/>
+            <a:off x="3474720" y="1591056"/>
+            <a:ext cx="960120" cy="365760"/>
           </a:xfrm>
           <a:prstGeom prst="roundRect">
             <a:avLst/>
@@ -7393,7 +7334,7 @@
           <a:p>
             <a:pPr algn="ctr"/>
             <a:r>
-              <a:rPr sz="950" b="1">
+              <a:rPr sz="1150" b="1">
                 <a:solidFill>
                   <a:srgbClr val="FFFFFF"/>
                 </a:solidFill>
@@ -7412,8 +7353,8 @@
         </p:nvSpPr>
         <p:spPr>
           <a:xfrm>
-            <a:off x="4041648" y="1554480"/>
-            <a:ext cx="182880" cy="329184"/>
+            <a:off x="4379976" y="1591056"/>
+            <a:ext cx="219456" cy="329184"/>
           </a:xfrm>
           <a:prstGeom prst="rect">
             <a:avLst/>
@@ -7435,7 +7376,7 @@
               </a:spcAft>
             </a:pPr>
             <a:r>
-              <a:rPr sz="1100" b="0" i="0">
+              <a:rPr sz="1200" b="0" i="0">
                 <a:solidFill>
                   <a:srgbClr val="5F6368"/>
                 </a:solidFill>
@@ -7454,8 +7395,8 @@
         </p:nvSpPr>
         <p:spPr>
           <a:xfrm>
-            <a:off x="4242816" y="1554480"/>
-            <a:ext cx="868680" cy="329184"/>
+            <a:off x="4617720" y="1591056"/>
+            <a:ext cx="960120" cy="365760"/>
           </a:xfrm>
           <a:prstGeom prst="roundRect">
             <a:avLst/>
@@ -7476,7 +7417,7 @@
           <a:p>
             <a:pPr algn="ctr"/>
             <a:r>
-              <a:rPr sz="950" b="0">
+              <a:rPr sz="1150" b="0">
                 <a:solidFill>
                   <a:srgbClr val="202124"/>
                 </a:solidFill>
@@ -7495,8 +7436,8 @@
         </p:nvSpPr>
         <p:spPr>
           <a:xfrm>
-            <a:off x="5166360" y="1572768"/>
-            <a:ext cx="2057400" cy="329184"/>
+            <a:off x="5669280" y="1591056"/>
+            <a:ext cx="1737360" cy="365760"/>
           </a:xfrm>
           <a:prstGeom prst="rect">
             <a:avLst/>
@@ -7518,7 +7459,7 @@
               </a:spcAft>
             </a:pPr>
             <a:r>
-              <a:rPr sz="900" b="0" i="0">
+              <a:rPr sz="1000" b="0" i="0">
                 <a:solidFill>
                   <a:srgbClr val="5F6368"/>
                 </a:solidFill>
@@ -7537,8 +7478,8 @@
         </p:nvSpPr>
         <p:spPr>
           <a:xfrm>
-            <a:off x="502920" y="2066544"/>
-            <a:ext cx="6766560" cy="512064"/>
+            <a:off x="502920" y="2157984"/>
+            <a:ext cx="6903720" cy="585216"/>
           </a:xfrm>
           <a:prstGeom prst="roundRect">
             <a:avLst/>
@@ -7569,8 +7510,8 @@
         </p:nvSpPr>
         <p:spPr>
           <a:xfrm>
-            <a:off x="621792" y="2157984"/>
-            <a:ext cx="1554480" cy="365760"/>
+            <a:off x="640080" y="2286000"/>
+            <a:ext cx="1691640" cy="365760"/>
           </a:xfrm>
           <a:prstGeom prst="rect">
             <a:avLst/>
@@ -7592,7 +7533,7 @@
               </a:spcAft>
             </a:pPr>
             <a:r>
-              <a:rPr sz="1050" b="1" i="0">
+              <a:rPr sz="1250" b="1" i="0">
                 <a:solidFill>
                   <a:srgbClr val="188038"/>
                 </a:solidFill>
@@ -7611,8 +7552,8 @@
         </p:nvSpPr>
         <p:spPr>
           <a:xfrm>
-            <a:off x="2194560" y="2157984"/>
-            <a:ext cx="868680" cy="329184"/>
+            <a:off x="2331720" y="2267712"/>
+            <a:ext cx="960120" cy="365760"/>
           </a:xfrm>
           <a:prstGeom prst="roundRect">
             <a:avLst/>
@@ -7633,7 +7574,7 @@
           <a:p>
             <a:pPr algn="ctr"/>
             <a:r>
-              <a:rPr sz="950" b="1">
+              <a:rPr sz="1150" b="1">
                 <a:solidFill>
                   <a:srgbClr val="FFFFFF"/>
                 </a:solidFill>
@@ -7652,8 +7593,8 @@
         </p:nvSpPr>
         <p:spPr>
           <a:xfrm>
-            <a:off x="3017520" y="2157984"/>
-            <a:ext cx="182880" cy="329184"/>
+            <a:off x="3236975" y="2267712"/>
+            <a:ext cx="219456" cy="329184"/>
           </a:xfrm>
           <a:prstGeom prst="rect">
             <a:avLst/>
@@ -7675,7 +7616,7 @@
               </a:spcAft>
             </a:pPr>
             <a:r>
-              <a:rPr sz="1100" b="0" i="0">
+              <a:rPr sz="1200" b="0" i="0">
                 <a:solidFill>
                   <a:srgbClr val="5F6368"/>
                 </a:solidFill>
@@ -7694,8 +7635,8 @@
         </p:nvSpPr>
         <p:spPr>
           <a:xfrm>
-            <a:off x="3218688" y="2157984"/>
-            <a:ext cx="868680" cy="329184"/>
+            <a:off x="3474720" y="2267712"/>
+            <a:ext cx="960120" cy="365760"/>
           </a:xfrm>
           <a:prstGeom prst="roundRect">
             <a:avLst/>
@@ -7716,7 +7657,7 @@
           <a:p>
             <a:pPr algn="ctr"/>
             <a:r>
-              <a:rPr sz="950" b="0">
+              <a:rPr sz="1150" b="0">
                 <a:solidFill>
                   <a:srgbClr val="202124"/>
                 </a:solidFill>
@@ -7735,8 +7676,8 @@
         </p:nvSpPr>
         <p:spPr>
           <a:xfrm>
-            <a:off x="4041648" y="2157984"/>
-            <a:ext cx="182880" cy="329184"/>
+            <a:off x="4379976" y="2267712"/>
+            <a:ext cx="219456" cy="329184"/>
           </a:xfrm>
           <a:prstGeom prst="rect">
             <a:avLst/>
@@ -7758,7 +7699,7 @@
               </a:spcAft>
             </a:pPr>
             <a:r>
-              <a:rPr sz="1100" b="0" i="0">
+              <a:rPr sz="1200" b="0" i="0">
                 <a:solidFill>
                   <a:srgbClr val="5F6368"/>
                 </a:solidFill>
@@ -7777,8 +7718,8 @@
         </p:nvSpPr>
         <p:spPr>
           <a:xfrm>
-            <a:off x="4242816" y="2157984"/>
-            <a:ext cx="868680" cy="329184"/>
+            <a:off x="4617720" y="2267712"/>
+            <a:ext cx="960120" cy="365760"/>
           </a:xfrm>
           <a:prstGeom prst="roundRect">
             <a:avLst/>
@@ -7799,7 +7740,7 @@
           <a:p>
             <a:pPr algn="ctr"/>
             <a:r>
-              <a:rPr sz="950" b="0">
+              <a:rPr sz="1150" b="0">
                 <a:solidFill>
                   <a:srgbClr val="202124"/>
                 </a:solidFill>
@@ -7818,8 +7759,8 @@
         </p:nvSpPr>
         <p:spPr>
           <a:xfrm>
-            <a:off x="5166360" y="2176272"/>
-            <a:ext cx="2057400" cy="329184"/>
+            <a:off x="5669280" y="2267712"/>
+            <a:ext cx="1737360" cy="365760"/>
           </a:xfrm>
           <a:prstGeom prst="rect">
             <a:avLst/>
@@ -7841,7 +7782,7 @@
               </a:spcAft>
             </a:pPr>
             <a:r>
-              <a:rPr sz="900" b="0" i="0">
+              <a:rPr sz="1000" b="0" i="0">
                 <a:solidFill>
                   <a:srgbClr val="5F6368"/>
                 </a:solidFill>
@@ -7860,8 +7801,8 @@
         </p:nvSpPr>
         <p:spPr>
           <a:xfrm>
-            <a:off x="502920" y="2670048"/>
-            <a:ext cx="6766560" cy="512064"/>
+            <a:off x="502920" y="2834640"/>
+            <a:ext cx="6903720" cy="585216"/>
           </a:xfrm>
           <a:prstGeom prst="roundRect">
             <a:avLst/>
@@ -7892,8 +7833,8 @@
         </p:nvSpPr>
         <p:spPr>
           <a:xfrm>
-            <a:off x="621792" y="2761488"/>
-            <a:ext cx="1554480" cy="365760"/>
+            <a:off x="640080" y="2962656"/>
+            <a:ext cx="1691640" cy="365760"/>
           </a:xfrm>
           <a:prstGeom prst="rect">
             <a:avLst/>
@@ -7915,7 +7856,7 @@
               </a:spcAft>
             </a:pPr>
             <a:r>
-              <a:rPr sz="1050" b="1" i="0">
+              <a:rPr sz="1250" b="1" i="0">
                 <a:solidFill>
                   <a:srgbClr val="F9AB00"/>
                 </a:solidFill>
@@ -7934,8 +7875,8 @@
         </p:nvSpPr>
         <p:spPr>
           <a:xfrm>
-            <a:off x="2194560" y="2761488"/>
-            <a:ext cx="868680" cy="329184"/>
+            <a:off x="2331720" y="2944368"/>
+            <a:ext cx="960120" cy="365760"/>
           </a:xfrm>
           <a:prstGeom prst="roundRect">
             <a:avLst/>
@@ -7956,7 +7897,7 @@
           <a:p>
             <a:pPr algn="ctr"/>
             <a:r>
-              <a:rPr sz="950" b="1">
+              <a:rPr sz="1150" b="1">
                 <a:solidFill>
                   <a:srgbClr val="FFFFFF"/>
                 </a:solidFill>
@@ -7975,8 +7916,8 @@
         </p:nvSpPr>
         <p:spPr>
           <a:xfrm>
-            <a:off x="3017520" y="2761488"/>
-            <a:ext cx="182880" cy="329184"/>
+            <a:off x="3236975" y="2944368"/>
+            <a:ext cx="219456" cy="329184"/>
           </a:xfrm>
           <a:prstGeom prst="rect">
             <a:avLst/>
@@ -7998,7 +7939,7 @@
               </a:spcAft>
             </a:pPr>
             <a:r>
-              <a:rPr sz="1100" b="0" i="0">
+              <a:rPr sz="1200" b="0" i="0">
                 <a:solidFill>
                   <a:srgbClr val="5F6368"/>
                 </a:solidFill>
@@ -8017,8 +7958,8 @@
         </p:nvSpPr>
         <p:spPr>
           <a:xfrm>
-            <a:off x="3218688" y="2761488"/>
-            <a:ext cx="868680" cy="329184"/>
+            <a:off x="3474720" y="2944368"/>
+            <a:ext cx="960120" cy="365760"/>
           </a:xfrm>
           <a:prstGeom prst="roundRect">
             <a:avLst/>
@@ -8039,7 +7980,7 @@
           <a:p>
             <a:pPr algn="ctr"/>
             <a:r>
-              <a:rPr sz="950" b="0">
+              <a:rPr sz="1150" b="0">
                 <a:solidFill>
                   <a:srgbClr val="202124"/>
                 </a:solidFill>
@@ -8058,8 +7999,8 @@
         </p:nvSpPr>
         <p:spPr>
           <a:xfrm>
-            <a:off x="5166360" y="2779776"/>
-            <a:ext cx="2057400" cy="329184"/>
+            <a:off x="5669280" y="2944368"/>
+            <a:ext cx="1737360" cy="365760"/>
           </a:xfrm>
           <a:prstGeom prst="rect">
             <a:avLst/>
@@ -8081,7 +8022,7 @@
               </a:spcAft>
             </a:pPr>
             <a:r>
-              <a:rPr sz="900" b="0" i="0">
+              <a:rPr sz="1000" b="0" i="0">
                 <a:solidFill>
                   <a:srgbClr val="5F6368"/>
                 </a:solidFill>
@@ -8100,8 +8041,8 @@
         </p:nvSpPr>
         <p:spPr>
           <a:xfrm>
-            <a:off x="502920" y="3273552"/>
-            <a:ext cx="6766560" cy="512064"/>
+            <a:off x="502920" y="3511296"/>
+            <a:ext cx="6903720" cy="585216"/>
           </a:xfrm>
           <a:prstGeom prst="roundRect">
             <a:avLst/>
@@ -8132,8 +8073,8 @@
         </p:nvSpPr>
         <p:spPr>
           <a:xfrm>
-            <a:off x="621792" y="3364992"/>
-            <a:ext cx="1554480" cy="365760"/>
+            <a:off x="640080" y="3639312"/>
+            <a:ext cx="1691640" cy="365760"/>
           </a:xfrm>
           <a:prstGeom prst="rect">
             <a:avLst/>
@@ -8155,7 +8096,7 @@
               </a:spcAft>
             </a:pPr>
             <a:r>
-              <a:rPr sz="1050" b="1" i="0">
+              <a:rPr sz="1250" b="1" i="0">
                 <a:solidFill>
                   <a:srgbClr val="D93025"/>
                 </a:solidFill>
@@ -8174,8 +8115,8 @@
         </p:nvSpPr>
         <p:spPr>
           <a:xfrm>
-            <a:off x="2194560" y="3364992"/>
-            <a:ext cx="868680" cy="329184"/>
+            <a:off x="2331720" y="3621024"/>
+            <a:ext cx="960120" cy="365760"/>
           </a:xfrm>
           <a:prstGeom prst="roundRect">
             <a:avLst/>
@@ -8196,7 +8137,7 @@
           <a:p>
             <a:pPr algn="ctr"/>
             <a:r>
-              <a:rPr sz="950" b="0">
+              <a:rPr sz="1150" b="0">
                 <a:solidFill>
                   <a:srgbClr val="202124"/>
                 </a:solidFill>
@@ -8215,8 +8156,8 @@
         </p:nvSpPr>
         <p:spPr>
           <a:xfrm>
-            <a:off x="3017520" y="3364992"/>
-            <a:ext cx="182880" cy="329184"/>
+            <a:off x="3236975" y="3621024"/>
+            <a:ext cx="219456" cy="329184"/>
           </a:xfrm>
           <a:prstGeom prst="rect">
             <a:avLst/>
@@ -8238,7 +8179,7 @@
               </a:spcAft>
             </a:pPr>
             <a:r>
-              <a:rPr sz="1100" b="0" i="0">
+              <a:rPr sz="1200" b="0" i="0">
                 <a:solidFill>
                   <a:srgbClr val="5F6368"/>
                 </a:solidFill>
@@ -8257,8 +8198,8 @@
         </p:nvSpPr>
         <p:spPr>
           <a:xfrm>
-            <a:off x="3218688" y="3364992"/>
-            <a:ext cx="868680" cy="329184"/>
+            <a:off x="3474720" y="3621024"/>
+            <a:ext cx="960120" cy="365760"/>
           </a:xfrm>
           <a:prstGeom prst="roundRect">
             <a:avLst/>
@@ -8279,7 +8220,7 @@
           <a:p>
             <a:pPr algn="ctr"/>
             <a:r>
-              <a:rPr sz="950" b="1">
+              <a:rPr sz="1150" b="1">
                 <a:solidFill>
                   <a:srgbClr val="FFFFFF"/>
                 </a:solidFill>
@@ -8298,8 +8239,8 @@
         </p:nvSpPr>
         <p:spPr>
           <a:xfrm>
-            <a:off x="5166360" y="3383280"/>
-            <a:ext cx="2057400" cy="329184"/>
+            <a:off x="5669280" y="3621024"/>
+            <a:ext cx="1737360" cy="365760"/>
           </a:xfrm>
           <a:prstGeom prst="rect">
             <a:avLst/>
@@ -8321,7 +8262,7 @@
               </a:spcAft>
             </a:pPr>
             <a:r>
-              <a:rPr sz="900" b="0" i="0">
+              <a:rPr sz="1000" b="0" i="0">
                 <a:solidFill>
                   <a:srgbClr val="5F6368"/>
                 </a:solidFill>
@@ -8340,8 +8281,8 @@
         </p:nvSpPr>
         <p:spPr>
           <a:xfrm>
-            <a:off x="502920" y="3931920"/>
-            <a:ext cx="6766560" cy="320040"/>
+            <a:off x="502920" y="4224528"/>
+            <a:ext cx="6903720" cy="320040"/>
           </a:xfrm>
           <a:prstGeom prst="rect">
             <a:avLst/>
@@ -8363,7 +8304,7 @@
               </a:spcAft>
             </a:pPr>
             <a:r>
-              <a:rPr sz="950" b="1" i="0">
+              <a:rPr sz="1100" b="1" i="0">
                 <a:solidFill>
                   <a:srgbClr val="1F2A44"/>
                 </a:solidFill>
@@ -8372,13 +8313,13 @@
               <a:t>dark chip</a:t>
             </a:r>
             <a:r>
-              <a:rPr sz="950" b="0" i="0">
+              <a:rPr sz="1100" b="0" i="0">
                 <a:solidFill>
                   <a:srgbClr val="5F6368"/>
                 </a:solidFill>
                 <a:latin typeface="Helvetica Neue"/>
               </a:rPr>
-              <a:t> = the baseline level, present in every slice. Each slice's other conditions were run once, at the fixed settings shown.</a:t>
+              <a:t> = the baseline level, present in every slice.</a:t>
             </a:r>
           </a:p>
         </p:txBody>
@@ -8391,8 +8332,8 @@
         </p:nvSpPr>
         <p:spPr>
           <a:xfrm>
-            <a:off x="7498079" y="1463040"/>
-            <a:ext cx="4160520" cy="1097280"/>
+            <a:off x="7635240" y="1481328"/>
+            <a:ext cx="4023360" cy="1234440"/>
           </a:xfrm>
           <a:prstGeom prst="roundRect">
             <a:avLst/>
@@ -8423,8 +8364,8 @@
         </p:nvSpPr>
         <p:spPr>
           <a:xfrm>
-            <a:off x="7626095" y="1536192"/>
-            <a:ext cx="3904488" cy="950976"/>
+            <a:off x="7781544" y="1572768"/>
+            <a:ext cx="3730752" cy="1051560"/>
           </a:xfrm>
           <a:prstGeom prst="rect">
             <a:avLst/>
@@ -8442,7 +8383,26 @@
                 <a:spcPct val="100000"/>
               </a:lnSpc>
               <a:spcAft>
-                <a:spcPts val="300"/>
+                <a:spcPts val="400"/>
+              </a:spcAft>
+            </a:pPr>
+            <a:r>
+              <a:rPr sz="1350" b="1" i="0">
+                <a:solidFill>
+                  <a:srgbClr val="D93025"/>
+                </a:solidFill>
+                <a:latin typeface="Helvetica Neue"/>
+              </a:rPr>
+              <a:t>Model tiers (defined here once)</a:t>
+            </a:r>
+          </a:p>
+          <a:p>
+            <a:pPr>
+              <a:lnSpc>
+                <a:spcPct val="100000"/>
+              </a:lnSpc>
+              <a:spcAft>
+                <a:spcPts val="400"/>
               </a:spcAft>
             </a:pPr>
             <a:r>
@@ -8452,7 +8412,34 @@
                 </a:solidFill>
                 <a:latin typeface="Helvetica Neue"/>
               </a:rPr>
-              <a:t>Model tiers (fixed labels, defined here once)</a:t>
+              <a:t>Low</a:t>
+            </a:r>
+            <a:r>
+              <a:rPr sz="1200" b="0" i="0">
+                <a:solidFill>
+                  <a:srgbClr val="202124"/>
+                </a:solidFill>
+                <a:latin typeface="Helvetica Neue"/>
+              </a:rPr>
+              <a:t> = gpt-4.1-mini     </a:t>
+            </a:r>
+            <a:r>
+              <a:rPr sz="1200" b="1" i="0">
+                <a:solidFill>
+                  <a:srgbClr val="D93025"/>
+                </a:solidFill>
+                <a:latin typeface="Helvetica Neue"/>
+              </a:rPr>
+              <a:t>High</a:t>
+            </a:r>
+            <a:r>
+              <a:rPr sz="1200" b="0" i="0">
+                <a:solidFill>
+                  <a:srgbClr val="202124"/>
+                </a:solidFill>
+                <a:latin typeface="Helvetica Neue"/>
+              </a:rPr>
+              <a:t> = gpt-5.4-mini</a:t>
             </a:r>
           </a:p>
           <a:p>
@@ -8461,63 +8448,17 @@
                 <a:spcPct val="100000"/>
               </a:lnSpc>
               <a:spcAft>
-                <a:spcPts val="300"/>
-              </a:spcAft>
-            </a:pPr>
-            <a:r>
-              <a:rPr sz="1000" b="1" i="0">
-                <a:solidFill>
-                  <a:srgbClr val="D93025"/>
-                </a:solidFill>
-                <a:latin typeface="Helvetica Neue"/>
-              </a:rPr>
-              <a:t>Low</a:t>
-            </a:r>
-            <a:r>
-              <a:rPr sz="1000" b="0" i="0">
-                <a:solidFill>
-                  <a:srgbClr val="202124"/>
-                </a:solidFill>
-                <a:latin typeface="Helvetica Neue"/>
-              </a:rPr>
-              <a:t> = gpt-4.1-mini      </a:t>
-            </a:r>
-            <a:r>
-              <a:rPr sz="1000" b="1" i="0">
-                <a:solidFill>
-                  <a:srgbClr val="D93025"/>
-                </a:solidFill>
-                <a:latin typeface="Helvetica Neue"/>
-              </a:rPr>
-              <a:t>High</a:t>
-            </a:r>
-            <a:r>
-              <a:rPr sz="1000" b="0" i="0">
-                <a:solidFill>
-                  <a:srgbClr val="202124"/>
-                </a:solidFill>
-                <a:latin typeface="Helvetica Neue"/>
-              </a:rPr>
-              <a:t> = gpt-5.4-mini</a:t>
-            </a:r>
-          </a:p>
-          <a:p>
-            <a:pPr>
-              <a:lnSpc>
-                <a:spcPct val="100000"/>
-              </a:lnSpc>
-              <a:spcAft>
-                <a:spcPts val="300"/>
-              </a:spcAft>
-            </a:pPr>
-            <a:r>
-              <a:rPr sz="950" b="0" i="0">
+                <a:spcPts val="400"/>
+              </a:spcAft>
+            </a:pPr>
+            <a:r>
+              <a:rPr sz="1100" b="0" i="0">
                 <a:solidFill>
                   <a:srgbClr val="5F6368"/>
                 </a:solidFill>
                 <a:latin typeface="Helvetica Neue"/>
               </a:rPr>
-              <a:t>The label names the predeclared capability tier, not the score observed in a condition. Open and Closed name the search workflow; Low and High name the model.</a:t>
+              <a:t>Fixed capability-tier labels, not the observed score. Open / Closed name the search workflow; Low / High name the model.</a:t>
             </a:r>
           </a:p>
         </p:txBody>
@@ -8530,8 +8471,8 @@
         </p:nvSpPr>
         <p:spPr>
           <a:xfrm>
-            <a:off x="7498079" y="2697480"/>
-            <a:ext cx="4160520" cy="2103120"/>
+            <a:off x="7635240" y="2834640"/>
+            <a:ext cx="4023360" cy="2286000"/>
           </a:xfrm>
           <a:prstGeom prst="roundRect">
             <a:avLst/>
@@ -8562,8 +8503,8 @@
         </p:nvSpPr>
         <p:spPr>
           <a:xfrm>
-            <a:off x="7626095" y="2770632"/>
-            <a:ext cx="3904488" cy="1956816"/>
+            <a:off x="7781544" y="2926080"/>
+            <a:ext cx="3730752" cy="2103120"/>
           </a:xfrm>
           <a:prstGeom prst="rect">
             <a:avLst/>
@@ -8581,17 +8522,36 @@
                 <a:spcPct val="100000"/>
               </a:lnSpc>
               <a:spcAft>
+                <a:spcPts val="400"/>
+              </a:spcAft>
+            </a:pPr>
+            <a:r>
+              <a:rPr sz="1350" b="1" i="0">
+                <a:solidFill>
+                  <a:srgbClr val="1F2A44"/>
+                </a:solidFill>
+                <a:latin typeface="Helvetica Neue"/>
+              </a:rPr>
+              <a:t>Reading every result figure</a:t>
+            </a:r>
+          </a:p>
+          <a:p>
+            <a:pPr>
+              <a:lnSpc>
+                <a:spcPct val="100000"/>
+              </a:lnSpc>
+              <a:spcAft>
                 <a:spcPts val="300"/>
               </a:spcAft>
             </a:pPr>
             <a:r>
-              <a:rPr sz="1200" b="1" i="0">
-                <a:solidFill>
-                  <a:srgbClr val="1F2A44"/>
-                </a:solidFill>
-                <a:latin typeface="Helvetica Neue"/>
-              </a:rPr>
-              <a:t>How to read every result figure</a:t>
+              <a:rPr sz="1150" b="0" i="0">
+                <a:solidFill>
+                  <a:srgbClr val="202124"/>
+                </a:solidFill>
+                <a:latin typeface="Helvetica Neue"/>
+              </a:rPr>
+              <a:t>•  dots = 12 paired seeds · marker = mean · bar = 95% CI</a:t>
             </a:r>
           </a:p>
           <a:p>
@@ -8600,17 +8560,17 @@
                 <a:spcPct val="100000"/>
               </a:lnSpc>
               <a:spcAft>
-                <a:spcPts val="200"/>
-              </a:spcAft>
-            </a:pPr>
-            <a:r>
-              <a:rPr sz="950" b="0" i="0">
+                <a:spcPts val="300"/>
+              </a:spcAft>
+            </a:pPr>
+            <a:r>
+              <a:rPr sz="1150" b="0" i="0">
                 <a:solidFill>
                   <a:srgbClr val="202124"/>
                 </a:solidFill>
                 <a:latin typeface="Helvetica Neue"/>
               </a:rPr>
-              <a:t>•  small dots = the 12 paired seeds; large marker = mean; vertical interval = bootstrap 95% CI; higher trash fidelity is better</a:t>
+              <a:t>•  higher trash fidelity is better</a:t>
             </a:r>
           </a:p>
           <a:p>
@@ -8619,17 +8579,17 @@
                 <a:spcPct val="100000"/>
               </a:lnSpc>
               <a:spcAft>
-                <a:spcPts val="200"/>
-              </a:spcAft>
-            </a:pPr>
-            <a:r>
-              <a:rPr sz="950" b="0" i="0">
+                <a:spcPts val="300"/>
+              </a:spcAft>
+            </a:pPr>
+            <a:r>
+              <a:rPr sz="1150" b="0" i="0">
                 <a:solidFill>
                   <a:srgbClr val="202124"/>
                 </a:solidFill>
                 <a:latin typeface="Helvetica Neue"/>
               </a:rPr>
-              <a:t>•  x-axis groups always in the order Random → Greedy → Low → High</a:t>
+              <a:t>•  groups always: Random → Greedy → Low → High</a:t>
             </a:r>
           </a:p>
           <a:p>
@@ -8638,17 +8598,17 @@
                 <a:spcPct val="100000"/>
               </a:lnSpc>
               <a:spcAft>
-                <a:spcPts val="200"/>
-              </a:spcAft>
-            </a:pPr>
-            <a:r>
-              <a:rPr sz="950" b="0" i="0">
+                <a:spcPts val="300"/>
+              </a:spcAft>
+            </a:pPr>
+            <a:r>
+              <a:rPr sz="1150" b="0" i="0">
                 <a:solidFill>
                   <a:srgbClr val="202124"/>
                 </a:solidFill>
                 <a:latin typeface="Helvetica Neue"/>
               </a:rPr>
-              <a:t>•  within a tier: LLM-Open = blue triangle, LLM-Closed = red diamond, side by side</a:t>
+              <a:t>•  LLM-Open = blue triangle, LLM-Closed = red diamond</a:t>
             </a:r>
           </a:p>
           <a:p>
@@ -8657,17 +8617,17 @@
                 <a:spcPct val="100000"/>
               </a:lnSpc>
               <a:spcAft>
-                <a:spcPts val="200"/>
-              </a:spcAft>
-            </a:pPr>
-            <a:r>
-              <a:rPr sz="950" b="0" i="0">
+                <a:spcPts val="300"/>
+              </a:spcAft>
+            </a:pPr>
+            <a:r>
+              <a:rPr sz="1150" b="0" i="0">
                 <a:solidFill>
                   <a:srgbClr val="202124"/>
                 </a:solidFill>
                 <a:latin typeface="Helvetica Neue"/>
               </a:rPr>
-              <a:t>•  tier = marker fill: High filled, Low hollow</a:t>
+              <a:t>•  High = filled marker, Low = hollow marker</a:t>
             </a:r>
           </a:p>
           <a:p>
@@ -8676,36 +8636,17 @@
                 <a:spcPct val="100000"/>
               </a:lnSpc>
               <a:spcAft>
-                <a:spcPts val="200"/>
-              </a:spcAft>
-            </a:pPr>
-            <a:r>
-              <a:rPr sz="950" b="0" i="0">
+                <a:spcPts val="300"/>
+              </a:spcAft>
+            </a:pPr>
+            <a:r>
+              <a:rPr sz="1150" b="0" i="0">
                 <a:solidFill>
                   <a:srgbClr val="202124"/>
                 </a:solidFill>
                 <a:latin typeface="Helvetica Neue"/>
               </a:rPr>
-              <a:t>•  thick frame or shaded band = the previous baseline condition</a:t>
-            </a:r>
-          </a:p>
-          <a:p>
-            <a:pPr>
-              <a:lnSpc>
-                <a:spcPct val="100000"/>
-              </a:lnSpc>
-              <a:spcAft>
-                <a:spcPts val="200"/>
-              </a:spcAft>
-            </a:pPr>
-            <a:r>
-              <a:rPr sz="950" b="0" i="0">
-                <a:solidFill>
-                  <a:srgbClr val="202124"/>
-                </a:solidFill>
-                <a:latin typeface="Helvetica Neue"/>
-              </a:rPr>
-              <a:t>•  the small lower panel shows the two key paired differences with 95% CI; filled = p &lt; 0.05, hollow = not detected</a:t>
+              <a:t>•  thick frame / shaded band = the baseline</a:t>
             </a:r>
           </a:p>
         </p:txBody>
@@ -8718,8 +8659,8 @@
         </p:nvSpPr>
         <p:spPr>
           <a:xfrm>
-            <a:off x="502920" y="4343400"/>
-            <a:ext cx="6766560" cy="1417320"/>
+            <a:off x="502920" y="4617720"/>
+            <a:ext cx="6903720" cy="1188720"/>
           </a:xfrm>
           <a:prstGeom prst="roundRect">
             <a:avLst/>
@@ -8750,8 +8691,8 @@
         </p:nvSpPr>
         <p:spPr>
           <a:xfrm>
-            <a:off x="640080" y="4398264"/>
-            <a:ext cx="6537960" cy="1325880"/>
+            <a:off x="658368" y="4681728"/>
+            <a:ext cx="6629400" cy="1097280"/>
           </a:xfrm>
           <a:prstGeom prst="rect">
             <a:avLst/>
@@ -8773,22 +8714,22 @@
               </a:spcAft>
             </a:pPr>
             <a:r>
-              <a:rPr sz="1000" b="1" i="0">
+              <a:rPr sz="1200" b="1" i="0">
                 <a:solidFill>
                   <a:srgbClr val="E8710A"/>
                 </a:solidFill>
                 <a:latin typeface="Helvetica Neue"/>
               </a:rPr>
-              <a:t>Where the Low tier was not run </a:t>
-            </a:r>
-            <a:r>
-              <a:rPr sz="1000" b="0" i="0">
+              <a:t>Low was run only in the model slice.  </a:t>
+            </a:r>
+            <a:r>
+              <a:rPr sz="1200" b="0" i="0">
                 <a:solidFill>
                   <a:srgbClr val="202124"/>
                 </a:solidFill>
                 <a:latin typeface="Helvetica Neue"/>
               </a:rPr>
-              <a:t>(budget, qubit and Hamiltonian slices), the figures show Random, Greedy and the High Open / Closed results only, and say so; no Low value is invented. The complete Random → Greedy → Low → High grouping appears on the model slide.</a:t>
+              <a:t>The other slices show Random, Greedy and High only; no Low value is invented.</a:t>
             </a:r>
           </a:p>
           <a:p>
@@ -8801,7 +8742,7 @@
               </a:spcAft>
             </a:pPr>
             <a:r>
-              <a:rPr sz="1000" b="1" i="0">
+              <a:rPr sz="1200" b="1" i="0">
                 <a:solidFill>
                   <a:srgbClr val="202124"/>
                 </a:solidFill>
@@ -8820,8 +8761,8 @@
         </p:nvSpPr>
         <p:spPr>
           <a:xfrm>
-            <a:off x="502920" y="5989320"/>
-            <a:ext cx="73152" cy="329184"/>
+            <a:off x="502920" y="5943600"/>
+            <a:ext cx="73152" cy="365760"/>
           </a:xfrm>
           <a:prstGeom prst="rect">
             <a:avLst/>
@@ -8850,8 +8791,8 @@
         </p:nvSpPr>
         <p:spPr>
           <a:xfrm>
-            <a:off x="685800" y="5971032"/>
-            <a:ext cx="10972800" cy="384048"/>
+            <a:off x="685800" y="5934456"/>
+            <a:ext cx="10972800" cy="402336"/>
           </a:xfrm>
           <a:prstGeom prst="rect">
             <a:avLst/>
@@ -8873,7 +8814,7 @@
               </a:spcAft>
             </a:pPr>
             <a:r>
-              <a:rPr sz="1100" b="1" i="0">
+              <a:rPr sz="1250" b="1" i="0">
                 <a:solidFill>
                   <a:srgbClr val="C5221F"/>
                 </a:solidFill>
@@ -8882,13 +8823,13 @@
               <a:t>Next:  </a:t>
             </a:r>
             <a:r>
-              <a:rPr sz="1100" b="0" i="0">
+              <a:rPr sz="1250" b="0" i="0">
                 <a:solidFill>
                   <a:srgbClr val="202124"/>
                 </a:solidFill>
                 <a:latin typeface="Helvetica Neue"/>
               </a:rPr>
-              <a:t>the first slice changes the amount of search: the evaluation budget B.</a:t>
+              <a:t>the first slice changes the amount of search — the evaluation budget B.</a:t>
             </a:r>
           </a:p>
         </p:txBody>
@@ -8901,8 +8842,8 @@
         </p:nvSpPr>
         <p:spPr>
           <a:xfrm>
-            <a:off x="502920" y="6400800"/>
-            <a:ext cx="11155680" cy="320040"/>
+            <a:off x="502920" y="6419088"/>
+            <a:ext cx="11155680" cy="301752"/>
           </a:xfrm>
           <a:prstGeom prst="rect">
             <a:avLst/>
@@ -8924,7 +8865,7 @@
               </a:spcAft>
             </a:pPr>
             <a:r>
-              <a:rPr sz="850" b="0" i="0">
+              <a:rPr sz="950" b="0" i="0">
                 <a:solidFill>
                   <a:srgbClr val="5F6368"/>
                 </a:solidFill>
@@ -8984,7 +8925,7 @@
               </a:spcAft>
             </a:pPr>
             <a:r>
-              <a:rPr sz="1100" b="1" i="0">
+              <a:rPr sz="1150" b="1" i="0">
                 <a:solidFill>
                   <a:srgbClr val="C5221F"/>
                 </a:solidFill>
@@ -9004,7 +8945,7 @@
         <p:spPr>
           <a:xfrm>
             <a:off x="502920" y="512064"/>
-            <a:ext cx="11155680" cy="457200"/>
+            <a:ext cx="11155680" cy="475488"/>
           </a:xfrm>
           <a:prstGeom prst="rect">
             <a:avLst/>
@@ -9026,7 +8967,7 @@
               </a:spcAft>
             </a:pPr>
             <a:r>
-              <a:rPr sz="2400" b="1" i="0">
+              <a:rPr sz="2600" b="1" i="0">
                 <a:solidFill>
                   <a:srgbClr val="1F2A44"/>
                 </a:solidFill>
@@ -9045,7 +8986,7 @@
         </p:nvSpPr>
         <p:spPr>
           <a:xfrm>
-            <a:off x="502920" y="1005840"/>
+            <a:off x="502920" y="1024128"/>
             <a:ext cx="11155680" cy="347472"/>
           </a:xfrm>
           <a:prstGeom prst="rect">
@@ -9068,13 +9009,13 @@
               </a:spcAft>
             </a:pPr>
             <a:r>
-              <a:rPr sz="1100" b="0" i="0">
+              <a:rPr sz="1200" b="0" i="0">
                 <a:solidFill>
                   <a:srgbClr val="5F6368"/>
                 </a:solidFill>
                 <a:latin typeface="Helvetica Neue"/>
               </a:rPr>
-              <a:t>B = 4 → 8 → 16 with 4 qubits, Ising chain and the High model tier fixed; B = 8 (thick frame) is the previous baseline</a:t>
+              <a:t>B = 4 → 8 → 16 with 4 qubits, Ising chain and High tier fixed; B = 8 (thick frame) is the previous baseline</a:t>
             </a:r>
           </a:p>
         </p:txBody>
@@ -9095,8 +9036,8 @@
         </p:blipFill>
         <p:spPr>
           <a:xfrm>
-            <a:off x="502920" y="1389888"/>
-            <a:ext cx="6474094" cy="3977639"/>
+            <a:off x="457200" y="1417320"/>
+            <a:ext cx="6622926" cy="4069080"/>
           </a:xfrm>
           <a:prstGeom prst="rect">
             <a:avLst/>
@@ -9111,8 +9052,8 @@
         </p:nvSpPr>
         <p:spPr>
           <a:xfrm>
-            <a:off x="7205614" y="1389888"/>
-            <a:ext cx="4483161" cy="4480560"/>
+            <a:off x="7354446" y="1463040"/>
+            <a:ext cx="4334329" cy="4389120"/>
           </a:xfrm>
           <a:prstGeom prst="rect">
             <a:avLst/>
@@ -9130,26 +9071,36 @@
                 <a:spcPct val="100000"/>
               </a:lnSpc>
               <a:spcAft>
-                <a:spcPts val="600"/>
-              </a:spcAft>
-            </a:pPr>
-            <a:r>
-              <a:rPr sz="1000" b="1" i="0">
+                <a:spcPts val="900"/>
+              </a:spcAft>
+            </a:pPr>
+            <a:r>
+              <a:rPr sz="1200" b="1" i="0">
                 <a:solidFill>
                   <a:srgbClr val="1A73E8"/>
                 </a:solidFill>
                 <a:latin typeface="Helvetica Neue"/>
               </a:rPr>
-              <a:t>Semantic proposals stay above non-semantic search at every budget: </a:t>
-            </a:r>
-            <a:r>
-              <a:rPr sz="1000" b="0" i="0">
+              <a:t>Semantic proposals stay above non-semantic search at every budget.</a:t>
+            </a:r>
+          </a:p>
+          <a:p>
+            <a:pPr>
+              <a:lnSpc>
+                <a:spcPct val="100000"/>
+              </a:lnSpc>
+              <a:spcAft>
+                <a:spcPts val="900"/>
+              </a:spcAft>
+            </a:pPr>
+            <a:r>
+              <a:rPr sz="1200" b="0" i="0">
                 <a:solidFill>
                   <a:srgbClr val="202124"/>
                 </a:solidFill>
                 <a:latin typeface="Helvetica Neue"/>
               </a:rPr>
-              <a:t>LLM-Open − Random +0.068 (8/12, p = 0.064) at B = 4, +0.108 (11/12, p &lt; 0.001) at B = 8, +0.079 (11/12, p &lt; 0.001) at B = 16 — positive throughout, not detected at B = 4 where the budget is too small to separate the arms reliably.</a:t>
+              <a:t>Open − Random is positive at all three budgets; at B = 4 it is not detected (+0.068 (8/12, p = 0.064)).</a:t>
             </a:r>
           </a:p>
           <a:p>
@@ -9158,26 +9109,36 @@
                 <a:spcPct val="100000"/>
               </a:lnSpc>
               <a:spcAft>
-                <a:spcPts val="600"/>
-              </a:spcAft>
-            </a:pPr>
-            <a:r>
-              <a:rPr sz="1000" b="1" i="0">
+                <a:spcPts val="900"/>
+              </a:spcAft>
+            </a:pPr>
+            <a:r>
+              <a:rPr sz="1200" b="1" i="0">
                 <a:solidFill>
                   <a:srgbClr val="D93025"/>
                 </a:solidFill>
                 <a:latin typeface="Helvetica Neue"/>
               </a:rPr>
-              <a:t>The Closed − Open advantage shrinks as the budget grows: </a:t>
-            </a:r>
-            <a:r>
-              <a:rPr sz="1000" b="0" i="0">
+              <a:t>The Closed − Open advantage shrinks as the budget grows:</a:t>
+            </a:r>
+          </a:p>
+          <a:p>
+            <a:pPr>
+              <a:lnSpc>
+                <a:spcPct val="100000"/>
+              </a:lnSpc>
+              <a:spcAft>
+                <a:spcPts val="900"/>
+              </a:spcAft>
+            </a:pPr>
+            <a:r>
+              <a:rPr sz="1200" b="0" i="0">
                 <a:solidFill>
                   <a:srgbClr val="202124"/>
                 </a:solidFill>
                 <a:latin typeface="Helvetica Neue"/>
               </a:rPr>
-              <a:t>+0.081 at B = 4 → +0.007 at B = 8 → -0.002 at B = 16 (not detected). Free redesign is worth most when the open batch is thinnest; a wide open batch buys the same breadth without feedback.</a:t>
+              <a:t>+0.081 at B = 4  →  +0.007 at B = 8  →  -0.002 at B = 16 (not detected).</a:t>
             </a:r>
           </a:p>
           <a:p>
@@ -9186,26 +9147,17 @@
                 <a:spcPct val="100000"/>
               </a:lnSpc>
               <a:spcAft>
-                <a:spcPts val="600"/>
-              </a:spcAft>
-            </a:pPr>
-            <a:r>
-              <a:rPr sz="1000" b="1" i="0">
-                <a:solidFill>
-                  <a:srgbClr val="E8710A"/>
-                </a:solidFill>
-                <a:latin typeface="Helvetica Neue"/>
-              </a:rPr>
-              <a:t>Greedy is not a substitute: </a:t>
-            </a:r>
-            <a:r>
-              <a:rPr sz="1000" b="0" i="0">
-                <a:solidFill>
-                  <a:srgbClr val="202124"/>
-                </a:solidFill>
-                <a:latin typeface="Helvetica Neue"/>
-              </a:rPr>
-              <a:t>Greedy − Random is -0.048 (2/12, p = 0.016) at B = 4 — spending half a small budget on single-gate steps costs breadth.</a:t>
+                <a:spcPts val="900"/>
+              </a:spcAft>
+            </a:pPr>
+            <a:r>
+              <a:rPr sz="1200" b="0" i="0">
+                <a:solidFill>
+                  <a:srgbClr val="5F6368"/>
+                </a:solidFill>
+                <a:latin typeface="Helvetica Neue"/>
+              </a:rPr>
+              <a:t>Free redesign pays most when the open batch is thinnest; a wide open batch buys the same breadth without feedback.</a:t>
             </a:r>
           </a:p>
         </p:txBody>
@@ -9218,8 +9170,8 @@
         </p:nvSpPr>
         <p:spPr>
           <a:xfrm>
-            <a:off x="502920" y="5989320"/>
-            <a:ext cx="73152" cy="329184"/>
+            <a:off x="502920" y="5943600"/>
+            <a:ext cx="73152" cy="365760"/>
           </a:xfrm>
           <a:prstGeom prst="rect">
             <a:avLst/>
@@ -9248,8 +9200,8 @@
         </p:nvSpPr>
         <p:spPr>
           <a:xfrm>
-            <a:off x="685800" y="5971032"/>
-            <a:ext cx="10972800" cy="384048"/>
+            <a:off x="685800" y="5934456"/>
+            <a:ext cx="10972800" cy="402336"/>
           </a:xfrm>
           <a:prstGeom prst="rect">
             <a:avLst/>
@@ -9271,7 +9223,7 @@
               </a:spcAft>
             </a:pPr>
             <a:r>
-              <a:rPr sz="1100" b="1" i="0">
+              <a:rPr sz="1250" b="1" i="0">
                 <a:solidFill>
                   <a:srgbClr val="C5221F"/>
                 </a:solidFill>
@@ -9280,7 +9232,7 @@
               <a:t>Next:  </a:t>
             </a:r>
             <a:r>
-              <a:rPr sz="1100" b="0" i="0">
+              <a:rPr sz="1250" b="0" i="0">
                 <a:solidFill>
                   <a:srgbClr val="202124"/>
                 </a:solidFill>
@@ -9299,8 +9251,8 @@
         </p:nvSpPr>
         <p:spPr>
           <a:xfrm>
-            <a:off x="502920" y="6400800"/>
-            <a:ext cx="11155680" cy="320040"/>
+            <a:off x="502920" y="6419088"/>
+            <a:ext cx="11155680" cy="301752"/>
           </a:xfrm>
           <a:prstGeom prst="rect">
             <a:avLst/>
@@ -9322,7 +9274,7 @@
               </a:spcAft>
             </a:pPr>
             <a:r>
-              <a:rPr sz="850" b="0" i="0">
+              <a:rPr sz="950" b="0" i="0">
                 <a:solidFill>
                   <a:srgbClr val="5F6368"/>
                 </a:solidFill>
@@ -9382,7 +9334,7 @@
               </a:spcAft>
             </a:pPr>
             <a:r>
-              <a:rPr sz="1100" b="1" i="0">
+              <a:rPr sz="1150" b="1" i="0">
                 <a:solidFill>
                   <a:srgbClr val="C5221F"/>
                 </a:solidFill>
@@ -9402,7 +9354,7 @@
         <p:spPr>
           <a:xfrm>
             <a:off x="502920" y="512064"/>
-            <a:ext cx="11155680" cy="457200"/>
+            <a:ext cx="11155680" cy="475488"/>
           </a:xfrm>
           <a:prstGeom prst="rect">
             <a:avLst/>
@@ -9424,7 +9376,7 @@
               </a:spcAft>
             </a:pPr>
             <a:r>
-              <a:rPr sz="2400" b="1" i="0">
+              <a:rPr sz="2600" b="1" i="0">
                 <a:solidFill>
                   <a:srgbClr val="1F2A44"/>
                 </a:solidFill>
@@ -9443,7 +9395,7 @@
         </p:nvSpPr>
         <p:spPr>
           <a:xfrm>
-            <a:off x="502920" y="1005840"/>
+            <a:off x="502920" y="1024128"/>
             <a:ext cx="11155680" cy="347472"/>
           </a:xfrm>
           <a:prstGeom prst="rect">
@@ -9466,13 +9418,13 @@
               </a:spcAft>
             </a:pPr>
             <a:r>
-              <a:rPr sz="1100" b="0" i="0">
+              <a:rPr sz="1200" b="0" i="0">
                 <a:solidFill>
                   <a:srgbClr val="5F6368"/>
                 </a:solidFill>
                 <a:latin typeface="Helvetica Neue"/>
               </a:rPr>
-              <a:t>4 → 6 → 8 qubits with B = 8, Ising chain and the High model tier fixed; 4 qubits (thick frame) is the previous baseline</a:t>
+              <a:t>4 → 6 → 8 qubits with B = 8, Ising chain and High tier fixed; 4 qubits (thick frame) is the previous baseline</a:t>
             </a:r>
           </a:p>
         </p:txBody>
@@ -9493,8 +9445,8 @@
         </p:blipFill>
         <p:spPr>
           <a:xfrm>
-            <a:off x="502920" y="1389888"/>
-            <a:ext cx="6456709" cy="3977639"/>
+            <a:off x="457200" y="1417320"/>
+            <a:ext cx="6605141" cy="4069080"/>
           </a:xfrm>
           <a:prstGeom prst="rect">
             <a:avLst/>
@@ -9509,8 +9461,8 @@
         </p:nvSpPr>
         <p:spPr>
           <a:xfrm>
-            <a:off x="7188229" y="1389888"/>
-            <a:ext cx="4500546" cy="4480560"/>
+            <a:off x="7336661" y="1463040"/>
+            <a:ext cx="4352114" cy="4389120"/>
           </a:xfrm>
           <a:prstGeom prst="rect">
             <a:avLst/>
@@ -9528,26 +9480,36 @@
                 <a:spcPct val="100000"/>
               </a:lnSpc>
               <a:spcAft>
-                <a:spcPts val="600"/>
-              </a:spcAft>
-            </a:pPr>
-            <a:r>
-              <a:rPr sz="1000" b="1" i="0">
+                <a:spcPts val="900"/>
+              </a:spcAft>
+            </a:pPr>
+            <a:r>
+              <a:rPr sz="1200" b="1" i="0">
                 <a:solidFill>
                   <a:srgbClr val="1F2A44"/>
                 </a:solidFill>
                 <a:latin typeface="Helvetica Neue"/>
               </a:rPr>
-              <a:t>Finding 1 — absolute fidelity falls as the task widens: </a:t>
-            </a:r>
-            <a:r>
-              <a:rPr sz="1000" b="0" i="0">
+              <a:t>1  Absolute fidelity falls as the task widens</a:t>
+            </a:r>
+          </a:p>
+          <a:p>
+            <a:pPr>
+              <a:lnSpc>
+                <a:spcPct val="100000"/>
+              </a:lnSpc>
+              <a:spcAft>
+                <a:spcPts val="900"/>
+              </a:spcAft>
+            </a:pPr>
+            <a:r>
+              <a:rPr sz="1200" b="0" i="0">
                 <a:solidFill>
                   <a:srgbClr val="202124"/>
                 </a:solidFill>
                 <a:latin typeface="Helvetica Neue"/>
               </a:rPr>
-              <a:t>Random 0.852 → 0.592; LLM-Open 0.960 → 0.876. Width and circuit size grow together (3 rotations + 1 CNOT per qubit).</a:t>
+              <a:t>Random 0.85 → 0.59;  LLM-Open 0.96 → 0.88.</a:t>
             </a:r>
           </a:p>
           <a:p>
@@ -9556,26 +9518,36 @@
                 <a:spcPct val="100000"/>
               </a:lnSpc>
               <a:spcAft>
-                <a:spcPts val="600"/>
-              </a:spcAft>
-            </a:pPr>
-            <a:r>
-              <a:rPr sz="1000" b="1" i="0">
+                <a:spcPts val="900"/>
+              </a:spcAft>
+            </a:pPr>
+            <a:r>
+              <a:rPr sz="1200" b="1" i="0">
                 <a:solidFill>
                   <a:srgbClr val="1A73E8"/>
                 </a:solidFill>
                 <a:latin typeface="Helvetica Neue"/>
               </a:rPr>
-              <a:t>Finding 2 — Open stays strong relative to Random; Closed falls below Open: </a:t>
-            </a:r>
-            <a:r>
-              <a:rPr sz="1000" b="0" i="0">
+              <a:t>2  Open stays strong; Closed falls below Open</a:t>
+            </a:r>
+          </a:p>
+          <a:p>
+            <a:pPr>
+              <a:lnSpc>
+                <a:spcPct val="100000"/>
+              </a:lnSpc>
+              <a:spcAft>
+                <a:spcPts val="900"/>
+              </a:spcAft>
+            </a:pPr>
+            <a:r>
+              <a:rPr sz="1200" b="0" i="0">
                 <a:solidFill>
                   <a:srgbClr val="202124"/>
                 </a:solidFill>
                 <a:latin typeface="Helvetica Neue"/>
               </a:rPr>
-              <a:t>LLM-Open − Random +0.108 → +0.197 → +0.284, significant at all three widths; LLM-Closed − LLM-Open +0.007 → -0.049 → -0.075, reversed at 6 and 8 qubits.</a:t>
+              <a:t>Open − Random  +0.108 → +0.197 → +0.284, significant at every width.</a:t>
             </a:r>
           </a:p>
           <a:p>
@@ -9584,26 +9556,45 @@
                 <a:spcPct val="100000"/>
               </a:lnSpc>
               <a:spcAft>
-                <a:spcPts val="600"/>
-              </a:spcAft>
-            </a:pPr>
-            <a:r>
-              <a:rPr sz="1000" b="1" i="0">
+                <a:spcPts val="900"/>
+              </a:spcAft>
+            </a:pPr>
+            <a:r>
+              <a:rPr sz="1200" b="0" i="0">
+                <a:solidFill>
+                  <a:srgbClr val="202124"/>
+                </a:solidFill>
+                <a:latin typeface="Helvetica Neue"/>
+              </a:rPr>
+              <a:t>Closed − Open  +0.007 → -0.049 → -0.075, reversed at 6 and 8 qubits.</a:t>
+            </a:r>
+          </a:p>
+          <a:p>
+            <a:pPr>
+              <a:lnSpc>
+                <a:spcPct val="100000"/>
+              </a:lnSpc>
+              <a:spcAft>
+                <a:spcPts val="900"/>
+              </a:spcAft>
+            </a:pPr>
+            <a:r>
+              <a:rPr sz="1200" b="1" i="0">
                 <a:solidFill>
                   <a:srgbClr val="5F6368"/>
                 </a:solidFill>
                 <a:latin typeface="Helvetica Neue"/>
               </a:rPr>
-              <a:t>Caveat — proposal validity: </a:t>
-            </a:r>
-            <a:r>
-              <a:rPr sz="1000" b="0" i="0">
+              <a:t>Caveat: </a:t>
+            </a:r>
+            <a:r>
+              <a:rPr sz="1200" b="0" i="0">
                 <a:solidFill>
                   <a:srgbClr val="5F6368"/>
                 </a:solidFill>
                 <a:latin typeface="Helvetica Neue"/>
               </a:rPr>
-              <a:t>the share of closed-loop proposals meeting the gate-count contract (the required 3 rotations + 1 CNOT per qubit) fell from 92% to 70% and 77%; an invalid proposal is spent as a random draw, so part of the reversal is a generation-validity effect.</a:t>
+              <a:t>closed-loop proposals meeting the gate-count contract (the required 3 rotations + 1 CNOT per qubit) fell 92% → 70% → 77%; invalid proposals become random draws.</a:t>
             </a:r>
           </a:p>
           <a:p>
@@ -9612,17 +9603,17 @@
                 <a:spcPct val="100000"/>
               </a:lnSpc>
               <a:spcAft>
-                <a:spcPts val="600"/>
-              </a:spcAft>
-            </a:pPr>
-            <a:r>
-              <a:rPr sz="1000" b="1" i="0">
+                <a:spcPts val="900"/>
+              </a:spcAft>
+            </a:pPr>
+            <a:r>
+              <a:rPr sz="1200" b="1" i="0">
                 <a:solidFill>
                   <a:srgbClr val="C5221F"/>
                 </a:solidFill>
                 <a:latin typeface="Helvetica Neue"/>
               </a:rPr>
-              <a:t>Tested only for the Ising chain and the High tier.</a:t>
+              <a:t>Tested for the Ising chain and the High tier only.</a:t>
             </a:r>
           </a:p>
         </p:txBody>
@@ -9635,8 +9626,8 @@
         </p:nvSpPr>
         <p:spPr>
           <a:xfrm>
-            <a:off x="502920" y="5989320"/>
-            <a:ext cx="73152" cy="329184"/>
+            <a:off x="502920" y="5943600"/>
+            <a:ext cx="73152" cy="365760"/>
           </a:xfrm>
           <a:prstGeom prst="rect">
             <a:avLst/>
@@ -9665,8 +9656,8 @@
         </p:nvSpPr>
         <p:spPr>
           <a:xfrm>
-            <a:off x="685800" y="5971032"/>
-            <a:ext cx="10972800" cy="384048"/>
+            <a:off x="685800" y="5934456"/>
+            <a:ext cx="10972800" cy="402336"/>
           </a:xfrm>
           <a:prstGeom prst="rect">
             <a:avLst/>
@@ -9688,7 +9679,7 @@
               </a:spcAft>
             </a:pPr>
             <a:r>
-              <a:rPr sz="1100" b="1" i="0">
+              <a:rPr sz="1250" b="1" i="0">
                 <a:solidFill>
                   <a:srgbClr val="C5221F"/>
                 </a:solidFill>
@@ -9697,13 +9688,13 @@
               <a:t>Next:  </a:t>
             </a:r>
             <a:r>
-              <a:rPr sz="1100" b="0" i="0">
+              <a:rPr sz="1250" b="0" i="0">
                 <a:solidFill>
                   <a:srgbClr val="202124"/>
                 </a:solidFill>
                 <a:latin typeface="Helvetica Neue"/>
               </a:rPr>
-              <a:t>width changes task difficulty; next we change the physical state family while returning to the baseline width.</a:t>
+              <a:t>width changes task difficulty; next we change the physical state family at the baseline width.</a:t>
             </a:r>
           </a:p>
         </p:txBody>
@@ -9716,8 +9707,8 @@
         </p:nvSpPr>
         <p:spPr>
           <a:xfrm>
-            <a:off x="502920" y="6400800"/>
-            <a:ext cx="11155680" cy="320040"/>
+            <a:off x="502920" y="6419088"/>
+            <a:ext cx="11155680" cy="301752"/>
           </a:xfrm>
           <a:prstGeom prst="rect">
             <a:avLst/>
@@ -9739,13 +9730,13 @@
               </a:spcAft>
             </a:pPr>
             <a:r>
-              <a:rPr sz="850" b="0" i="0">
+              <a:rPr sz="950" b="0" i="0">
                 <a:solidFill>
                   <a:srgbClr val="5F6368"/>
                 </a:solidFill>
                 <a:latin typeface="Helvetica Neue"/>
               </a:rPr>
-              <a:t>Same B = 8, prompts (with the qubit count substituted), trainer and seeds at every width; latent and trash registers are always half and half.</a:t>
+              <a:t>Same B = 8, prompts (qubit count substituted), trainer and seeds at every width; latent and trash registers are always half and half.</a:t>
             </a:r>
           </a:p>
         </p:txBody>
@@ -9799,7 +9790,7 @@
               </a:spcAft>
             </a:pPr>
             <a:r>
-              <a:rPr sz="1100" b="1" i="0">
+              <a:rPr sz="1150" b="1" i="0">
                 <a:solidFill>
                   <a:srgbClr val="C5221F"/>
                 </a:solidFill>
@@ -9819,7 +9810,7 @@
         <p:spPr>
           <a:xfrm>
             <a:off x="502920" y="512064"/>
-            <a:ext cx="11155680" cy="457200"/>
+            <a:ext cx="11155680" cy="475488"/>
           </a:xfrm>
           <a:prstGeom prst="rect">
             <a:avLst/>
@@ -9841,7 +9832,7 @@
               </a:spcAft>
             </a:pPr>
             <a:r>
-              <a:rPr sz="2400" b="1" i="0">
+              <a:rPr sz="2600" b="1" i="0">
                 <a:solidFill>
                   <a:srgbClr val="1F2A44"/>
                 </a:solidFill>
@@ -9860,7 +9851,7 @@
         </p:nvSpPr>
         <p:spPr>
           <a:xfrm>
-            <a:off x="502920" y="1005840"/>
+            <a:off x="502920" y="1024128"/>
             <a:ext cx="11155680" cy="347472"/>
           </a:xfrm>
           <a:prstGeom prst="rect">
@@ -9883,13 +9874,13 @@
               </a:spcAft>
             </a:pPr>
             <a:r>
-              <a:rPr sz="1100" b="0" i="0">
+              <a:rPr sz="1200" b="0" i="0">
                 <a:solidFill>
                   <a:srgbClr val="5F6368"/>
                 </a:solidFill>
                 <a:latin typeface="Helvetica Neue"/>
               </a:rPr>
-              <a:t>Ising → XXZ with 4 qubits, B = 8 and the High model tier fixed; the Ising chain (thick frame) is the previous baseline</a:t>
+              <a:t>Ising → XXZ with 4 qubits, B = 8 and High tier fixed; the Ising chain (thick frame) is the previous baseline</a:t>
             </a:r>
           </a:p>
         </p:txBody>
@@ -9910,8 +9901,8 @@
         </p:blipFill>
         <p:spPr>
           <a:xfrm>
-            <a:off x="502920" y="1389888"/>
-            <a:ext cx="4405305" cy="3977639"/>
+            <a:off x="457200" y="1417320"/>
+            <a:ext cx="4506577" cy="4069080"/>
           </a:xfrm>
           <a:prstGeom prst="rect">
             <a:avLst/>
@@ -9926,8 +9917,8 @@
         </p:nvSpPr>
         <p:spPr>
           <a:xfrm>
-            <a:off x="5136825" y="1389888"/>
-            <a:ext cx="6551950" cy="4480560"/>
+            <a:off x="5238097" y="1463040"/>
+            <a:ext cx="6450678" cy="4389120"/>
           </a:xfrm>
           <a:prstGeom prst="rect">
             <a:avLst/>
@@ -9945,26 +9936,36 @@
                 <a:spcPct val="100000"/>
               </a:lnSpc>
               <a:spcAft>
-                <a:spcPts val="600"/>
-              </a:spcAft>
-            </a:pPr>
-            <a:r>
-              <a:rPr sz="1000" b="1" i="0">
+                <a:spcPts val="900"/>
+              </a:spcAft>
+            </a:pPr>
+            <a:r>
+              <a:rPr sz="1200" b="1" i="0">
                 <a:solidFill>
                   <a:srgbClr val="1A73E8"/>
                 </a:solidFill>
                 <a:latin typeface="Helvetica Neue"/>
               </a:rPr>
-              <a:t>The same broad semantic advantage: </a:t>
-            </a:r>
-            <a:r>
-              <a:rPr sz="1000" b="0" i="0">
+              <a:t>The same broad semantic advantage</a:t>
+            </a:r>
+          </a:p>
+          <a:p>
+            <a:pPr>
+              <a:lnSpc>
+                <a:spcPct val="100000"/>
+              </a:lnSpc>
+              <a:spcAft>
+                <a:spcPts val="900"/>
+              </a:spcAft>
+            </a:pPr>
+            <a:r>
+              <a:rPr sz="1200" b="0" i="0">
                 <a:solidFill>
                   <a:srgbClr val="202124"/>
                 </a:solidFill>
                 <a:latin typeface="Helvetica Neue"/>
               </a:rPr>
-              <a:t>both semantic methods have higher means than Random on the XXZ chain (LLM-Open 0.922, LLM-Closed 0.956 vs Random 0.809). Per seed, LLM-Closed − Random is +0.147 (11/12, p &lt; 0.001); LLM-Open − Random is +0.112 (5/12, p = 0.791) — Random's seeds are spread widely here, so the mean gain is not detected as a per-seed effect.</a:t>
+              <a:t>Both LLM methods have higher means than Random on XXZ (Open 0.92, Closed 0.96 vs Random 0.81).</a:t>
             </a:r>
           </a:p>
           <a:p>
@@ -9973,26 +9974,55 @@
                 <a:spcPct val="100000"/>
               </a:lnSpc>
               <a:spcAft>
-                <a:spcPts val="600"/>
-              </a:spcAft>
-            </a:pPr>
-            <a:r>
-              <a:rPr sz="1000" b="1" i="0">
+                <a:spcPts val="900"/>
+              </a:spcAft>
+            </a:pPr>
+            <a:r>
+              <a:rPr sz="1200" b="0" i="0">
+                <a:solidFill>
+                  <a:srgbClr val="202124"/>
+                </a:solidFill>
+                <a:latin typeface="Helvetica Neue"/>
+              </a:rPr>
+              <a:t>Per seed: Closed − Random +0.147 (11/12, p &lt; 0.001);  Open − Random +0.112 (5/12, p = 0.791) — Random's seeds spread widely, so that mean gain is not detected per seed.</a:t>
+            </a:r>
+          </a:p>
+          <a:p>
+            <a:pPr>
+              <a:lnSpc>
+                <a:spcPct val="100000"/>
+              </a:lnSpc>
+              <a:spcAft>
+                <a:spcPts val="900"/>
+              </a:spcAft>
+            </a:pPr>
+            <a:r>
+              <a:rPr sz="1200" b="1" i="0">
                 <a:solidFill>
                   <a:srgbClr val="D93025"/>
                 </a:solidFill>
                 <a:latin typeface="Helvetica Neue"/>
               </a:rPr>
-              <a:t>Closed exceeds Open at this anchor: </a:t>
-            </a:r>
-            <a:r>
-              <a:rPr sz="1000" b="0" i="0">
+              <a:t>Closed exceeds Open at this anchor</a:t>
+            </a:r>
+          </a:p>
+          <a:p>
+            <a:pPr>
+              <a:lnSpc>
+                <a:spcPct val="100000"/>
+              </a:lnSpc>
+              <a:spcAft>
+                <a:spcPts val="900"/>
+              </a:spcAft>
+            </a:pPr>
+            <a:r>
+              <a:rPr sz="1200" b="0" i="0">
                 <a:solidFill>
                   <a:srgbClr val="202124"/>
                 </a:solidFill>
                 <a:latin typeface="Helvetica Neue"/>
               </a:rPr>
-              <a:t>LLM-Closed − LLM-Open +0.035 (12/12, p &lt; 0.001), larger than at the Ising baseline.</a:t>
+              <a:t>Closed − Open +0.035 (12/12, p &lt; 0.001), larger than at the Ising baseline.</a:t>
             </a:r>
           </a:p>
           <a:p>
@@ -10001,26 +10031,26 @@
                 <a:spcPct val="100000"/>
               </a:lnSpc>
               <a:spcAft>
-                <a:spcPts val="600"/>
-              </a:spcAft>
-            </a:pPr>
-            <a:r>
-              <a:rPr sz="1000" b="1" i="0">
+                <a:spcPts val="900"/>
+              </a:spcAft>
+            </a:pPr>
+            <a:r>
+              <a:rPr sz="1200" b="1" i="0">
                 <a:solidFill>
                   <a:srgbClr val="C5221F"/>
                 </a:solidFill>
                 <a:latin typeface="Helvetica Neue"/>
               </a:rPr>
-              <a:t>One XXZ point is not the XXZ landscape: </a:t>
-            </a:r>
-            <a:r>
-              <a:rPr sz="1000" b="0" i="0">
+              <a:t>One XXZ point is not the XXZ landscape:</a:t>
+            </a:r>
+            <a:r>
+              <a:rPr sz="1200" b="0" i="0">
                 <a:solidFill>
                   <a:srgbClr val="202124"/>
                 </a:solidFill>
                 <a:latin typeface="Helvetica Neue"/>
               </a:rPr>
-              <a:t>it says nothing about how the XXZ result moves with budget, width or model tier — none of those were run for XXZ.</a:t>
+              <a:t> budget, width and model tier were not varied for XXZ.</a:t>
             </a:r>
           </a:p>
         </p:txBody>
@@ -10033,8 +10063,8 @@
         </p:nvSpPr>
         <p:spPr>
           <a:xfrm>
-            <a:off x="502920" y="5989320"/>
-            <a:ext cx="73152" cy="329184"/>
+            <a:off x="502920" y="5943600"/>
+            <a:ext cx="73152" cy="365760"/>
           </a:xfrm>
           <a:prstGeom prst="rect">
             <a:avLst/>
@@ -10063,8 +10093,8 @@
         </p:nvSpPr>
         <p:spPr>
           <a:xfrm>
-            <a:off x="685800" y="5971032"/>
-            <a:ext cx="10972800" cy="384048"/>
+            <a:off x="685800" y="5934456"/>
+            <a:ext cx="10972800" cy="402336"/>
           </a:xfrm>
           <a:prstGeom prst="rect">
             <a:avLst/>
@@ -10086,7 +10116,7 @@
               </a:spcAft>
             </a:pPr>
             <a:r>
-              <a:rPr sz="1100" b="1" i="0">
+              <a:rPr sz="1250" b="1" i="0">
                 <a:solidFill>
                   <a:srgbClr val="C5221F"/>
                 </a:solidFill>
@@ -10095,7 +10125,7 @@
               <a:t>Next:  </a:t>
             </a:r>
             <a:r>
-              <a:rPr sz="1100" b="0" i="0">
+              <a:rPr sz="1250" b="0" i="0">
                 <a:solidFill>
                   <a:srgbClr val="202124"/>
                 </a:solidFill>
@@ -10114,8 +10144,8 @@
         </p:nvSpPr>
         <p:spPr>
           <a:xfrm>
-            <a:off x="502920" y="6400800"/>
-            <a:ext cx="11155680" cy="320040"/>
+            <a:off x="502920" y="6419088"/>
+            <a:ext cx="11155680" cy="301752"/>
           </a:xfrm>
           <a:prstGeom prst="rect">
             <a:avLst/>
@@ -10137,13 +10167,13 @@
               </a:spcAft>
             </a:pPr>
             <a:r>
-              <a:rPr sz="850" b="0" i="0">
+              <a:rPr sz="950" b="0" i="0">
                 <a:solidFill>
                   <a:srgbClr val="5F6368"/>
                 </a:solidFill>
                 <a:latin typeface="Helvetica Neue"/>
               </a:rPr>
-              <a:t>Only the stated Hamiltonian facts change in the prompt (name, formula, parameter range, interaction type); the circuit space, trainer and seeds are identical.</a:t>
+              <a:t>Only the stated Hamiltonian facts change in the prompt (name, formula, parameter range, interaction type); circuit space, trainer and seeds are identical.</a:t>
             </a:r>
           </a:p>
         </p:txBody>
@@ -10197,7 +10227,7 @@
               </a:spcAft>
             </a:pPr>
             <a:r>
-              <a:rPr sz="1100" b="1" i="0">
+              <a:rPr sz="1150" b="1" i="0">
                 <a:solidFill>
                   <a:srgbClr val="C5221F"/>
                 </a:solidFill>
@@ -10217,7 +10247,7 @@
         <p:spPr>
           <a:xfrm>
             <a:off x="502920" y="512064"/>
-            <a:ext cx="11155680" cy="457200"/>
+            <a:ext cx="11155680" cy="475488"/>
           </a:xfrm>
           <a:prstGeom prst="rect">
             <a:avLst/>
@@ -10239,13 +10269,13 @@
               </a:spcAft>
             </a:pPr>
             <a:r>
-              <a:rPr sz="2400" b="1" i="0">
+              <a:rPr sz="2600" b="1" i="0">
                 <a:solidFill>
                   <a:srgbClr val="1F2A44"/>
                 </a:solidFill>
                 <a:latin typeface="Helvetica Neue"/>
               </a:rPr>
-              <a:t>The model tier changes reliability more than the main Open advantage</a:t>
+              <a:t>Model tier changes reliability more than the Open advantage</a:t>
             </a:r>
           </a:p>
         </p:txBody>
@@ -10258,7 +10288,7 @@
         </p:nvSpPr>
         <p:spPr>
           <a:xfrm>
-            <a:off x="502920" y="1005840"/>
+            <a:off x="502920" y="1024128"/>
             <a:ext cx="11155680" cy="347472"/>
           </a:xfrm>
           <a:prstGeom prst="rect">
@@ -10281,7 +10311,7 @@
               </a:spcAft>
             </a:pPr>
             <a:r>
-              <a:rPr sz="1100" b="0" i="0">
+              <a:rPr sz="1200" b="0" i="0">
                 <a:solidFill>
                   <a:srgbClr val="5F6368"/>
                 </a:solidFill>
@@ -10308,8 +10338,8 @@
         </p:blipFill>
         <p:spPr>
           <a:xfrm>
-            <a:off x="502920" y="1389888"/>
-            <a:ext cx="6507493" cy="3977639"/>
+            <a:off x="457200" y="1417320"/>
+            <a:ext cx="6657092" cy="4069080"/>
           </a:xfrm>
           <a:prstGeom prst="rect">
             <a:avLst/>
@@ -10324,8 +10354,8 @@
         </p:nvSpPr>
         <p:spPr>
           <a:xfrm>
-            <a:off x="7239013" y="1389888"/>
-            <a:ext cx="4449762" cy="4480560"/>
+            <a:off x="7388612" y="1463040"/>
+            <a:ext cx="4300163" cy="4389120"/>
           </a:xfrm>
           <a:prstGeom prst="rect">
             <a:avLst/>
@@ -10343,26 +10373,36 @@
                 <a:spcPct val="100000"/>
               </a:lnSpc>
               <a:spcAft>
-                <a:spcPts val="600"/>
-              </a:spcAft>
-            </a:pPr>
-            <a:r>
-              <a:rPr sz="1000" b="1" i="0">
+                <a:spcPts val="900"/>
+              </a:spcAft>
+            </a:pPr>
+            <a:r>
+              <a:rPr sz="1200" b="1" i="0">
                 <a:solidFill>
                   <a:srgbClr val="1A73E8"/>
                 </a:solidFill>
                 <a:latin typeface="Helvetica Neue"/>
               </a:rPr>
-              <a:t>The Open semantic advantage is similar for both tiers: </a:t>
-            </a:r>
-            <a:r>
-              <a:rPr sz="1000" b="0" i="0">
+              <a:t>The Open advantage is similar for both tiers</a:t>
+            </a:r>
+          </a:p>
+          <a:p>
+            <a:pPr>
+              <a:lnSpc>
+                <a:spcPct val="100000"/>
+              </a:lnSpc>
+              <a:spcAft>
+                <a:spcPts val="900"/>
+              </a:spcAft>
+            </a:pPr>
+            <a:r>
+              <a:rPr sz="1200" b="0" i="0">
                 <a:solidFill>
                   <a:srgbClr val="202124"/>
                 </a:solidFill>
                 <a:latin typeface="Helvetica Neue"/>
               </a:rPr>
-              <a:t>LLM-Open − Random +0.098 (11/12, p &lt; 0.001) for Low and +0.108 (11/12, p &lt; 0.001) for High.</a:t>
+              <a:t>Open − Random  +0.098 (11/12, p &lt; 0.001) for Low, +0.108 (11/12, p &lt; 0.001) for High.</a:t>
             </a:r>
           </a:p>
           <a:p>
@@ -10371,26 +10411,36 @@
                 <a:spcPct val="100000"/>
               </a:lnSpc>
               <a:spcAft>
-                <a:spcPts val="600"/>
-              </a:spcAft>
-            </a:pPr>
-            <a:r>
-              <a:rPr sz="1000" b="1" i="0">
+                <a:spcPts val="900"/>
+              </a:spcAft>
+            </a:pPr>
+            <a:r>
+              <a:rPr sz="1200" b="1" i="0">
                 <a:solidFill>
                   <a:srgbClr val="D93025"/>
                 </a:solidFill>
                 <a:latin typeface="Helvetica Neue"/>
               </a:rPr>
-              <a:t>The Closed − Open relationship differs between tiers: </a:t>
-            </a:r>
-            <a:r>
-              <a:rPr sz="1000" b="0" i="0">
+              <a:t>The Closed − Open relationship differs</a:t>
+            </a:r>
+          </a:p>
+          <a:p>
+            <a:pPr>
+              <a:lnSpc>
+                <a:spcPct val="100000"/>
+              </a:lnSpc>
+              <a:spcAft>
+                <a:spcPts val="900"/>
+              </a:spcAft>
+            </a:pPr>
+            <a:r>
+              <a:rPr sz="1200" b="0" i="0">
                 <a:solidFill>
                   <a:srgbClr val="202124"/>
                 </a:solidFill>
                 <a:latin typeface="Helvetica Neue"/>
               </a:rPr>
-              <a:t>-0.034 (4/12, p = 0.052) for Low versus +0.007 (11/12, p = 0.012) for High — the small closed-loop gain seen at the baseline is not present for the Low tier.</a:t>
+              <a:t>-0.034 (4/12, p = 0.052) for Low vs +0.007 (11/12, p = 0.012) for High — the baseline's small closed-loop gain is not present for Low.</a:t>
             </a:r>
           </a:p>
           <a:p>
@@ -10399,26 +10449,36 @@
                 <a:spcPct val="100000"/>
               </a:lnSpc>
               <a:spcAft>
-                <a:spcPts val="600"/>
-              </a:spcAft>
-            </a:pPr>
-            <a:r>
-              <a:rPr sz="1000" b="1" i="0">
+                <a:spcPts val="900"/>
+              </a:spcAft>
+            </a:pPr>
+            <a:r>
+              <a:rPr sz="1200" b="1" i="0">
                 <a:solidFill>
                   <a:srgbClr val="E8710A"/>
                 </a:solidFill>
                 <a:latin typeface="Helvetica Neue"/>
               </a:rPr>
-              <a:t>Resource-contract validity is a separate failure mode: </a:t>
-            </a:r>
-            <a:r>
-              <a:rPr sz="1000" b="0" i="0">
+              <a:t>Proposal validity is a separate failure mode</a:t>
+            </a:r>
+          </a:p>
+          <a:p>
+            <a:pPr>
+              <a:lnSpc>
+                <a:spcPct val="100000"/>
+              </a:lnSpc>
+              <a:spcAft>
+                <a:spcPts val="900"/>
+              </a:spcAft>
+            </a:pPr>
+            <a:r>
+              <a:rPr sz="1200" b="0" i="0">
                 <a:solidFill>
                   <a:srgbClr val="202124"/>
                 </a:solidFill>
                 <a:latin typeface="Helvetica Neue"/>
               </a:rPr>
-              <a:t>only 38% of the Low tier's open-batch proposals met the gate-count contract (93% for its closed loop; 100% / 92% for High). Invalid proposals are replaced by random draws, so a validity gap and an architecture-quality gap are entangled in the plotted score.</a:t>
+              <a:t>Only 38% of Low's open-batch proposals met the gate-count contract (Low closed 93%; High 100% / 92%). Invalid proposals become random draws, so validity and architecture quality are entangled in the score.</a:t>
             </a:r>
           </a:p>
           <a:p>
@@ -10427,17 +10487,17 @@
                 <a:spcPct val="100000"/>
               </a:lnSpc>
               <a:spcAft>
-                <a:spcPts val="600"/>
-              </a:spcAft>
-            </a:pPr>
-            <a:r>
-              <a:rPr sz="1000" b="1" i="0">
+                <a:spcPts val="900"/>
+              </a:spcAft>
+            </a:pPr>
+            <a:r>
+              <a:rPr sz="1200" b="1" i="0">
                 <a:solidFill>
                   <a:srgbClr val="C5221F"/>
                 </a:solidFill>
                 <a:latin typeface="Helvetica Neue"/>
               </a:rPr>
-              <a:t>Low and High are fixed tier labels; the plotted score is not what defines them.</a:t>
+              <a:t>Low and High are fixed tier labels, not a ranking by score.</a:t>
             </a:r>
           </a:p>
         </p:txBody>
@@ -10450,8 +10510,8 @@
         </p:nvSpPr>
         <p:spPr>
           <a:xfrm>
-            <a:off x="502920" y="5989320"/>
-            <a:ext cx="73152" cy="329184"/>
+            <a:off x="502920" y="5943600"/>
+            <a:ext cx="73152" cy="365760"/>
           </a:xfrm>
           <a:prstGeom prst="rect">
             <a:avLst/>
@@ -10480,8 +10540,8 @@
         </p:nvSpPr>
         <p:spPr>
           <a:xfrm>
-            <a:off x="685800" y="5971032"/>
-            <a:ext cx="10972800" cy="384048"/>
+            <a:off x="685800" y="5934456"/>
+            <a:ext cx="10972800" cy="402336"/>
           </a:xfrm>
           <a:prstGeom prst="rect">
             <a:avLst/>
@@ -10503,7 +10563,7 @@
               </a:spcAft>
             </a:pPr>
             <a:r>
-              <a:rPr sz="1100" b="1" i="0">
+              <a:rPr sz="1250" b="1" i="0">
                 <a:solidFill>
                   <a:srgbClr val="C5221F"/>
                 </a:solidFill>
@@ -10512,7 +10572,7 @@
               <a:t>Next:  </a:t>
             </a:r>
             <a:r>
-              <a:rPr sz="1100" b="0" i="0">
+              <a:rPr sz="1250" b="0" i="0">
                 <a:solidFill>
                   <a:srgbClr val="202124"/>
                 </a:solidFill>
@@ -10531,8 +10591,8 @@
         </p:nvSpPr>
         <p:spPr>
           <a:xfrm>
-            <a:off x="502920" y="6400800"/>
-            <a:ext cx="11155680" cy="320040"/>
+            <a:off x="502920" y="6419088"/>
+            <a:ext cx="11155680" cy="301752"/>
           </a:xfrm>
           <a:prstGeom prst="rect">
             <a:avLst/>
@@ -10554,7 +10614,7 @@
               </a:spcAft>
             </a:pPr>
             <a:r>
-              <a:rPr sz="850" b="0" i="0">
+              <a:rPr sz="950" b="0" i="0">
                 <a:solidFill>
                   <a:srgbClr val="5F6368"/>
                 </a:solidFill>
@@ -10614,7 +10674,7 @@
               </a:spcAft>
             </a:pPr>
             <a:r>
-              <a:rPr sz="1100" b="1" i="0">
+              <a:rPr sz="1150" b="1" i="0">
                 <a:solidFill>
                   <a:srgbClr val="C5221F"/>
                 </a:solidFill>
@@ -10634,7 +10694,7 @@
         <p:spPr>
           <a:xfrm>
             <a:off x="502920" y="512064"/>
-            <a:ext cx="11155680" cy="457200"/>
+            <a:ext cx="11155680" cy="475488"/>
           </a:xfrm>
           <a:prstGeom prst="rect">
             <a:avLst/>
@@ -10656,7 +10716,7 @@
               </a:spcAft>
             </a:pPr>
             <a:r>
-              <a:rPr sz="2400" b="1" i="0">
+              <a:rPr sz="2600" b="1" i="0">
                 <a:solidFill>
                   <a:srgbClr val="1F2A44"/>
                 </a:solidFill>
@@ -10675,7 +10735,7 @@
         </p:nvSpPr>
         <p:spPr>
           <a:xfrm>
-            <a:off x="502920" y="1005840"/>
+            <a:off x="502920" y="1024128"/>
             <a:ext cx="11155680" cy="347472"/>
           </a:xfrm>
           <a:prstGeom prst="rect">
@@ -10698,515 +10758,49 @@
               </a:spcAft>
             </a:pPr>
             <a:r>
-              <a:rPr sz="1100" b="0" i="0">
+              <a:rPr sz="1200" b="0" i="0">
                 <a:solidFill>
                   <a:srgbClr val="5F6368"/>
                 </a:solidFill>
                 <a:latin typeface="Helvetica Neue"/>
               </a:rPr>
-              <a:t>One row per tested slice; wording is evidence-calibrated — robust, condition-dependent, not detected, reversed, not tested</a:t>
-            </a:r>
-          </a:p>
-        </p:txBody>
-      </p:sp>
-      <p:graphicFrame>
-        <p:nvGraphicFramePr>
-          <p:cNvPr id="5" name="Table 4"/>
-          <p:cNvGraphicFramePr>
-            <a:graphicFrameLocks noGrp="1"/>
-          </p:cNvGraphicFramePr>
-          <p:nvPr/>
-        </p:nvGraphicFramePr>
-        <p:xfrm>
-          <a:off x="502920" y="1417320"/>
-          <a:ext cx="11155680" cy="2103120"/>
-        </p:xfrm>
-        <a:graphic>
-          <a:graphicData uri="http://schemas.openxmlformats.org/drawingml/2006/table">
-            <a:tbl>
-              <a:tblPr firstRow="1" bandRow="1">
-                <a:tableStyleId>{5C22544A-7EE6-4342-B048-85BDC9FD1C3A}</a:tableStyleId>
-              </a:tblPr>
-              <a:tblGrid>
-                <a:gridCol w="1965960"/>
-                <a:gridCol w="3063240"/>
-                <a:gridCol w="3657600"/>
-                <a:gridCol w="2468880"/>
-              </a:tblGrid>
-              <a:tr h="420624">
-                <a:tc>
-                  <a:txBody>
-                    <a:bodyPr/>
-                    <a:lstStyle/>
-                    <a:p>
-                      <a:pPr algn="l"/>
-                      <a:r>
-                        <a:rPr sz="1000" b="1">
-                          <a:solidFill>
-                            <a:srgbClr val="202124"/>
-                          </a:solidFill>
-                          <a:latin typeface="Helvetica Neue"/>
-                        </a:rPr>
-                        <a:t>Slice</a:t>
-                      </a:r>
-                    </a:p>
-                  </a:txBody>
-                  <a:tcPr marL="64008" marR="64008" marT="12700" marB="12700">
-                    <a:solidFill>
-                      <a:srgbClr val="E8EAED"/>
-                    </a:solidFill>
-                  </a:tcPr>
-                </a:tc>
-                <a:tc>
-                  <a:txBody>
-                    <a:bodyPr/>
-                    <a:lstStyle/>
-                    <a:p>
-                      <a:pPr algn="ctr"/>
-                      <a:r>
-                        <a:rPr sz="1000" b="1">
-                          <a:solidFill>
-                            <a:srgbClr val="202124"/>
-                          </a:solidFill>
-                          <a:latin typeface="Helvetica Neue"/>
-                        </a:rPr>
-                        <a:t>Open versus Random</a:t>
-                      </a:r>
-                    </a:p>
-                  </a:txBody>
-                  <a:tcPr marL="64008" marR="64008" marT="12700" marB="12700">
-                    <a:solidFill>
-                      <a:srgbClr val="E8EAED"/>
-                    </a:solidFill>
-                  </a:tcPr>
-                </a:tc>
-                <a:tc>
-                  <a:txBody>
-                    <a:bodyPr/>
-                    <a:lstStyle/>
-                    <a:p>
-                      <a:pPr algn="ctr"/>
-                      <a:r>
-                        <a:rPr sz="1000" b="1">
-                          <a:solidFill>
-                            <a:srgbClr val="202124"/>
-                          </a:solidFill>
-                          <a:latin typeface="Helvetica Neue"/>
-                        </a:rPr>
-                        <a:t>Closed versus Open</a:t>
-                      </a:r>
-                    </a:p>
-                  </a:txBody>
-                  <a:tcPr marL="64008" marR="64008" marT="12700" marB="12700">
-                    <a:solidFill>
-                      <a:srgbClr val="E8EAED"/>
-                    </a:solidFill>
-                  </a:tcPr>
-                </a:tc>
-                <a:tc>
-                  <a:txBody>
-                    <a:bodyPr/>
-                    <a:lstStyle/>
-                    <a:p>
-                      <a:pPr algn="ctr"/>
-                      <a:r>
-                        <a:rPr sz="1000" b="1">
-                          <a:solidFill>
-                            <a:srgbClr val="202124"/>
-                          </a:solidFill>
-                          <a:latin typeface="Helvetica Neue"/>
-                        </a:rPr>
-                        <a:t>Proposal validity</a:t>
-                      </a:r>
-                    </a:p>
-                  </a:txBody>
-                  <a:tcPr marL="64008" marR="64008" marT="12700" marB="12700">
-                    <a:solidFill>
-                      <a:srgbClr val="E8EAED"/>
-                    </a:solidFill>
-                  </a:tcPr>
-                </a:tc>
-              </a:tr>
-              <a:tr h="420624">
-                <a:tc>
-                  <a:txBody>
-                    <a:bodyPr/>
-                    <a:lstStyle/>
-                    <a:p>
-                      <a:pPr algn="l"/>
-                      <a:r>
-                        <a:rPr sz="900" b="1">
-                          <a:solidFill>
-                            <a:srgbClr val="202124"/>
-                          </a:solidFill>
-                          <a:latin typeface="Helvetica Neue"/>
-                        </a:rPr>
-                        <a:t>Budget (B = 4, 8, 16)</a:t>
-                      </a:r>
-                    </a:p>
-                  </a:txBody>
-                  <a:tcPr marL="64008" marR="64008" marT="12700" marB="12700">
-                    <a:solidFill>
-                      <a:srgbClr val="FFFFFF"/>
-                    </a:solidFill>
-                  </a:tcPr>
-                </a:tc>
-                <a:tc>
-                  <a:txBody>
-                    <a:bodyPr/>
-                    <a:lstStyle/>
-                    <a:p>
-                      <a:pPr algn="ctr"/>
-                      <a:r>
-                        <a:rPr sz="900" b="1">
-                          <a:solidFill>
-                            <a:srgbClr val="E8710A"/>
-                          </a:solidFill>
-                          <a:latin typeface="Helvetica Neue"/>
-                        </a:rPr>
-                        <a:t>condition-dependent: not detected (B = 4) · robust (B = 8) · robust (B = 16)</a:t>
-                      </a:r>
-                    </a:p>
-                  </a:txBody>
-                  <a:tcPr marL="64008" marR="64008" marT="12700" marB="12700">
-                    <a:solidFill>
-                      <a:srgbClr val="FFFFFF"/>
-                    </a:solidFill>
-                  </a:tcPr>
-                </a:tc>
-                <a:tc>
-                  <a:txBody>
-                    <a:bodyPr/>
-                    <a:lstStyle/>
-                    <a:p>
-                      <a:pPr algn="ctr"/>
-                      <a:r>
-                        <a:rPr sz="900" b="1">
-                          <a:solidFill>
-                            <a:srgbClr val="E8710A"/>
-                          </a:solidFill>
-                          <a:latin typeface="Helvetica Neue"/>
-                        </a:rPr>
-                        <a:t>condition-dependent: robust (B = 4) · robust (B = 8) · not detected (B = 16)</a:t>
-                      </a:r>
-                    </a:p>
-                  </a:txBody>
-                  <a:tcPr marL="64008" marR="64008" marT="12700" marB="12700">
-                    <a:solidFill>
-                      <a:srgbClr val="FFFFFF"/>
-                    </a:solidFill>
-                  </a:tcPr>
-                </a:tc>
-                <a:tc>
-                  <a:txBody>
-                    <a:bodyPr/>
-                    <a:lstStyle/>
-                    <a:p>
-                      <a:pPr algn="ctr"/>
-                      <a:r>
-                        <a:rPr sz="900" b="1">
-                          <a:solidFill>
-                            <a:srgbClr val="E8710A"/>
-                          </a:solidFill>
-                          <a:latin typeface="Helvetica Neue"/>
-                        </a:rPr>
-                        <a:t>stable (≥ 92%)</a:t>
-                      </a:r>
-                    </a:p>
-                  </a:txBody>
-                  <a:tcPr marL="64008" marR="64008" marT="12700" marB="12700">
-                    <a:solidFill>
-                      <a:srgbClr val="FFFFFF"/>
-                    </a:solidFill>
-                  </a:tcPr>
-                </a:tc>
-              </a:tr>
-              <a:tr h="420624">
-                <a:tc>
-                  <a:txBody>
-                    <a:bodyPr/>
-                    <a:lstStyle/>
-                    <a:p>
-                      <a:pPr algn="l"/>
-                      <a:r>
-                        <a:rPr sz="900" b="1">
-                          <a:solidFill>
-                            <a:srgbClr val="202124"/>
-                          </a:solidFill>
-                          <a:latin typeface="Helvetica Neue"/>
-                        </a:rPr>
-                        <a:t>Qubit count (4, 6, 8)</a:t>
-                      </a:r>
-                    </a:p>
-                  </a:txBody>
-                  <a:tcPr marL="64008" marR="64008" marT="12700" marB="12700">
-                    <a:solidFill>
-                      <a:srgbClr val="F8F9FA"/>
-                    </a:solidFill>
-                  </a:tcPr>
-                </a:tc>
-                <a:tc>
-                  <a:txBody>
-                    <a:bodyPr/>
-                    <a:lstStyle/>
-                    <a:p>
-                      <a:pPr algn="ctr"/>
-                      <a:r>
-                        <a:rPr sz="900" b="1">
-                          <a:solidFill>
-                            <a:srgbClr val="188038"/>
-                          </a:solidFill>
-                          <a:latin typeface="Helvetica Neue"/>
-                        </a:rPr>
-                        <a:t>robust</a:t>
-                      </a:r>
-                    </a:p>
-                  </a:txBody>
-                  <a:tcPr marL="64008" marR="64008" marT="12700" marB="12700">
-                    <a:solidFill>
-                      <a:srgbClr val="F8F9FA"/>
-                    </a:solidFill>
-                  </a:tcPr>
-                </a:tc>
-                <a:tc>
-                  <a:txBody>
-                    <a:bodyPr/>
-                    <a:lstStyle/>
-                    <a:p>
-                      <a:pPr algn="ctr"/>
-                      <a:r>
-                        <a:rPr sz="900" b="1">
-                          <a:solidFill>
-                            <a:srgbClr val="D93025"/>
-                          </a:solidFill>
-                          <a:latin typeface="Helvetica Neue"/>
-                        </a:rPr>
-                        <a:t>condition-dependent: robust (4) · reversed (6) · reversed (8)</a:t>
-                      </a:r>
-                    </a:p>
-                  </a:txBody>
-                  <a:tcPr marL="64008" marR="64008" marT="12700" marB="12700">
-                    <a:solidFill>
-                      <a:srgbClr val="F8F9FA"/>
-                    </a:solidFill>
-                  </a:tcPr>
-                </a:tc>
-                <a:tc>
-                  <a:txBody>
-                    <a:bodyPr/>
-                    <a:lstStyle/>
-                    <a:p>
-                      <a:pPr algn="ctr"/>
-                      <a:r>
-                        <a:rPr sz="900" b="1">
-                          <a:solidFill>
-                            <a:srgbClr val="E8710A"/>
-                          </a:solidFill>
-                          <a:latin typeface="Helvetica Neue"/>
-                        </a:rPr>
-                        <a:t>degraded: Closed at 6 qubits 70%</a:t>
-                      </a:r>
-                    </a:p>
-                  </a:txBody>
-                  <a:tcPr marL="64008" marR="64008" marT="12700" marB="12700">
-                    <a:solidFill>
-                      <a:srgbClr val="F8F9FA"/>
-                    </a:solidFill>
-                  </a:tcPr>
-                </a:tc>
-              </a:tr>
-              <a:tr h="420624">
-                <a:tc>
-                  <a:txBody>
-                    <a:bodyPr/>
-                    <a:lstStyle/>
-                    <a:p>
-                      <a:pPr algn="l"/>
-                      <a:r>
-                        <a:rPr sz="900" b="1">
-                          <a:solidFill>
-                            <a:srgbClr val="202124"/>
-                          </a:solidFill>
-                          <a:latin typeface="Helvetica Neue"/>
-                        </a:rPr>
-                        <a:t>Hamiltonian (Ising, XXZ)</a:t>
-                      </a:r>
-                    </a:p>
-                  </a:txBody>
-                  <a:tcPr marL="64008" marR="64008" marT="12700" marB="12700">
-                    <a:solidFill>
-                      <a:srgbClr val="FFFFFF"/>
-                    </a:solidFill>
-                  </a:tcPr>
-                </a:tc>
-                <a:tc>
-                  <a:txBody>
-                    <a:bodyPr/>
-                    <a:lstStyle/>
-                    <a:p>
-                      <a:pPr algn="ctr"/>
-                      <a:r>
-                        <a:rPr sz="900" b="1">
-                          <a:solidFill>
-                            <a:srgbClr val="E8710A"/>
-                          </a:solidFill>
-                          <a:latin typeface="Helvetica Neue"/>
-                        </a:rPr>
-                        <a:t>condition-dependent: robust (Ising) · not detected (XXZ)</a:t>
-                      </a:r>
-                    </a:p>
-                  </a:txBody>
-                  <a:tcPr marL="64008" marR="64008" marT="12700" marB="12700">
-                    <a:solidFill>
-                      <a:srgbClr val="FFFFFF"/>
-                    </a:solidFill>
-                  </a:tcPr>
-                </a:tc>
-                <a:tc>
-                  <a:txBody>
-                    <a:bodyPr/>
-                    <a:lstStyle/>
-                    <a:p>
-                      <a:pPr algn="ctr"/>
-                      <a:r>
-                        <a:rPr sz="900" b="1">
-                          <a:solidFill>
-                            <a:srgbClr val="188038"/>
-                          </a:solidFill>
-                          <a:latin typeface="Helvetica Neue"/>
-                        </a:rPr>
-                        <a:t>robust</a:t>
-                      </a:r>
-                    </a:p>
-                  </a:txBody>
-                  <a:tcPr marL="64008" marR="64008" marT="12700" marB="12700">
-                    <a:solidFill>
-                      <a:srgbClr val="FFFFFF"/>
-                    </a:solidFill>
-                  </a:tcPr>
-                </a:tc>
-                <a:tc>
-                  <a:txBody>
-                    <a:bodyPr/>
-                    <a:lstStyle/>
-                    <a:p>
-                      <a:pPr algn="ctr"/>
-                      <a:r>
-                        <a:rPr sz="900" b="1">
-                          <a:solidFill>
-                            <a:srgbClr val="E8710A"/>
-                          </a:solidFill>
-                          <a:latin typeface="Helvetica Neue"/>
-                        </a:rPr>
-                        <a:t>stable (≥ 92%)</a:t>
-                      </a:r>
-                    </a:p>
-                  </a:txBody>
-                  <a:tcPr marL="64008" marR="64008" marT="12700" marB="12700">
-                    <a:solidFill>
-                      <a:srgbClr val="FFFFFF"/>
-                    </a:solidFill>
-                  </a:tcPr>
-                </a:tc>
-              </a:tr>
-              <a:tr h="420624">
-                <a:tc>
-                  <a:txBody>
-                    <a:bodyPr/>
-                    <a:lstStyle/>
-                    <a:p>
-                      <a:pPr algn="l"/>
-                      <a:r>
-                        <a:rPr sz="900" b="1">
-                          <a:solidFill>
-                            <a:srgbClr val="202124"/>
-                          </a:solidFill>
-                          <a:latin typeface="Helvetica Neue"/>
-                        </a:rPr>
-                        <a:t>Model tier (Low, High)</a:t>
-                      </a:r>
-                    </a:p>
-                  </a:txBody>
-                  <a:tcPr marL="64008" marR="64008" marT="12700" marB="12700">
-                    <a:solidFill>
-                      <a:srgbClr val="F8F9FA"/>
-                    </a:solidFill>
-                  </a:tcPr>
-                </a:tc>
-                <a:tc>
-                  <a:txBody>
-                    <a:bodyPr/>
-                    <a:lstStyle/>
-                    <a:p>
-                      <a:pPr algn="ctr"/>
-                      <a:r>
-                        <a:rPr sz="900" b="1">
-                          <a:solidFill>
-                            <a:srgbClr val="188038"/>
-                          </a:solidFill>
-                          <a:latin typeface="Helvetica Neue"/>
-                        </a:rPr>
-                        <a:t>robust</a:t>
-                      </a:r>
-                    </a:p>
-                  </a:txBody>
-                  <a:tcPr marL="64008" marR="64008" marT="12700" marB="12700">
-                    <a:solidFill>
-                      <a:srgbClr val="F8F9FA"/>
-                    </a:solidFill>
-                  </a:tcPr>
-                </a:tc>
-                <a:tc>
-                  <a:txBody>
-                    <a:bodyPr/>
-                    <a:lstStyle/>
-                    <a:p>
-                      <a:pPr algn="ctr"/>
-                      <a:r>
-                        <a:rPr sz="900" b="1">
-                          <a:solidFill>
-                            <a:srgbClr val="E8710A"/>
-                          </a:solidFill>
-                          <a:latin typeface="Helvetica Neue"/>
-                        </a:rPr>
-                        <a:t>condition-dependent: not detected (Low) · robust (High)</a:t>
-                      </a:r>
-                    </a:p>
-                  </a:txBody>
-                  <a:tcPr marL="64008" marR="64008" marT="12700" marB="12700">
-                    <a:solidFill>
-                      <a:srgbClr val="F8F9FA"/>
-                    </a:solidFill>
-                  </a:tcPr>
-                </a:tc>
-                <a:tc>
-                  <a:txBody>
-                    <a:bodyPr/>
-                    <a:lstStyle/>
-                    <a:p>
-                      <a:pPr algn="ctr"/>
-                      <a:r>
-                        <a:rPr sz="900" b="1">
-                          <a:solidFill>
-                            <a:srgbClr val="E8710A"/>
-                          </a:solidFill>
-                          <a:latin typeface="Helvetica Neue"/>
-                        </a:rPr>
-                        <a:t>degraded: Low Open 38%</a:t>
-                      </a:r>
-                    </a:p>
-                  </a:txBody>
-                  <a:tcPr marL="64008" marR="64008" marT="12700" marB="12700">
-                    <a:solidFill>
-                      <a:srgbClr val="F8F9FA"/>
-                    </a:solidFill>
-                  </a:tcPr>
-                </a:tc>
-              </a:tr>
-            </a:tbl>
-          </a:graphicData>
-        </a:graphic>
-      </p:graphicFrame>
+              <a:t>Closed − Open sorted by what the paired test detected; the Open − Random advantage kept its sign in every slice</a:t>
+            </a:r>
+          </a:p>
+        </p:txBody>
+      </p:sp>
+      <p:sp>
+        <p:nvSpPr>
+          <p:cNvPr id="5" name="Rounded Rectangle 4"/>
+          <p:cNvSpPr/>
+          <p:nvPr/>
+        </p:nvSpPr>
+        <p:spPr>
+          <a:xfrm>
+            <a:off x="502920" y="1463040"/>
+            <a:ext cx="3611880" cy="2359152"/>
+          </a:xfrm>
+          <a:prstGeom prst="roundRect">
+            <a:avLst/>
+          </a:prstGeom>
+          <a:solidFill>
+            <a:srgbClr val="FCE8E6"/>
+          </a:solidFill>
+          <a:ln w="19050">
+            <a:solidFill>
+              <a:srgbClr val="D93025"/>
+            </a:solidFill>
+          </a:ln>
+          <a:effectLst/>
+        </p:spPr>
+        <p:txBody>
+          <a:bodyPr rtlCol="0" anchor="ctr"/>
+          <a:lstStyle/>
+          <a:p>
+            <a:pPr algn="ctr"/>
+          </a:p>
+        </p:txBody>
+      </p:sp>
       <p:sp>
         <p:nvSpPr>
           <p:cNvPr id="6" name="TextBox 5"/>
@@ -11215,8 +10809,8 @@
         </p:nvSpPr>
         <p:spPr>
           <a:xfrm>
-            <a:off x="502920" y="3611880"/>
-            <a:ext cx="11155680" cy="274320"/>
+            <a:off x="649224" y="1536192"/>
+            <a:ext cx="3337560" cy="365760"/>
           </a:xfrm>
           <a:prstGeom prst="rect">
             <a:avLst/>
@@ -11238,13 +10832,13 @@
               </a:spcAft>
             </a:pPr>
             <a:r>
-              <a:rPr sz="950" b="0" i="0">
-                <a:solidFill>
-                  <a:srgbClr val="5F6368"/>
-                </a:solidFill>
-                <a:latin typeface="Helvetica Neue"/>
-              </a:rPr>
-              <a:t>Not tested: width and Hamiltonian changes for the Low tier; any change away from the baseline for XXZ; every two-factor combination.</a:t>
+              <a:rPr sz="1450" b="1" i="0">
+                <a:solidFill>
+                  <a:srgbClr val="D93025"/>
+                </a:solidFill>
+                <a:latin typeface="Helvetica Neue"/>
+              </a:rPr>
+              <a:t>Closed beats Open</a:t>
             </a:r>
           </a:p>
         </p:txBody>
@@ -11257,8 +10851,569 @@
         </p:nvSpPr>
         <p:spPr>
           <a:xfrm>
-            <a:off x="502920" y="3977639"/>
-            <a:ext cx="5989320" cy="1874519"/>
+            <a:off x="649224" y="1938528"/>
+            <a:ext cx="3337560" cy="384048"/>
+          </a:xfrm>
+          <a:prstGeom prst="roundRect">
+            <a:avLst/>
+          </a:prstGeom>
+          <a:solidFill>
+            <a:srgbClr val="FFFFFF"/>
+          </a:solidFill>
+          <a:ln w="12700">
+            <a:solidFill>
+              <a:srgbClr val="D93025"/>
+            </a:solidFill>
+          </a:ln>
+          <a:effectLst/>
+        </p:spPr>
+        <p:txBody>
+          <a:bodyPr rtlCol="0" anchor="ctr" lIns="0" rIns="0" tIns="0" bIns="0" wrap="square"/>
+          <a:lstStyle/>
+          <a:p>
+            <a:pPr algn="ctr"/>
+            <a:r>
+              <a:rPr sz="1200" b="0">
+                <a:solidFill>
+                  <a:srgbClr val="202124"/>
+                </a:solidFill>
+                <a:latin typeface="Helvetica Neue"/>
+              </a:rPr>
+              <a:t>Baseline: B = 8   +0.007   11/12 seeds</a:t>
+            </a:r>
+          </a:p>
+        </p:txBody>
+      </p:sp>
+      <p:sp>
+        <p:nvSpPr>
+          <p:cNvPr id="8" name="Rounded Rectangle 7"/>
+          <p:cNvSpPr/>
+          <p:nvPr/>
+        </p:nvSpPr>
+        <p:spPr>
+          <a:xfrm>
+            <a:off x="649224" y="2395728"/>
+            <a:ext cx="3337560" cy="384048"/>
+          </a:xfrm>
+          <a:prstGeom prst="roundRect">
+            <a:avLst/>
+          </a:prstGeom>
+          <a:solidFill>
+            <a:srgbClr val="FFFFFF"/>
+          </a:solidFill>
+          <a:ln w="12700">
+            <a:solidFill>
+              <a:srgbClr val="D93025"/>
+            </a:solidFill>
+          </a:ln>
+          <a:effectLst/>
+        </p:spPr>
+        <p:txBody>
+          <a:bodyPr rtlCol="0" anchor="ctr" lIns="0" rIns="0" tIns="0" bIns="0" wrap="square"/>
+          <a:lstStyle/>
+          <a:p>
+            <a:pPr algn="ctr"/>
+            <a:r>
+              <a:rPr sz="1200" b="0">
+                <a:solidFill>
+                  <a:srgbClr val="202124"/>
+                </a:solidFill>
+                <a:latin typeface="Helvetica Neue"/>
+              </a:rPr>
+              <a:t>B = 4   +0.081   11/12 seeds</a:t>
+            </a:r>
+          </a:p>
+        </p:txBody>
+      </p:sp>
+      <p:sp>
+        <p:nvSpPr>
+          <p:cNvPr id="9" name="Rounded Rectangle 8"/>
+          <p:cNvSpPr/>
+          <p:nvPr/>
+        </p:nvSpPr>
+        <p:spPr>
+          <a:xfrm>
+            <a:off x="649224" y="2852928"/>
+            <a:ext cx="3337560" cy="384048"/>
+          </a:xfrm>
+          <a:prstGeom prst="roundRect">
+            <a:avLst/>
+          </a:prstGeom>
+          <a:solidFill>
+            <a:srgbClr val="FFFFFF"/>
+          </a:solidFill>
+          <a:ln w="12700">
+            <a:solidFill>
+              <a:srgbClr val="D93025"/>
+            </a:solidFill>
+          </a:ln>
+          <a:effectLst/>
+        </p:spPr>
+        <p:txBody>
+          <a:bodyPr rtlCol="0" anchor="ctr" lIns="0" rIns="0" tIns="0" bIns="0" wrap="square"/>
+          <a:lstStyle/>
+          <a:p>
+            <a:pPr algn="ctr"/>
+            <a:r>
+              <a:rPr sz="1200" b="0">
+                <a:solidFill>
+                  <a:srgbClr val="202124"/>
+                </a:solidFill>
+                <a:latin typeface="Helvetica Neue"/>
+              </a:rPr>
+              <a:t>XXZ anchor   +0.035   12/12 seeds</a:t>
+            </a:r>
+          </a:p>
+        </p:txBody>
+      </p:sp>
+      <p:sp>
+        <p:nvSpPr>
+          <p:cNvPr id="10" name="TextBox 9"/>
+          <p:cNvSpPr txBox="1"/>
+          <p:nvPr/>
+        </p:nvSpPr>
+        <p:spPr>
+          <a:xfrm>
+            <a:off x="649224" y="3328416"/>
+            <a:ext cx="3337560" cy="384048"/>
+          </a:xfrm>
+          <a:prstGeom prst="rect">
+            <a:avLst/>
+          </a:prstGeom>
+          <a:noFill/>
+        </p:spPr>
+        <p:txBody>
+          <a:bodyPr wrap="square">
+            <a:spAutoFit/>
+          </a:bodyPr>
+          <a:lstStyle/>
+          <a:p>
+            <a:pPr algn="l">
+              <a:lnSpc>
+                <a:spcPct val="100000"/>
+              </a:lnSpc>
+              <a:spcAft>
+                <a:spcPts val="0"/>
+              </a:spcAft>
+            </a:pPr>
+            <a:r>
+              <a:rPr sz="1050" b="0" i="0">
+                <a:solidFill>
+                  <a:srgbClr val="5F6368"/>
+                </a:solidFill>
+                <a:latin typeface="Helvetica Neue"/>
+              </a:rPr>
+              <a:t>small budget, the XXZ anchor, and the baseline (slight)</a:t>
+            </a:r>
+          </a:p>
+        </p:txBody>
+      </p:sp>
+      <p:sp>
+        <p:nvSpPr>
+          <p:cNvPr id="11" name="Rounded Rectangle 10"/>
+          <p:cNvSpPr/>
+          <p:nvPr/>
+        </p:nvSpPr>
+        <p:spPr>
+          <a:xfrm>
+            <a:off x="4251959" y="1463040"/>
+            <a:ext cx="3611880" cy="2359152"/>
+          </a:xfrm>
+          <a:prstGeom prst="roundRect">
+            <a:avLst/>
+          </a:prstGeom>
+          <a:solidFill>
+            <a:srgbClr val="F1F3F4"/>
+          </a:solidFill>
+          <a:ln w="19050">
+            <a:solidFill>
+              <a:srgbClr val="9AA0A6"/>
+            </a:solidFill>
+          </a:ln>
+          <a:effectLst/>
+        </p:spPr>
+        <p:txBody>
+          <a:bodyPr rtlCol="0" anchor="ctr"/>
+          <a:lstStyle/>
+          <a:p>
+            <a:pPr algn="ctr"/>
+          </a:p>
+        </p:txBody>
+      </p:sp>
+      <p:sp>
+        <p:nvSpPr>
+          <p:cNvPr id="12" name="TextBox 11"/>
+          <p:cNvSpPr txBox="1"/>
+          <p:nvPr/>
+        </p:nvSpPr>
+        <p:spPr>
+          <a:xfrm>
+            <a:off x="4398263" y="1536192"/>
+            <a:ext cx="3337560" cy="365760"/>
+          </a:xfrm>
+          <a:prstGeom prst="rect">
+            <a:avLst/>
+          </a:prstGeom>
+          <a:noFill/>
+        </p:spPr>
+        <p:txBody>
+          <a:bodyPr wrap="square">
+            <a:spAutoFit/>
+          </a:bodyPr>
+          <a:lstStyle/>
+          <a:p>
+            <a:pPr algn="l">
+              <a:lnSpc>
+                <a:spcPct val="100000"/>
+              </a:lnSpc>
+              <a:spcAft>
+                <a:spcPts val="0"/>
+              </a:spcAft>
+            </a:pPr>
+            <a:r>
+              <a:rPr sz="1450" b="1" i="0">
+                <a:solidFill>
+                  <a:srgbClr val="9AA0A6"/>
+                </a:solidFill>
+                <a:latin typeface="Helvetica Neue"/>
+              </a:rPr>
+              <a:t>No difference detected</a:t>
+            </a:r>
+          </a:p>
+        </p:txBody>
+      </p:sp>
+      <p:sp>
+        <p:nvSpPr>
+          <p:cNvPr id="13" name="Rounded Rectangle 12"/>
+          <p:cNvSpPr/>
+          <p:nvPr/>
+        </p:nvSpPr>
+        <p:spPr>
+          <a:xfrm>
+            <a:off x="4398263" y="1938528"/>
+            <a:ext cx="3337560" cy="384048"/>
+          </a:xfrm>
+          <a:prstGeom prst="roundRect">
+            <a:avLst/>
+          </a:prstGeom>
+          <a:solidFill>
+            <a:srgbClr val="FFFFFF"/>
+          </a:solidFill>
+          <a:ln w="12700">
+            <a:solidFill>
+              <a:srgbClr val="9AA0A6"/>
+            </a:solidFill>
+          </a:ln>
+          <a:effectLst/>
+        </p:spPr>
+        <p:txBody>
+          <a:bodyPr rtlCol="0" anchor="ctr" lIns="0" rIns="0" tIns="0" bIns="0" wrap="square"/>
+          <a:lstStyle/>
+          <a:p>
+            <a:pPr algn="ctr"/>
+            <a:r>
+              <a:rPr sz="1200" b="0">
+                <a:solidFill>
+                  <a:srgbClr val="202124"/>
+                </a:solidFill>
+                <a:latin typeface="Helvetica Neue"/>
+              </a:rPr>
+              <a:t>B = 16   -0.002   9/12 seeds</a:t>
+            </a:r>
+          </a:p>
+        </p:txBody>
+      </p:sp>
+      <p:sp>
+        <p:nvSpPr>
+          <p:cNvPr id="14" name="Rounded Rectangle 13"/>
+          <p:cNvSpPr/>
+          <p:nvPr/>
+        </p:nvSpPr>
+        <p:spPr>
+          <a:xfrm>
+            <a:off x="4398263" y="2395728"/>
+            <a:ext cx="3337560" cy="384048"/>
+          </a:xfrm>
+          <a:prstGeom prst="roundRect">
+            <a:avLst/>
+          </a:prstGeom>
+          <a:solidFill>
+            <a:srgbClr val="FFFFFF"/>
+          </a:solidFill>
+          <a:ln w="12700">
+            <a:solidFill>
+              <a:srgbClr val="9AA0A6"/>
+            </a:solidFill>
+          </a:ln>
+          <a:effectLst/>
+        </p:spPr>
+        <p:txBody>
+          <a:bodyPr rtlCol="0" anchor="ctr" lIns="0" rIns="0" tIns="0" bIns="0" wrap="square"/>
+          <a:lstStyle/>
+          <a:p>
+            <a:pPr algn="ctr"/>
+            <a:r>
+              <a:rPr sz="1200" b="0">
+                <a:solidFill>
+                  <a:srgbClr val="202124"/>
+                </a:solidFill>
+                <a:latin typeface="Helvetica Neue"/>
+              </a:rPr>
+              <a:t>Low tier   -0.034   4/12 seeds</a:t>
+            </a:r>
+          </a:p>
+        </p:txBody>
+      </p:sp>
+      <p:sp>
+        <p:nvSpPr>
+          <p:cNvPr id="15" name="TextBox 14"/>
+          <p:cNvSpPr txBox="1"/>
+          <p:nvPr/>
+        </p:nvSpPr>
+        <p:spPr>
+          <a:xfrm>
+            <a:off x="4398263" y="2871216"/>
+            <a:ext cx="3337560" cy="384048"/>
+          </a:xfrm>
+          <a:prstGeom prst="rect">
+            <a:avLst/>
+          </a:prstGeom>
+          <a:noFill/>
+        </p:spPr>
+        <p:txBody>
+          <a:bodyPr wrap="square">
+            <a:spAutoFit/>
+          </a:bodyPr>
+          <a:lstStyle/>
+          <a:p>
+            <a:pPr algn="l">
+              <a:lnSpc>
+                <a:spcPct val="100000"/>
+              </a:lnSpc>
+              <a:spcAft>
+                <a:spcPts val="0"/>
+              </a:spcAft>
+            </a:pPr>
+            <a:r>
+              <a:rPr sz="1050" b="0" i="0">
+                <a:solidFill>
+                  <a:srgbClr val="5F6368"/>
+                </a:solidFill>
+                <a:latin typeface="Helvetica Neue"/>
+              </a:rPr>
+              <a:t>a wide open batch, or the Low tier</a:t>
+            </a:r>
+          </a:p>
+        </p:txBody>
+      </p:sp>
+      <p:sp>
+        <p:nvSpPr>
+          <p:cNvPr id="16" name="Rounded Rectangle 15"/>
+          <p:cNvSpPr/>
+          <p:nvPr/>
+        </p:nvSpPr>
+        <p:spPr>
+          <a:xfrm>
+            <a:off x="8001000" y="1463040"/>
+            <a:ext cx="3611880" cy="2359152"/>
+          </a:xfrm>
+          <a:prstGeom prst="roundRect">
+            <a:avLst/>
+          </a:prstGeom>
+          <a:solidFill>
+            <a:srgbClr val="E8F0FE"/>
+          </a:solidFill>
+          <a:ln w="19050">
+            <a:solidFill>
+              <a:srgbClr val="1A73E8"/>
+            </a:solidFill>
+          </a:ln>
+          <a:effectLst/>
+        </p:spPr>
+        <p:txBody>
+          <a:bodyPr rtlCol="0" anchor="ctr"/>
+          <a:lstStyle/>
+          <a:p>
+            <a:pPr algn="ctr"/>
+          </a:p>
+        </p:txBody>
+      </p:sp>
+      <p:sp>
+        <p:nvSpPr>
+          <p:cNvPr id="17" name="TextBox 16"/>
+          <p:cNvSpPr txBox="1"/>
+          <p:nvPr/>
+        </p:nvSpPr>
+        <p:spPr>
+          <a:xfrm>
+            <a:off x="8147304" y="1536192"/>
+            <a:ext cx="3337560" cy="365760"/>
+          </a:xfrm>
+          <a:prstGeom prst="rect">
+            <a:avLst/>
+          </a:prstGeom>
+          <a:noFill/>
+        </p:spPr>
+        <p:txBody>
+          <a:bodyPr wrap="square">
+            <a:spAutoFit/>
+          </a:bodyPr>
+          <a:lstStyle/>
+          <a:p>
+            <a:pPr algn="l">
+              <a:lnSpc>
+                <a:spcPct val="100000"/>
+              </a:lnSpc>
+              <a:spcAft>
+                <a:spcPts val="0"/>
+              </a:spcAft>
+            </a:pPr>
+            <a:r>
+              <a:rPr sz="1450" b="1" i="0">
+                <a:solidFill>
+                  <a:srgbClr val="1A73E8"/>
+                </a:solidFill>
+                <a:latin typeface="Helvetica Neue"/>
+              </a:rPr>
+              <a:t>Open beats Closed</a:t>
+            </a:r>
+          </a:p>
+        </p:txBody>
+      </p:sp>
+      <p:sp>
+        <p:nvSpPr>
+          <p:cNvPr id="18" name="Rounded Rectangle 17"/>
+          <p:cNvSpPr/>
+          <p:nvPr/>
+        </p:nvSpPr>
+        <p:spPr>
+          <a:xfrm>
+            <a:off x="8147304" y="1938528"/>
+            <a:ext cx="3337560" cy="384048"/>
+          </a:xfrm>
+          <a:prstGeom prst="roundRect">
+            <a:avLst/>
+          </a:prstGeom>
+          <a:solidFill>
+            <a:srgbClr val="FFFFFF"/>
+          </a:solidFill>
+          <a:ln w="12700">
+            <a:solidFill>
+              <a:srgbClr val="1A73E8"/>
+            </a:solidFill>
+          </a:ln>
+          <a:effectLst/>
+        </p:spPr>
+        <p:txBody>
+          <a:bodyPr rtlCol="0" anchor="ctr" lIns="0" rIns="0" tIns="0" bIns="0" wrap="square"/>
+          <a:lstStyle/>
+          <a:p>
+            <a:pPr algn="ctr"/>
+            <a:r>
+              <a:rPr sz="1200" b="0">
+                <a:solidFill>
+                  <a:srgbClr val="202124"/>
+                </a:solidFill>
+                <a:latin typeface="Helvetica Neue"/>
+              </a:rPr>
+              <a:t>6 qubits   -0.049   0/12 seeds</a:t>
+            </a:r>
+          </a:p>
+        </p:txBody>
+      </p:sp>
+      <p:sp>
+        <p:nvSpPr>
+          <p:cNvPr id="19" name="Rounded Rectangle 18"/>
+          <p:cNvSpPr/>
+          <p:nvPr/>
+        </p:nvSpPr>
+        <p:spPr>
+          <a:xfrm>
+            <a:off x="8147304" y="2395728"/>
+            <a:ext cx="3337560" cy="384048"/>
+          </a:xfrm>
+          <a:prstGeom prst="roundRect">
+            <a:avLst/>
+          </a:prstGeom>
+          <a:solidFill>
+            <a:srgbClr val="FFFFFF"/>
+          </a:solidFill>
+          <a:ln w="12700">
+            <a:solidFill>
+              <a:srgbClr val="1A73E8"/>
+            </a:solidFill>
+          </a:ln>
+          <a:effectLst/>
+        </p:spPr>
+        <p:txBody>
+          <a:bodyPr rtlCol="0" anchor="ctr" lIns="0" rIns="0" tIns="0" bIns="0" wrap="square"/>
+          <a:lstStyle/>
+          <a:p>
+            <a:pPr algn="ctr"/>
+            <a:r>
+              <a:rPr sz="1200" b="0">
+                <a:solidFill>
+                  <a:srgbClr val="202124"/>
+                </a:solidFill>
+                <a:latin typeface="Helvetica Neue"/>
+              </a:rPr>
+              <a:t>8 qubits   -0.075   1/12 seeds</a:t>
+            </a:r>
+          </a:p>
+        </p:txBody>
+      </p:sp>
+      <p:sp>
+        <p:nvSpPr>
+          <p:cNvPr id="20" name="TextBox 19"/>
+          <p:cNvSpPr txBox="1"/>
+          <p:nvPr/>
+        </p:nvSpPr>
+        <p:spPr>
+          <a:xfrm>
+            <a:off x="8147304" y="2871216"/>
+            <a:ext cx="3337560" cy="384048"/>
+          </a:xfrm>
+          <a:prstGeom prst="rect">
+            <a:avLst/>
+          </a:prstGeom>
+          <a:noFill/>
+        </p:spPr>
+        <p:txBody>
+          <a:bodyPr wrap="square">
+            <a:spAutoFit/>
+          </a:bodyPr>
+          <a:lstStyle/>
+          <a:p>
+            <a:pPr algn="l">
+              <a:lnSpc>
+                <a:spcPct val="100000"/>
+              </a:lnSpc>
+              <a:spcAft>
+                <a:spcPts val="0"/>
+              </a:spcAft>
+            </a:pPr>
+            <a:r>
+              <a:rPr sz="1050" b="0" i="0">
+                <a:solidFill>
+                  <a:srgbClr val="5F6368"/>
+                </a:solidFill>
+                <a:latin typeface="Helvetica Neue"/>
+              </a:rPr>
+              <a:t>wider registers; closed-loop validity 92% → 70%, 77%</a:t>
+            </a:r>
+          </a:p>
+        </p:txBody>
+      </p:sp>
+      <p:sp>
+        <p:nvSpPr>
+          <p:cNvPr id="21" name="Rounded Rectangle 20"/>
+          <p:cNvSpPr/>
+          <p:nvPr/>
+        </p:nvSpPr>
+        <p:spPr>
+          <a:xfrm>
+            <a:off x="502920" y="3931920"/>
+            <a:ext cx="11155680" cy="566928"/>
           </a:xfrm>
           <a:prstGeom prst="roundRect">
             <a:avLst/>
@@ -11266,7 +11421,7 @@
           <a:solidFill>
             <a:srgbClr val="E6F4EA"/>
           </a:solidFill>
-          <a:ln w="15875">
+          <a:ln w="19050">
             <a:solidFill>
               <a:srgbClr val="188038"/>
             </a:solidFill>
@@ -11283,14 +11438,14 @@
       </p:sp>
       <p:sp>
         <p:nvSpPr>
-          <p:cNvPr id="8" name="TextBox 7"/>
+          <p:cNvPr id="22" name="TextBox 21"/>
           <p:cNvSpPr txBox="1"/>
           <p:nvPr/>
         </p:nvSpPr>
         <p:spPr>
           <a:xfrm>
-            <a:off x="630936" y="4050791"/>
-            <a:ext cx="5733288" cy="1728215"/>
+            <a:off x="658368" y="3995928"/>
+            <a:ext cx="10881360" cy="457200"/>
           </a:xfrm>
           <a:prstGeom prst="rect">
             <a:avLst/>
@@ -11308,17 +11463,100 @@
                 <a:spcPct val="100000"/>
               </a:lnSpc>
               <a:spcAft>
-                <a:spcPts val="300"/>
-              </a:spcAft>
-            </a:pPr>
-            <a:r>
-              <a:rPr sz="1200" b="1" i="0">
+                <a:spcPts val="0"/>
+              </a:spcAft>
+            </a:pPr>
+            <a:r>
+              <a:rPr sz="1250" b="1" i="0">
                 <a:solidFill>
                   <a:srgbClr val="188038"/>
                 </a:solidFill>
                 <a:latin typeface="Helvetica Neue"/>
               </a:rPr>
-              <a:t>Across the tested one-factor slices</a:t>
+              <a:t>Across the tested one-factor slices, </a:t>
+            </a:r>
+            <a:r>
+              <a:rPr sz="1250" b="0" i="0">
+                <a:solidFill>
+                  <a:srgbClr val="202124"/>
+                </a:solidFill>
+                <a:latin typeface="Helvetica Neue"/>
+              </a:rPr>
+              <a:t>the Open − Random advantage is the robust finding: positive in all 7 tested conditions, significant in 5. The closed-loop advantage is budget-, width-, Hamiltonian- and model-dependent — not a general result.</a:t>
+            </a:r>
+          </a:p>
+        </p:txBody>
+      </p:sp>
+      <p:sp>
+        <p:nvSpPr>
+          <p:cNvPr id="23" name="Rounded Rectangle 22"/>
+          <p:cNvSpPr/>
+          <p:nvPr/>
+        </p:nvSpPr>
+        <p:spPr>
+          <a:xfrm>
+            <a:off x="502920" y="4617720"/>
+            <a:ext cx="6675120" cy="1234440"/>
+          </a:xfrm>
+          <a:prstGeom prst="roundRect">
+            <a:avLst/>
+          </a:prstGeom>
+          <a:solidFill>
+            <a:srgbClr val="FEF7E0"/>
+          </a:solidFill>
+          <a:ln w="15875">
+            <a:solidFill>
+              <a:srgbClr val="F9AB00"/>
+            </a:solidFill>
+          </a:ln>
+          <a:effectLst/>
+        </p:spPr>
+        <p:txBody>
+          <a:bodyPr rtlCol="0" anchor="ctr"/>
+          <a:lstStyle/>
+          <a:p>
+            <a:pPr algn="ctr"/>
+          </a:p>
+        </p:txBody>
+      </p:sp>
+      <p:sp>
+        <p:nvSpPr>
+          <p:cNvPr id="24" name="TextBox 23"/>
+          <p:cNvSpPr txBox="1"/>
+          <p:nvPr/>
+        </p:nvSpPr>
+        <p:spPr>
+          <a:xfrm>
+            <a:off x="649224" y="4709160"/>
+            <a:ext cx="6382512" cy="1051560"/>
+          </a:xfrm>
+          <a:prstGeom prst="rect">
+            <a:avLst/>
+          </a:prstGeom>
+          <a:noFill/>
+        </p:spPr>
+        <p:txBody>
+          <a:bodyPr wrap="square">
+            <a:spAutoFit/>
+          </a:bodyPr>
+          <a:lstStyle/>
+          <a:p>
+            <a:pPr algn="l">
+              <a:lnSpc>
+                <a:spcPct val="100000"/>
+              </a:lnSpc>
+              <a:spcAft>
+                <a:spcPts val="400"/>
+              </a:spcAft>
+            </a:pPr>
+            <a:r>
+              <a:rPr sz="1250" b="1" i="0">
+                <a:solidFill>
+                  <a:srgbClr val="F9AB00"/>
+                </a:solidFill>
+                <a:latin typeface="Helvetica Neue"/>
+              </a:rPr>
+              <a:t>Proposal validity can confound method differences</a:t>
             </a:r>
           </a:p>
           <a:p>
@@ -11327,69 +11565,31 @@
                 <a:spcPct val="100000"/>
               </a:lnSpc>
               <a:spcAft>
-                <a:spcPts val="300"/>
-              </a:spcAft>
-            </a:pPr>
-            <a:r>
-              <a:rPr sz="1000" b="0" i="0">
+                <a:spcPts val="400"/>
+              </a:spcAft>
+            </a:pPr>
+            <a:r>
+              <a:rPr sz="1150" b="0" i="0">
                 <a:solidFill>
                   <a:srgbClr val="202124"/>
                 </a:solidFill>
                 <a:latin typeface="Helvetica Neue"/>
               </a:rPr>
-              <a:t>•  the semantic Open advantage is the most robust finding — same sign in every slice, significant in most conditions;</a:t>
-            </a:r>
-          </a:p>
-          <a:p>
-            <a:pPr>
-              <a:lnSpc>
-                <a:spcPct val="100000"/>
-              </a:lnSpc>
-              <a:spcAft>
-                <a:spcPts val="300"/>
-              </a:spcAft>
-            </a:pPr>
-            <a:r>
-              <a:rPr sz="1000" b="0" i="0">
-                <a:solidFill>
-                  <a:srgbClr val="202124"/>
-                </a:solidFill>
-                <a:latin typeface="Helvetica Neue"/>
-              </a:rPr>
-              <a:t>•  the additional closed-loop advantage is budget-, width-, Hamiltonian- and model-dependent — it is not a general result;</a:t>
-            </a:r>
-          </a:p>
-          <a:p>
-            <a:pPr>
-              <a:lnSpc>
-                <a:spcPct val="100000"/>
-              </a:lnSpc>
-              <a:spcAft>
-                <a:spcPts val="300"/>
-              </a:spcAft>
-            </a:pPr>
-            <a:r>
-              <a:rPr sz="1000" b="0" i="0">
-                <a:solidFill>
-                  <a:srgbClr val="202124"/>
-                </a:solidFill>
-                <a:latin typeface="Helvetica Neue"/>
-              </a:rPr>
-              <a:t>•  proposal validity can confound observed method differences: an invalid proposal is spent as a random draw.</a:t>
-            </a:r>
-          </a:p>
-        </p:txBody>
-      </p:sp>
-      <p:sp>
-        <p:nvSpPr>
-          <p:cNvPr id="9" name="Rounded Rectangle 8"/>
+              <a:t>An invalid proposal is replaced by a random draw. Closed-loop validity fell to 70% at 6 qubits; Low's open batch was only 38% valid. Part of what looks like a method effect is a generation-validity effect.</a:t>
+            </a:r>
+          </a:p>
+        </p:txBody>
+      </p:sp>
+      <p:sp>
+        <p:nvSpPr>
+          <p:cNvPr id="25" name="Rounded Rectangle 24"/>
           <p:cNvSpPr/>
           <p:nvPr/>
         </p:nvSpPr>
         <p:spPr>
           <a:xfrm>
-            <a:off x="6675120" y="3977639"/>
-            <a:ext cx="4983480" cy="1874519"/>
+            <a:off x="7315200" y="4617720"/>
+            <a:ext cx="4343400" cy="1234440"/>
           </a:xfrm>
           <a:prstGeom prst="roundRect">
             <a:avLst/>
@@ -11414,14 +11614,14 @@
       </p:sp>
       <p:sp>
         <p:nvSpPr>
-          <p:cNvPr id="10" name="TextBox 9"/>
+          <p:cNvPr id="26" name="TextBox 25"/>
           <p:cNvSpPr txBox="1"/>
           <p:nvPr/>
         </p:nvSpPr>
         <p:spPr>
           <a:xfrm>
-            <a:off x="6803136" y="4050791"/>
-            <a:ext cx="4727448" cy="1728215"/>
+            <a:off x="7461504" y="4709160"/>
+            <a:ext cx="4050792" cy="1051560"/>
           </a:xfrm>
           <a:prstGeom prst="rect">
             <a:avLst/>
@@ -11439,17 +11639,17 @@
                 <a:spcPct val="100000"/>
               </a:lnSpc>
               <a:spcAft>
-                <a:spcPts val="300"/>
-              </a:spcAft>
-            </a:pPr>
-            <a:r>
-              <a:rPr sz="1200" b="1" i="0">
+                <a:spcPts val="400"/>
+              </a:spcAft>
+            </a:pPr>
+            <a:r>
+              <a:rPr sz="1250" b="1" i="0">
                 <a:solidFill>
                   <a:srgbClr val="1F2A44"/>
                 </a:solidFill>
                 <a:latin typeface="Helvetica Neue"/>
               </a:rPr>
-              <a:t>Key limitations</a:t>
+              <a:t>Limitations</a:t>
             </a:r>
           </a:p>
           <a:p>
@@ -11458,107 +11658,31 @@
                 <a:spcPct val="100000"/>
               </a:lnSpc>
               <a:spcAft>
-                <a:spcPts val="200"/>
-              </a:spcAft>
-            </a:pPr>
-            <a:r>
-              <a:rPr sz="1000" b="0" i="0">
+                <a:spcPts val="400"/>
+              </a:spcAft>
+            </a:pPr>
+            <a:r>
+              <a:rPr sz="1150" b="0" i="0">
                 <a:solidFill>
                   <a:srgbClr val="202124"/>
                 </a:solidFill>
                 <a:latin typeface="Helvetica Neue"/>
               </a:rPr>
-              <a:t>•  no interactions; only one non-Ising anchor</a:t>
-            </a:r>
-          </a:p>
-          <a:p>
-            <a:pPr>
-              <a:lnSpc>
-                <a:spcPct val="100000"/>
-              </a:lnSpc>
-              <a:spcAft>
-                <a:spcPts val="200"/>
-              </a:spcAft>
-            </a:pPr>
-            <a:r>
-              <a:rPr sz="1000" b="0" i="0">
-                <a:solidFill>
-                  <a:srgbClr val="202124"/>
-                </a:solidFill>
-                <a:latin typeface="Helvetica Neue"/>
-              </a:rPr>
-              <a:t>•  Low tested only at the baseline physical condition</a:t>
-            </a:r>
-          </a:p>
-          <a:p>
-            <a:pPr>
-              <a:lnSpc>
-                <a:spcPct val="100000"/>
-              </a:lnSpc>
-              <a:spcAft>
-                <a:spcPts val="200"/>
-              </a:spcAft>
-            </a:pPr>
-            <a:r>
-              <a:rPr sz="1000" b="0" i="0">
-                <a:solidFill>
-                  <a:srgbClr val="202124"/>
-                </a:solidFill>
-                <a:latin typeface="Helvetica Neue"/>
-              </a:rPr>
-              <a:t>•  12 paired seeds: a "not detected" cell is not evidence of no effect</a:t>
-            </a:r>
-          </a:p>
-          <a:p>
-            <a:pPr>
-              <a:lnSpc>
-                <a:spcPct val="100000"/>
-              </a:lnSpc>
-              <a:spcAft>
-                <a:spcPts val="200"/>
-              </a:spcAft>
-            </a:pPr>
-            <a:r>
-              <a:rPr sz="1000" b="0" i="0">
-                <a:solidFill>
-                  <a:srgbClr val="202124"/>
-                </a:solidFill>
-                <a:latin typeface="Helvetica Neue"/>
-              </a:rPr>
-              <a:t>•  noiseless state-vector simulation</a:t>
-            </a:r>
-          </a:p>
-          <a:p>
-            <a:pPr>
-              <a:lnSpc>
-                <a:spcPct val="100000"/>
-              </a:lnSpc>
-              <a:spcAft>
-                <a:spcPts val="200"/>
-              </a:spcAft>
-            </a:pPr>
-            <a:r>
-              <a:rPr sz="1000" b="0" i="0">
-                <a:solidFill>
-                  <a:srgbClr val="202124"/>
-                </a:solidFill>
-                <a:latin typeface="Helvetica Neue"/>
-              </a:rPr>
-              <a:t>•  qubit count and circuit size scale together</a:t>
-            </a:r>
-          </a:p>
-        </p:txBody>
-      </p:sp>
-      <p:sp>
-        <p:nvSpPr>
-          <p:cNvPr id="11" name="Rectangle 10"/>
+              <a:t>no interactions · one XXZ anchor · Low only at the baseline condition · 12 paired seeds · noiseless simulation · qubit count and circuit size scale together · not tested: everything else</a:t>
+            </a:r>
+          </a:p>
+        </p:txBody>
+      </p:sp>
+      <p:sp>
+        <p:nvSpPr>
+          <p:cNvPr id="27" name="Rectangle 26"/>
           <p:cNvSpPr/>
           <p:nvPr/>
         </p:nvSpPr>
         <p:spPr>
           <a:xfrm>
-            <a:off x="502920" y="5989320"/>
-            <a:ext cx="73152" cy="329184"/>
+            <a:off x="502920" y="5943600"/>
+            <a:ext cx="73152" cy="365760"/>
           </a:xfrm>
           <a:prstGeom prst="rect">
             <a:avLst/>
@@ -11581,14 +11705,14 @@
       </p:sp>
       <p:sp>
         <p:nvSpPr>
-          <p:cNvPr id="12" name="TextBox 11"/>
+          <p:cNvPr id="28" name="TextBox 27"/>
           <p:cNvSpPr txBox="1"/>
           <p:nvPr/>
         </p:nvSpPr>
         <p:spPr>
           <a:xfrm>
-            <a:off x="685800" y="5971032"/>
-            <a:ext cx="10972800" cy="384048"/>
+            <a:off x="685800" y="5934456"/>
+            <a:ext cx="10972800" cy="402336"/>
           </a:xfrm>
           <a:prstGeom prst="rect">
             <a:avLst/>
@@ -11610,7 +11734,7 @@
               </a:spcAft>
             </a:pPr>
             <a:r>
-              <a:rPr sz="1100" b="1" i="0">
+              <a:rPr sz="1250" b="1" i="0">
                 <a:solidFill>
                   <a:srgbClr val="C5221F"/>
                 </a:solidFill>
@@ -11619,27 +11743,27 @@
               <a:t>Next:  </a:t>
             </a:r>
             <a:r>
-              <a:rPr sz="1100" b="0" i="0">
+              <a:rPr sz="1250" b="0" i="0">
                 <a:solidFill>
                   <a:srgbClr val="202124"/>
                 </a:solidFill>
                 <a:latin typeface="Helvetica Neue"/>
               </a:rPr>
-              <a:t>ranking methods at a fixed budget answers the wrong question for practice — how much budget is actually required?</a:t>
-            </a:r>
-          </a:p>
-        </p:txBody>
-      </p:sp>
-      <p:sp>
-        <p:nvSpPr>
-          <p:cNvPr id="13" name="TextBox 12"/>
+              <a:t>ranking methods at a fixed budget is the wrong question for practice — how much budget is actually required?</a:t>
+            </a:r>
+          </a:p>
+        </p:txBody>
+      </p:sp>
+      <p:sp>
+        <p:nvSpPr>
+          <p:cNvPr id="29" name="TextBox 28"/>
           <p:cNvSpPr txBox="1"/>
           <p:nvPr/>
         </p:nvSpPr>
         <p:spPr>
           <a:xfrm>
-            <a:off x="502920" y="6400800"/>
-            <a:ext cx="11155680" cy="320040"/>
+            <a:off x="502920" y="6419088"/>
+            <a:ext cx="11155680" cy="301752"/>
           </a:xfrm>
           <a:prstGeom prst="rect">
             <a:avLst/>
@@ -11661,13 +11785,13 @@
               </a:spcAft>
             </a:pPr>
             <a:r>
-              <a:rPr sz="850" b="0" i="0">
+              <a:rPr sz="950" b="0" i="0">
                 <a:solidFill>
                   <a:srgbClr val="5F6368"/>
                 </a:solidFill>
                 <a:latin typeface="Helvetica Neue"/>
               </a:rPr>
-              <a:t>"robust" = same sign as the baseline and p &lt; 0.05; "reversed" = p &lt; 0.05 with the opposite sign; "not detected" = p ≥ 0.05; "condition-dependent" = the verdict differs across the slice's levels.</a:t>
+              <a:t>"beats" = p &lt; 0.05 in the exact paired Wilcoxon test over 12 seeds; "not detected" = p ≥ 0.05, which is not evidence of no effect. Values = mean paired difference in trash fidelity.</a:t>
             </a:r>
           </a:p>
         </p:txBody>
